--- a/week_04_stacks_queues/stacks_queues_dsa.pptx
+++ b/week_04_stacks_queues/stacks_queues_dsa.pptx
@@ -22,6 +22,7 @@
     <p:sldId id="270" r:id="rId21"/>
     <p:sldId id="271" r:id="rId22"/>
     <p:sldId id="272" r:id="rId23"/>
+    <p:sldId id="273" r:id="rId24"/>
   </p:sldIdLst>
   <p:sldSz cx="12191695" cy="6858000" type="screen4x3"/>
   <p:notesSz cx="6858000" cy="9144000"/>
@@ -3880,7 +3881,7 @@
                 </a:solidFill>
                 <a:latin typeface="Calibri"/>
               </a:rPr>
-              <a:t>Slide 10 / 17</a:t>
+              <a:t>Slide 10 / 18</a:t>
             </a:r>
           </a:p>
         </p:txBody>
@@ -4871,7 +4872,7 @@
                 </a:solidFill>
                 <a:latin typeface="Calibri"/>
               </a:rPr>
-              <a:t>Slide 11 / 17</a:t>
+              <a:t>Slide 11 / 18</a:t>
             </a:r>
           </a:p>
         </p:txBody>
@@ -5665,7 +5666,7 @@
                 </a:solidFill>
                 <a:latin typeface="Calibri"/>
               </a:rPr>
-              <a:t>6.  Double-Ended Queue (Deque)</a:t>
+              <a:t>Circular Buffer: Step-by-Step Pointer Trace</a:t>
             </a:r>
           </a:p>
         </p:txBody>
@@ -5700,7 +5701,7 @@
                 </a:solidFill>
                 <a:latin typeface="Calibri"/>
               </a:rPr>
-              <a:t>Linear structure supporting insertions and deletions at both ends</a:t>
+              <a:t>Visualizing Front and Rear pointer wrapping with a capacity of 4</a:t>
             </a:r>
           </a:p>
         </p:txBody>
@@ -5814,447 +5815,23 @@
                 </a:solidFill>
                 <a:latin typeface="Calibri"/>
               </a:rPr>
-              <a:t>Slide 12 / 17</a:t>
-            </a:r>
-          </a:p>
-        </p:txBody>
-      </p:sp>
-      <p:sp>
-        <p:nvSpPr>
-          <p:cNvPr id="9" name="TextBox 8"/>
-          <p:cNvSpPr txBox="1"/>
-          <p:nvPr/>
-        </p:nvSpPr>
-        <p:spPr>
-          <a:xfrm>
-            <a:off x="822960" y="1325880"/>
-            <a:ext cx="5303520" cy="457200"/>
-          </a:xfrm>
-          <a:prstGeom prst="rect">
-            <a:avLst/>
-          </a:prstGeom>
-          <a:noFill/>
-        </p:spPr>
-        <p:txBody>
-          <a:bodyPr wrap="square" lIns="45720" rIns="45720" tIns="18288" bIns="18288" anchor="t">
-            <a:spAutoFit/>
-          </a:bodyPr>
-          <a:lstStyle/>
-          <a:p>
-            <a:pPr algn="l"/>
-            <a:r>
-              <a:rPr sz="2000" b="1" i="0">
-                <a:solidFill>
-                  <a:srgbClr val="0B2A4A"/>
-                </a:solidFill>
-                <a:latin typeface="Calibri"/>
-              </a:rPr>
-              <a:t>Generalizing Stacks and Queues</a:t>
-            </a:r>
-          </a:p>
-        </p:txBody>
-      </p:sp>
-      <p:sp>
-        <p:nvSpPr>
-          <p:cNvPr id="10" name="TextBox 9"/>
-          <p:cNvSpPr txBox="1"/>
-          <p:nvPr/>
-        </p:nvSpPr>
-        <p:spPr>
-          <a:xfrm>
-            <a:off x="822960" y="1828800"/>
-            <a:ext cx="5303520" cy="2560320"/>
-          </a:xfrm>
-          <a:prstGeom prst="rect">
-            <a:avLst/>
-          </a:prstGeom>
-          <a:noFill/>
-        </p:spPr>
-        <p:txBody>
-          <a:bodyPr wrap="square" lIns="45720" rIns="45720">
-            <a:spAutoFit/>
-          </a:bodyPr>
-          <a:lstStyle/>
-          <a:p>
-            <a:pPr algn="l">
-              <a:lnSpc>
-                <a:spcPct val="135000"/>
-              </a:lnSpc>
-              <a:spcAft>
-                <a:spcPts val="400"/>
-              </a:spcAft>
-            </a:pPr>
-            <a:r>
-              <a:rPr sz="1500" b="1">
-                <a:solidFill>
-                  <a:srgbClr val="127A8A"/>
-                </a:solidFill>
-                <a:latin typeface="Calibri"/>
-              </a:rPr>
-              <a:t>▸  </a:t>
-            </a:r>
-            <a:r>
-              <a:rPr sz="1500" b="1">
-                <a:solidFill>
-                  <a:srgbClr val="0B2A4A"/>
-                </a:solidFill>
-                <a:latin typeface="Calibri"/>
-              </a:rPr>
-              <a:t>Combination of ADTs.  </a:t>
-            </a:r>
-            <a:r>
-              <a:rPr sz="1500">
-                <a:solidFill>
-                  <a:srgbClr val="333D4A"/>
-                </a:solidFill>
-                <a:latin typeface="Calibri"/>
-              </a:rPr>
-              <a:t>Supports push/pop at the front, and push/pop at the rear.</a:t>
-            </a:r>
-          </a:p>
-          <a:p>
-            <a:pPr algn="l">
-              <a:lnSpc>
-                <a:spcPct val="135000"/>
-              </a:lnSpc>
-              <a:spcAft>
-                <a:spcPts val="400"/>
-              </a:spcAft>
-            </a:pPr>
-            <a:r>
-              <a:rPr sz="1500" b="1">
-                <a:solidFill>
-                  <a:srgbClr val="127A8A"/>
-                </a:solidFill>
-                <a:latin typeface="Calibri"/>
-              </a:rPr>
-              <a:t>▸  </a:t>
-            </a:r>
-            <a:r>
-              <a:rPr sz="1500" b="1">
-                <a:solidFill>
-                  <a:srgbClr val="0B2A4A"/>
-                </a:solidFill>
-                <a:latin typeface="Calibri"/>
-              </a:rPr>
-              <a:t>Versatile.  </a:t>
-            </a:r>
-            <a:r>
-              <a:rPr sz="1500">
-                <a:solidFill>
-                  <a:srgbClr val="333D4A"/>
-                </a:solidFill>
-                <a:latin typeface="Calibri"/>
-              </a:rPr>
-              <a:t>Can act as a Stack, a Queue, or both simultaneously.</a:t>
-            </a:r>
-          </a:p>
-          <a:p>
-            <a:pPr algn="l">
-              <a:lnSpc>
-                <a:spcPct val="135000"/>
-              </a:lnSpc>
-              <a:spcAft>
-                <a:spcPts val="400"/>
-              </a:spcAft>
-            </a:pPr>
-            <a:r>
-              <a:rPr sz="1500" b="1">
-                <a:solidFill>
-                  <a:srgbClr val="127A8A"/>
-                </a:solidFill>
-                <a:latin typeface="Calibri"/>
-              </a:rPr>
-              <a:t>▸  </a:t>
-            </a:r>
-            <a:r>
-              <a:rPr sz="1500" b="1">
-                <a:solidFill>
-                  <a:srgbClr val="0B2A4A"/>
-                </a:solidFill>
-                <a:latin typeface="Calibri"/>
-              </a:rPr>
-              <a:t>Python standard.  </a:t>
-            </a:r>
-            <a:r>
-              <a:rPr sz="1500">
-                <a:solidFill>
-                  <a:srgbClr val="333D4A"/>
-                </a:solidFill>
-                <a:latin typeface="Calibri"/>
-              </a:rPr>
-              <a:t>Implemented natively as collections.deque in Python, optimized for fast O(1) appends and pops at both ends.</a:t>
-            </a:r>
-          </a:p>
-        </p:txBody>
-      </p:sp>
-      <p:sp>
-        <p:nvSpPr>
-          <p:cNvPr id="11" name="Rectangle 10"/>
+              <a:t>Slide 12 / 18</a:t>
+            </a:r>
+          </a:p>
+        </p:txBody>
+      </p:sp>
+      <p:sp>
+        <p:nvSpPr>
+          <p:cNvPr id="9" name="Rounded Rectangle 8"/>
           <p:cNvSpPr/>
           <p:nvPr/>
         </p:nvSpPr>
         <p:spPr>
           <a:xfrm>
-            <a:off x="822960" y="4480560"/>
-            <a:ext cx="5303520" cy="1920240"/>
-          </a:xfrm>
-          <a:prstGeom prst="rect">
-            <a:avLst/>
-          </a:prstGeom>
-          <a:solidFill>
-            <a:srgbClr val="1E1E2E"/>
-          </a:solidFill>
-          <a:ln>
-            <a:noFill/>
-          </a:ln>
-          <a:effectLst/>
-        </p:spPr>
-        <p:style>
-          <a:lnRef idx="1">
-            <a:schemeClr val="accent1"/>
-          </a:lnRef>
-          <a:fillRef idx="3">
-            <a:schemeClr val="accent1"/>
-          </a:fillRef>
-          <a:effectRef idx="2">
-            <a:schemeClr val="accent1"/>
-          </a:effectRef>
-          <a:fontRef idx="minor">
-            <a:schemeClr val="lt1"/>
-          </a:fontRef>
-        </p:style>
-        <p:txBody>
-          <a:bodyPr rtlCol="0" anchor="ctr"/>
-          <a:lstStyle/>
-          <a:p>
-            <a:pPr algn="ctr"/>
-          </a:p>
-        </p:txBody>
-      </p:sp>
-      <p:sp>
-        <p:nvSpPr>
-          <p:cNvPr id="12" name="Rectangle 11"/>
-          <p:cNvSpPr/>
-          <p:nvPr/>
-        </p:nvSpPr>
-        <p:spPr>
-          <a:xfrm>
-            <a:off x="822960" y="4480560"/>
-            <a:ext cx="73152" cy="1920240"/>
-          </a:xfrm>
-          <a:prstGeom prst="rect">
-            <a:avLst/>
-          </a:prstGeom>
-          <a:solidFill>
-            <a:srgbClr val="E0A81F"/>
-          </a:solidFill>
-          <a:ln>
-            <a:noFill/>
-          </a:ln>
-          <a:effectLst/>
-        </p:spPr>
-        <p:style>
-          <a:lnRef idx="1">
-            <a:schemeClr val="accent1"/>
-          </a:lnRef>
-          <a:fillRef idx="3">
-            <a:schemeClr val="accent1"/>
-          </a:fillRef>
-          <a:effectRef idx="2">
-            <a:schemeClr val="accent1"/>
-          </a:effectRef>
-          <a:fontRef idx="minor">
-            <a:schemeClr val="lt1"/>
-          </a:fontRef>
-        </p:style>
-        <p:txBody>
-          <a:bodyPr rtlCol="0" anchor="ctr"/>
-          <a:lstStyle/>
-          <a:p>
-            <a:pPr algn="ctr"/>
-          </a:p>
-        </p:txBody>
-      </p:sp>
-      <p:sp>
-        <p:nvSpPr>
-          <p:cNvPr id="13" name="TextBox 12"/>
-          <p:cNvSpPr txBox="1"/>
-          <p:nvPr/>
-        </p:nvSpPr>
-        <p:spPr>
-          <a:xfrm>
-            <a:off x="960120" y="4572000"/>
-            <a:ext cx="5074920" cy="1737360"/>
-          </a:xfrm>
-          <a:prstGeom prst="rect">
-            <a:avLst/>
-          </a:prstGeom>
-          <a:noFill/>
-        </p:spPr>
-        <p:txBody>
-          <a:bodyPr wrap="square">
-            <a:spAutoFit/>
-          </a:bodyPr>
-          <a:lstStyle/>
-          <a:p>
-            <a:pPr algn="l">
-              <a:lnSpc>
-                <a:spcPct val="115000"/>
-              </a:lnSpc>
-            </a:pPr>
-            <a:r>
-              <a:rPr sz="1300">
-                <a:solidFill>
-                  <a:srgbClr val="E6E6E6"/>
-                </a:solidFill>
-                <a:latin typeface="Consolas"/>
-              </a:rPr>
-              <a:t>from collections import deque</a:t>
-            </a:r>
-          </a:p>
-          <a:p>
-            <a:pPr algn="l">
-              <a:lnSpc>
-                <a:spcPct val="115000"/>
-              </a:lnSpc>
-            </a:pPr>
-            <a:r>
-              <a:rPr sz="1300">
-                <a:solidFill>
-                  <a:srgbClr val="E6E6E6"/>
-                </a:solidFill>
-                <a:latin typeface="Consolas"/>
-              </a:rPr>
-              <a:t> </a:t>
-            </a:r>
-          </a:p>
-          <a:p>
-            <a:pPr algn="l">
-              <a:lnSpc>
-                <a:spcPct val="115000"/>
-              </a:lnSpc>
-            </a:pPr>
-            <a:r>
-              <a:rPr sz="1300">
-                <a:solidFill>
-                  <a:srgbClr val="E6E6E6"/>
-                </a:solidFill>
-                <a:latin typeface="Consolas"/>
-              </a:rPr>
-              <a:t>dq = deque()          # create deque</a:t>
-            </a:r>
-          </a:p>
-          <a:p>
-            <a:pPr algn="l">
-              <a:lnSpc>
-                <a:spcPct val="115000"/>
-              </a:lnSpc>
-            </a:pPr>
-            <a:r>
-              <a:rPr sz="1300">
-                <a:solidFill>
-                  <a:srgbClr val="E6E6E6"/>
-                </a:solidFill>
-                <a:latin typeface="Consolas"/>
-              </a:rPr>
-              <a:t>dq.append(20)         # rear append: [20]</a:t>
-            </a:r>
-          </a:p>
-          <a:p>
-            <a:pPr algn="l">
-              <a:lnSpc>
-                <a:spcPct val="115000"/>
-              </a:lnSpc>
-            </a:pPr>
-            <a:r>
-              <a:rPr sz="1300">
-                <a:solidFill>
-                  <a:srgbClr val="E6E6E6"/>
-                </a:solidFill>
-                <a:latin typeface="Consolas"/>
-              </a:rPr>
-              <a:t>dq.appendleft(10)     # front append: [10, 20]</a:t>
-            </a:r>
-          </a:p>
-          <a:p>
-            <a:pPr algn="l">
-              <a:lnSpc>
-                <a:spcPct val="115000"/>
-              </a:lnSpc>
-            </a:pPr>
-            <a:r>
-              <a:rPr sz="1300">
-                <a:solidFill>
-                  <a:srgbClr val="E6E6E6"/>
-                </a:solidFill>
-                <a:latin typeface="Consolas"/>
-              </a:rPr>
-              <a:t>dq.append(30)         # rear append: [10, 20, 30]</a:t>
-            </a:r>
-          </a:p>
-          <a:p>
-            <a:pPr algn="l">
-              <a:lnSpc>
-                <a:spcPct val="115000"/>
-              </a:lnSpc>
-            </a:pPr>
-            <a:r>
-              <a:rPr sz="1300">
-                <a:solidFill>
-                  <a:srgbClr val="E6E6E6"/>
-                </a:solidFill>
-                <a:latin typeface="Consolas"/>
-              </a:rPr>
-              <a:t> </a:t>
-            </a:r>
-          </a:p>
-          <a:p>
-            <a:pPr algn="l">
-              <a:lnSpc>
-                <a:spcPct val="115000"/>
-              </a:lnSpc>
-            </a:pPr>
-            <a:r>
-              <a:rPr sz="1300">
-                <a:solidFill>
-                  <a:srgbClr val="E6E6E6"/>
-                </a:solidFill>
-                <a:latin typeface="Consolas"/>
-              </a:rPr>
-              <a:t>dq.popleft()          # front remove: returns 10</a:t>
-            </a:r>
-          </a:p>
-          <a:p>
-            <a:pPr algn="l">
-              <a:lnSpc>
-                <a:spcPct val="115000"/>
-              </a:lnSpc>
-            </a:pPr>
-            <a:r>
-              <a:rPr sz="1300">
-                <a:solidFill>
-                  <a:srgbClr val="E6E6E6"/>
-                </a:solidFill>
-                <a:latin typeface="Consolas"/>
-              </a:rPr>
-              <a:t>dq.pop()              # rear remove: returns 30</a:t>
-            </a:r>
-          </a:p>
-        </p:txBody>
-      </p:sp>
-      <p:sp>
-        <p:nvSpPr>
-          <p:cNvPr id="14" name="Rectangle 13"/>
-          <p:cNvSpPr/>
-          <p:nvPr/>
-        </p:nvSpPr>
-        <p:spPr>
-          <a:xfrm>
-            <a:off x="6492240" y="1325880"/>
-            <a:ext cx="5120640" cy="5029200"/>
-          </a:xfrm>
-          <a:prstGeom prst="rect">
+            <a:off x="822960" y="1371600"/>
+            <a:ext cx="2468880" cy="4663440"/>
+          </a:xfrm>
+          <a:prstGeom prst="roundRect">
             <a:avLst/>
           </a:prstGeom>
           <a:solidFill>
@@ -6289,14 +5866,211 @@
       </p:sp>
       <p:sp>
         <p:nvSpPr>
+          <p:cNvPr id="10" name="TextBox 9"/>
+          <p:cNvSpPr txBox="1"/>
+          <p:nvPr/>
+        </p:nvSpPr>
+        <p:spPr>
+          <a:xfrm>
+            <a:off x="822960" y="1508760"/>
+            <a:ext cx="2468880" cy="411480"/>
+          </a:xfrm>
+          <a:prstGeom prst="rect">
+            <a:avLst/>
+          </a:prstGeom>
+          <a:noFill/>
+        </p:spPr>
+        <p:txBody>
+          <a:bodyPr wrap="square" lIns="45720" rIns="45720" tIns="18288" bIns="18288" anchor="t">
+            <a:spAutoFit/>
+          </a:bodyPr>
+          <a:lstStyle/>
+          <a:p>
+            <a:pPr algn="ctr"/>
+            <a:r>
+              <a:rPr sz="1500" b="1" i="0">
+                <a:solidFill>
+                  <a:srgbClr val="0B2A4A"/>
+                </a:solidFill>
+                <a:latin typeface="Calibri"/>
+              </a:rPr>
+              <a:t>1. Initial State</a:t>
+            </a:r>
+          </a:p>
+        </p:txBody>
+      </p:sp>
+      <p:sp>
+        <p:nvSpPr>
+          <p:cNvPr id="11" name="Rectangle 10"/>
+          <p:cNvSpPr/>
+          <p:nvPr/>
+        </p:nvSpPr>
+        <p:spPr>
+          <a:xfrm>
+            <a:off x="1165860" y="2011680"/>
+            <a:ext cx="411480" cy="411480"/>
+          </a:xfrm>
+          <a:prstGeom prst="rect">
+            <a:avLst/>
+          </a:prstGeom>
+          <a:solidFill>
+            <a:srgbClr val="127A8A"/>
+          </a:solidFill>
+          <a:ln w="12700">
+            <a:solidFill>
+              <a:srgbClr val="333D4A"/>
+            </a:solidFill>
+          </a:ln>
+          <a:effectLst/>
+        </p:spPr>
+        <p:style>
+          <a:lnRef idx="1">
+            <a:schemeClr val="accent1"/>
+          </a:lnRef>
+          <a:fillRef idx="3">
+            <a:schemeClr val="accent1"/>
+          </a:fillRef>
+          <a:effectRef idx="2">
+            <a:schemeClr val="accent1"/>
+          </a:effectRef>
+          <a:fontRef idx="minor">
+            <a:schemeClr val="lt1"/>
+          </a:fontRef>
+        </p:style>
+        <p:txBody>
+          <a:bodyPr rtlCol="0" anchor="ctr"/>
+          <a:lstStyle/>
+          <a:p>
+            <a:pPr algn="ctr"/>
+          </a:p>
+        </p:txBody>
+      </p:sp>
+      <p:sp>
+        <p:nvSpPr>
+          <p:cNvPr id="12" name="TextBox 11"/>
+          <p:cNvSpPr txBox="1"/>
+          <p:nvPr/>
+        </p:nvSpPr>
+        <p:spPr>
+          <a:xfrm>
+            <a:off x="1165860" y="2084832"/>
+            <a:ext cx="411480" cy="320040"/>
+          </a:xfrm>
+          <a:prstGeom prst="rect">
+            <a:avLst/>
+          </a:prstGeom>
+          <a:noFill/>
+        </p:spPr>
+        <p:txBody>
+          <a:bodyPr wrap="square" lIns="45720" rIns="45720" tIns="18288" bIns="18288" anchor="t">
+            <a:spAutoFit/>
+          </a:bodyPr>
+          <a:lstStyle/>
+          <a:p>
+            <a:pPr algn="ctr"/>
+            <a:r>
+              <a:rPr sz="1400" b="1" i="0">
+                <a:solidFill>
+                  <a:srgbClr val="FFFFFF"/>
+                </a:solidFill>
+                <a:latin typeface="Calibri"/>
+              </a:rPr>
+              <a:t>A</a:t>
+            </a:r>
+          </a:p>
+        </p:txBody>
+      </p:sp>
+      <p:sp>
+        <p:nvSpPr>
+          <p:cNvPr id="13" name="TextBox 12"/>
+          <p:cNvSpPr txBox="1"/>
+          <p:nvPr/>
+        </p:nvSpPr>
+        <p:spPr>
+          <a:xfrm>
+            <a:off x="1165860" y="2450592"/>
+            <a:ext cx="411480" cy="228600"/>
+          </a:xfrm>
+          <a:prstGeom prst="rect">
+            <a:avLst/>
+          </a:prstGeom>
+          <a:noFill/>
+        </p:spPr>
+        <p:txBody>
+          <a:bodyPr wrap="square" lIns="45720" rIns="45720" tIns="18288" bIns="18288" anchor="t">
+            <a:spAutoFit/>
+          </a:bodyPr>
+          <a:lstStyle/>
+          <a:p>
+            <a:pPr algn="ctr"/>
+            <a:r>
+              <a:rPr sz="900" b="0" i="0">
+                <a:solidFill>
+                  <a:srgbClr val="333D4A"/>
+                </a:solidFill>
+                <a:latin typeface="Calibri"/>
+              </a:rPr>
+              <a:t>0</a:t>
+            </a:r>
+          </a:p>
+        </p:txBody>
+      </p:sp>
+      <p:sp>
+        <p:nvSpPr>
+          <p:cNvPr id="14" name="Rectangle 13"/>
+          <p:cNvSpPr/>
+          <p:nvPr/>
+        </p:nvSpPr>
+        <p:spPr>
+          <a:xfrm>
+            <a:off x="1623060" y="2011680"/>
+            <a:ext cx="411480" cy="411480"/>
+          </a:xfrm>
+          <a:prstGeom prst="rect">
+            <a:avLst/>
+          </a:prstGeom>
+          <a:solidFill>
+            <a:srgbClr val="FFFFFF"/>
+          </a:solidFill>
+          <a:ln w="12700">
+            <a:solidFill>
+              <a:srgbClr val="333D4A"/>
+            </a:solidFill>
+          </a:ln>
+          <a:effectLst/>
+        </p:spPr>
+        <p:style>
+          <a:lnRef idx="1">
+            <a:schemeClr val="accent1"/>
+          </a:lnRef>
+          <a:fillRef idx="3">
+            <a:schemeClr val="accent1"/>
+          </a:fillRef>
+          <a:effectRef idx="2">
+            <a:schemeClr val="accent1"/>
+          </a:effectRef>
+          <a:fontRef idx="minor">
+            <a:schemeClr val="lt1"/>
+          </a:fontRef>
+        </p:style>
+        <p:txBody>
+          <a:bodyPr rtlCol="0" anchor="ctr"/>
+          <a:lstStyle/>
+          <a:p>
+            <a:pPr algn="ctr"/>
+          </a:p>
+        </p:txBody>
+      </p:sp>
+      <p:sp>
+        <p:nvSpPr>
           <p:cNvPr id="15" name="TextBox 14"/>
           <p:cNvSpPr txBox="1"/>
           <p:nvPr/>
         </p:nvSpPr>
         <p:spPr>
           <a:xfrm>
-            <a:off x="6492240" y="1554480"/>
-            <a:ext cx="5120640" cy="365760"/>
+            <a:off x="1623060" y="2084832"/>
+            <a:ext cx="411480" cy="320040"/>
           </a:xfrm>
           <a:prstGeom prst="rect">
             <a:avLst/>
@@ -6311,33 +6085,470 @@
           <a:p>
             <a:pPr algn="ctr"/>
             <a:r>
-              <a:rPr sz="1600" b="1" i="0">
+              <a:rPr sz="1400" b="1" i="0">
+                <a:solidFill>
+                  <a:srgbClr val="333D4A"/>
+                </a:solidFill>
+                <a:latin typeface="Calibri"/>
+              </a:rPr>
+              <a:t>B</a:t>
+            </a:r>
+          </a:p>
+        </p:txBody>
+      </p:sp>
+      <p:sp>
+        <p:nvSpPr>
+          <p:cNvPr id="16" name="TextBox 15"/>
+          <p:cNvSpPr txBox="1"/>
+          <p:nvPr/>
+        </p:nvSpPr>
+        <p:spPr>
+          <a:xfrm>
+            <a:off x="1623060" y="2450592"/>
+            <a:ext cx="411480" cy="228600"/>
+          </a:xfrm>
+          <a:prstGeom prst="rect">
+            <a:avLst/>
+          </a:prstGeom>
+          <a:noFill/>
+        </p:spPr>
+        <p:txBody>
+          <a:bodyPr wrap="square" lIns="45720" rIns="45720" tIns="18288" bIns="18288" anchor="t">
+            <a:spAutoFit/>
+          </a:bodyPr>
+          <a:lstStyle/>
+          <a:p>
+            <a:pPr algn="ctr"/>
+            <a:r>
+              <a:rPr sz="900" b="0" i="0">
+                <a:solidFill>
+                  <a:srgbClr val="333D4A"/>
+                </a:solidFill>
+                <a:latin typeface="Calibri"/>
+              </a:rPr>
+              <a:t>1</a:t>
+            </a:r>
+          </a:p>
+        </p:txBody>
+      </p:sp>
+      <p:sp>
+        <p:nvSpPr>
+          <p:cNvPr id="17" name="Rectangle 16"/>
+          <p:cNvSpPr/>
+          <p:nvPr/>
+        </p:nvSpPr>
+        <p:spPr>
+          <a:xfrm>
+            <a:off x="2080260" y="2011680"/>
+            <a:ext cx="411480" cy="411480"/>
+          </a:xfrm>
+          <a:prstGeom prst="rect">
+            <a:avLst/>
+          </a:prstGeom>
+          <a:solidFill>
+            <a:srgbClr val="FFFFFF"/>
+          </a:solidFill>
+          <a:ln w="12700">
+            <a:solidFill>
+              <a:srgbClr val="333D4A"/>
+            </a:solidFill>
+          </a:ln>
+          <a:effectLst/>
+        </p:spPr>
+        <p:style>
+          <a:lnRef idx="1">
+            <a:schemeClr val="accent1"/>
+          </a:lnRef>
+          <a:fillRef idx="3">
+            <a:schemeClr val="accent1"/>
+          </a:fillRef>
+          <a:effectRef idx="2">
+            <a:schemeClr val="accent1"/>
+          </a:effectRef>
+          <a:fontRef idx="minor">
+            <a:schemeClr val="lt1"/>
+          </a:fontRef>
+        </p:style>
+        <p:txBody>
+          <a:bodyPr rtlCol="0" anchor="ctr"/>
+          <a:lstStyle/>
+          <a:p>
+            <a:pPr algn="ctr"/>
+          </a:p>
+        </p:txBody>
+      </p:sp>
+      <p:sp>
+        <p:nvSpPr>
+          <p:cNvPr id="18" name="TextBox 17"/>
+          <p:cNvSpPr txBox="1"/>
+          <p:nvPr/>
+        </p:nvSpPr>
+        <p:spPr>
+          <a:xfrm>
+            <a:off x="2080260" y="2084832"/>
+            <a:ext cx="411480" cy="320040"/>
+          </a:xfrm>
+          <a:prstGeom prst="rect">
+            <a:avLst/>
+          </a:prstGeom>
+          <a:noFill/>
+        </p:spPr>
+        <p:txBody>
+          <a:bodyPr wrap="square" lIns="45720" rIns="45720" tIns="18288" bIns="18288" anchor="t">
+            <a:spAutoFit/>
+          </a:bodyPr>
+          <a:lstStyle/>
+          <a:p>
+            <a:pPr algn="ctr"/>
+            <a:r>
+              <a:rPr sz="1400" b="1" i="0">
+                <a:solidFill>
+                  <a:srgbClr val="333D4A"/>
+                </a:solidFill>
+                <a:latin typeface="Calibri"/>
+              </a:rPr>
+              <a:t>C</a:t>
+            </a:r>
+          </a:p>
+        </p:txBody>
+      </p:sp>
+      <p:sp>
+        <p:nvSpPr>
+          <p:cNvPr id="19" name="TextBox 18"/>
+          <p:cNvSpPr txBox="1"/>
+          <p:nvPr/>
+        </p:nvSpPr>
+        <p:spPr>
+          <a:xfrm>
+            <a:off x="2080260" y="2450592"/>
+            <a:ext cx="411480" cy="228600"/>
+          </a:xfrm>
+          <a:prstGeom prst="rect">
+            <a:avLst/>
+          </a:prstGeom>
+          <a:noFill/>
+        </p:spPr>
+        <p:txBody>
+          <a:bodyPr wrap="square" lIns="45720" rIns="45720" tIns="18288" bIns="18288" anchor="t">
+            <a:spAutoFit/>
+          </a:bodyPr>
+          <a:lstStyle/>
+          <a:p>
+            <a:pPr algn="ctr"/>
+            <a:r>
+              <a:rPr sz="900" b="0" i="0">
+                <a:solidFill>
+                  <a:srgbClr val="333D4A"/>
+                </a:solidFill>
+                <a:latin typeface="Calibri"/>
+              </a:rPr>
+              <a:t>2</a:t>
+            </a:r>
+          </a:p>
+        </p:txBody>
+      </p:sp>
+      <p:sp>
+        <p:nvSpPr>
+          <p:cNvPr id="20" name="Rectangle 19"/>
+          <p:cNvSpPr/>
+          <p:nvPr/>
+        </p:nvSpPr>
+        <p:spPr>
+          <a:xfrm>
+            <a:off x="2537460" y="2011680"/>
+            <a:ext cx="411480" cy="411480"/>
+          </a:xfrm>
+          <a:prstGeom prst="rect">
+            <a:avLst/>
+          </a:prstGeom>
+          <a:solidFill>
+            <a:srgbClr val="E0A81F"/>
+          </a:solidFill>
+          <a:ln w="12700">
+            <a:solidFill>
+              <a:srgbClr val="333D4A"/>
+            </a:solidFill>
+          </a:ln>
+          <a:effectLst/>
+        </p:spPr>
+        <p:style>
+          <a:lnRef idx="1">
+            <a:schemeClr val="accent1"/>
+          </a:lnRef>
+          <a:fillRef idx="3">
+            <a:schemeClr val="accent1"/>
+          </a:fillRef>
+          <a:effectRef idx="2">
+            <a:schemeClr val="accent1"/>
+          </a:effectRef>
+          <a:fontRef idx="minor">
+            <a:schemeClr val="lt1"/>
+          </a:fontRef>
+        </p:style>
+        <p:txBody>
+          <a:bodyPr rtlCol="0" anchor="ctr"/>
+          <a:lstStyle/>
+          <a:p>
+            <a:pPr algn="ctr"/>
+          </a:p>
+        </p:txBody>
+      </p:sp>
+      <p:sp>
+        <p:nvSpPr>
+          <p:cNvPr id="21" name="TextBox 20"/>
+          <p:cNvSpPr txBox="1"/>
+          <p:nvPr/>
+        </p:nvSpPr>
+        <p:spPr>
+          <a:xfrm>
+            <a:off x="2537460" y="2084832"/>
+            <a:ext cx="411480" cy="320040"/>
+          </a:xfrm>
+          <a:prstGeom prst="rect">
+            <a:avLst/>
+          </a:prstGeom>
+          <a:noFill/>
+        </p:spPr>
+        <p:txBody>
+          <a:bodyPr wrap="square" lIns="45720" rIns="45720" tIns="18288" bIns="18288" anchor="t">
+            <a:spAutoFit/>
+          </a:bodyPr>
+          <a:lstStyle/>
+          <a:p>
+            <a:pPr algn="ctr"/>
+            <a:r>
+              <a:rPr sz="1400" b="1" i="0">
+                <a:solidFill>
+                  <a:srgbClr val="FFFFFF"/>
+                </a:solidFill>
+                <a:latin typeface="Calibri"/>
+              </a:rPr>
+              <a:t>D</a:t>
+            </a:r>
+          </a:p>
+        </p:txBody>
+      </p:sp>
+      <p:sp>
+        <p:nvSpPr>
+          <p:cNvPr id="22" name="TextBox 21"/>
+          <p:cNvSpPr txBox="1"/>
+          <p:nvPr/>
+        </p:nvSpPr>
+        <p:spPr>
+          <a:xfrm>
+            <a:off x="2537460" y="2450592"/>
+            <a:ext cx="411480" cy="228600"/>
+          </a:xfrm>
+          <a:prstGeom prst="rect">
+            <a:avLst/>
+          </a:prstGeom>
+          <a:noFill/>
+        </p:spPr>
+        <p:txBody>
+          <a:bodyPr wrap="square" lIns="45720" rIns="45720" tIns="18288" bIns="18288" anchor="t">
+            <a:spAutoFit/>
+          </a:bodyPr>
+          <a:lstStyle/>
+          <a:p>
+            <a:pPr algn="ctr"/>
+            <a:r>
+              <a:rPr sz="900" b="0" i="0">
+                <a:solidFill>
+                  <a:srgbClr val="333D4A"/>
+                </a:solidFill>
+                <a:latin typeface="Calibri"/>
+              </a:rPr>
+              <a:t>3</a:t>
+            </a:r>
+          </a:p>
+        </p:txBody>
+      </p:sp>
+      <p:sp>
+        <p:nvSpPr>
+          <p:cNvPr id="23" name="TextBox 22"/>
+          <p:cNvSpPr txBox="1"/>
+          <p:nvPr/>
+        </p:nvSpPr>
+        <p:spPr>
+          <a:xfrm>
+            <a:off x="822960" y="2834640"/>
+            <a:ext cx="2468880" cy="548640"/>
+          </a:xfrm>
+          <a:prstGeom prst="rect">
+            <a:avLst/>
+          </a:prstGeom>
+          <a:noFill/>
+        </p:spPr>
+        <p:txBody>
+          <a:bodyPr wrap="square" lIns="45720" rIns="45720" tIns="18288" bIns="18288" anchor="t">
+            <a:spAutoFit/>
+          </a:bodyPr>
+          <a:lstStyle/>
+          <a:p>
+            <a:pPr algn="ctr"/>
+            <a:r>
+              <a:rPr sz="1200" b="1" i="0">
+                <a:solidFill>
+                  <a:srgbClr val="333D4A"/>
+                </a:solidFill>
+                <a:latin typeface="Calibri"/>
+              </a:rPr>
+              <a:t>front: index 0
+rear: index 3</a:t>
+            </a:r>
+          </a:p>
+        </p:txBody>
+      </p:sp>
+      <p:sp>
+        <p:nvSpPr>
+          <p:cNvPr id="24" name="TextBox 23"/>
+          <p:cNvSpPr txBox="1"/>
+          <p:nvPr/>
+        </p:nvSpPr>
+        <p:spPr>
+          <a:xfrm>
+            <a:off x="932688" y="3429000"/>
+            <a:ext cx="2249424" cy="2468880"/>
+          </a:xfrm>
+          <a:prstGeom prst="rect">
+            <a:avLst/>
+          </a:prstGeom>
+          <a:noFill/>
+        </p:spPr>
+        <p:txBody>
+          <a:bodyPr wrap="square" lIns="45720" rIns="45720">
+            <a:spAutoFit/>
+          </a:bodyPr>
+          <a:lstStyle/>
+          <a:p>
+            <a:pPr algn="l">
+              <a:lnSpc>
+                <a:spcPct val="120000"/>
+              </a:lnSpc>
+              <a:spcAft>
+                <a:spcPts val="400"/>
+              </a:spcAft>
+            </a:pPr>
+            <a:r>
+              <a:rPr sz="1100" b="1">
+                <a:solidFill>
+                  <a:srgbClr val="127A8A"/>
+                </a:solidFill>
+                <a:latin typeface="Calibri"/>
+              </a:rPr>
+              <a:t>▸  </a:t>
+            </a:r>
+            <a:r>
+              <a:rPr sz="1100" b="1">
                 <a:solidFill>
                   <a:srgbClr val="0B2A4A"/>
                 </a:solidFill>
                 <a:latin typeface="Calibri"/>
               </a:rPr>
-              <a:t>Deque Layout</a:t>
-            </a:r>
-          </a:p>
-        </p:txBody>
-      </p:sp>
-      <p:sp>
-        <p:nvSpPr>
-          <p:cNvPr id="16" name="Rectangle 15"/>
+              <a:t>Full Queue. </a:t>
+            </a:r>
+            <a:r>
+              <a:rPr sz="1100">
+                <a:solidFill>
+                  <a:srgbClr val="333D4A"/>
+                </a:solidFill>
+                <a:latin typeface="Calibri"/>
+              </a:rPr>
+              <a:t>All 4 slots are occupied.</a:t>
+            </a:r>
+          </a:p>
+          <a:p>
+            <a:pPr algn="l">
+              <a:lnSpc>
+                <a:spcPct val="120000"/>
+              </a:lnSpc>
+              <a:spcAft>
+                <a:spcPts val="400"/>
+              </a:spcAft>
+            </a:pPr>
+            <a:r>
+              <a:rPr sz="1100" b="1">
+                <a:solidFill>
+                  <a:srgbClr val="127A8A"/>
+                </a:solidFill>
+                <a:latin typeface="Calibri"/>
+              </a:rPr>
+              <a:t>▸  </a:t>
+            </a:r>
+            <a:r>
+              <a:rPr sz="1100" b="1">
+                <a:solidFill>
+                  <a:srgbClr val="0B2A4A"/>
+                </a:solidFill>
+                <a:latin typeface="Calibri"/>
+              </a:rPr>
+              <a:t>Front points to A </a:t>
+            </a:r>
+            <a:r>
+              <a:rPr sz="1100">
+                <a:solidFill>
+                  <a:srgbClr val="333D4A"/>
+                </a:solidFill>
+                <a:latin typeface="Calibri"/>
+              </a:rPr>
+              <a:t>at index 0.</a:t>
+            </a:r>
+          </a:p>
+          <a:p>
+            <a:pPr algn="l">
+              <a:lnSpc>
+                <a:spcPct val="120000"/>
+              </a:lnSpc>
+              <a:spcAft>
+                <a:spcPts val="400"/>
+              </a:spcAft>
+            </a:pPr>
+            <a:r>
+              <a:rPr sz="1100" b="1">
+                <a:solidFill>
+                  <a:srgbClr val="127A8A"/>
+                </a:solidFill>
+                <a:latin typeface="Calibri"/>
+              </a:rPr>
+              <a:t>▸  </a:t>
+            </a:r>
+            <a:r>
+              <a:rPr sz="1100" b="1">
+                <a:solidFill>
+                  <a:srgbClr val="0B2A4A"/>
+                </a:solidFill>
+                <a:latin typeface="Calibri"/>
+              </a:rPr>
+              <a:t>Rear points to D </a:t>
+            </a:r>
+            <a:r>
+              <a:rPr sz="1100">
+                <a:solidFill>
+                  <a:srgbClr val="333D4A"/>
+                </a:solidFill>
+                <a:latin typeface="Calibri"/>
+              </a:rPr>
+              <a:t>at index 3.</a:t>
+            </a:r>
+          </a:p>
+        </p:txBody>
+      </p:sp>
+      <p:sp>
+        <p:nvSpPr>
+          <p:cNvPr id="25" name="Rounded Rectangle 24"/>
           <p:cNvSpPr/>
           <p:nvPr/>
         </p:nvSpPr>
         <p:spPr>
           <a:xfrm>
-            <a:off x="6675120" y="2926080"/>
-            <a:ext cx="4754880" cy="73152"/>
-          </a:xfrm>
-          <a:prstGeom prst="rect">
+            <a:off x="3520440" y="1371600"/>
+            <a:ext cx="2468880" cy="4663440"/>
+          </a:xfrm>
+          <a:prstGeom prst="roundRect">
             <a:avLst/>
           </a:prstGeom>
           <a:solidFill>
-            <a:srgbClr val="333D4A"/>
+            <a:srgbClr val="F2F4F7"/>
           </a:solidFill>
           <a:ln>
             <a:noFill/>
@@ -6368,20 +6579,689 @@
       </p:sp>
       <p:sp>
         <p:nvSpPr>
-          <p:cNvPr id="17" name="Rectangle 16"/>
+          <p:cNvPr id="26" name="TextBox 25"/>
+          <p:cNvSpPr txBox="1"/>
+          <p:nvPr/>
+        </p:nvSpPr>
+        <p:spPr>
+          <a:xfrm>
+            <a:off x="3520440" y="1508760"/>
+            <a:ext cx="2468880" cy="411480"/>
+          </a:xfrm>
+          <a:prstGeom prst="rect">
+            <a:avLst/>
+          </a:prstGeom>
+          <a:noFill/>
+        </p:spPr>
+        <p:txBody>
+          <a:bodyPr wrap="square" lIns="45720" rIns="45720" tIns="18288" bIns="18288" anchor="t">
+            <a:spAutoFit/>
+          </a:bodyPr>
+          <a:lstStyle/>
+          <a:p>
+            <a:pPr algn="ctr"/>
+            <a:r>
+              <a:rPr sz="1500" b="1" i="0">
+                <a:solidFill>
+                  <a:srgbClr val="0B2A4A"/>
+                </a:solidFill>
+                <a:latin typeface="Calibri"/>
+              </a:rPr>
+              <a:t>2. Dequeue A &amp; B</a:t>
+            </a:r>
+          </a:p>
+        </p:txBody>
+      </p:sp>
+      <p:sp>
+        <p:nvSpPr>
+          <p:cNvPr id="27" name="Rectangle 26"/>
           <p:cNvSpPr/>
           <p:nvPr/>
         </p:nvSpPr>
         <p:spPr>
           <a:xfrm>
-            <a:off x="6675120" y="4389120"/>
-            <a:ext cx="4754880" cy="73152"/>
+            <a:off x="3863340" y="2011680"/>
+            <a:ext cx="411480" cy="411480"/>
           </a:xfrm>
           <a:prstGeom prst="rect">
             <a:avLst/>
           </a:prstGeom>
           <a:solidFill>
-            <a:srgbClr val="333D4A"/>
+            <a:srgbClr val="FFFFFF"/>
+          </a:solidFill>
+          <a:ln w="12700">
+            <a:solidFill>
+              <a:srgbClr val="333D4A"/>
+            </a:solidFill>
+          </a:ln>
+          <a:effectLst/>
+        </p:spPr>
+        <p:style>
+          <a:lnRef idx="1">
+            <a:schemeClr val="accent1"/>
+          </a:lnRef>
+          <a:fillRef idx="3">
+            <a:schemeClr val="accent1"/>
+          </a:fillRef>
+          <a:effectRef idx="2">
+            <a:schemeClr val="accent1"/>
+          </a:effectRef>
+          <a:fontRef idx="minor">
+            <a:schemeClr val="lt1"/>
+          </a:fontRef>
+        </p:style>
+        <p:txBody>
+          <a:bodyPr rtlCol="0" anchor="ctr"/>
+          <a:lstStyle/>
+          <a:p>
+            <a:pPr algn="ctr"/>
+          </a:p>
+        </p:txBody>
+      </p:sp>
+      <p:sp>
+        <p:nvSpPr>
+          <p:cNvPr id="28" name="TextBox 27"/>
+          <p:cNvSpPr txBox="1"/>
+          <p:nvPr/>
+        </p:nvSpPr>
+        <p:spPr>
+          <a:xfrm>
+            <a:off x="3863340" y="2084832"/>
+            <a:ext cx="411480" cy="320040"/>
+          </a:xfrm>
+          <a:prstGeom prst="rect">
+            <a:avLst/>
+          </a:prstGeom>
+          <a:noFill/>
+        </p:spPr>
+        <p:txBody>
+          <a:bodyPr wrap="square" lIns="45720" rIns="45720" tIns="18288" bIns="18288" anchor="t">
+            <a:spAutoFit/>
+          </a:bodyPr>
+          <a:lstStyle/>
+          <a:p>
+            <a:pPr algn="ctr"/>
+            <a:r>
+              <a:rPr sz="1400" b="1" i="0">
+                <a:solidFill>
+                  <a:srgbClr val="333D4A"/>
+                </a:solidFill>
+                <a:latin typeface="Calibri"/>
+              </a:rPr>
+              <a:t> </a:t>
+            </a:r>
+          </a:p>
+        </p:txBody>
+      </p:sp>
+      <p:sp>
+        <p:nvSpPr>
+          <p:cNvPr id="29" name="TextBox 28"/>
+          <p:cNvSpPr txBox="1"/>
+          <p:nvPr/>
+        </p:nvSpPr>
+        <p:spPr>
+          <a:xfrm>
+            <a:off x="3863340" y="2450592"/>
+            <a:ext cx="411480" cy="228600"/>
+          </a:xfrm>
+          <a:prstGeom prst="rect">
+            <a:avLst/>
+          </a:prstGeom>
+          <a:noFill/>
+        </p:spPr>
+        <p:txBody>
+          <a:bodyPr wrap="square" lIns="45720" rIns="45720" tIns="18288" bIns="18288" anchor="t">
+            <a:spAutoFit/>
+          </a:bodyPr>
+          <a:lstStyle/>
+          <a:p>
+            <a:pPr algn="ctr"/>
+            <a:r>
+              <a:rPr sz="900" b="0" i="0">
+                <a:solidFill>
+                  <a:srgbClr val="333D4A"/>
+                </a:solidFill>
+                <a:latin typeface="Calibri"/>
+              </a:rPr>
+              <a:t>0</a:t>
+            </a:r>
+          </a:p>
+        </p:txBody>
+      </p:sp>
+      <p:sp>
+        <p:nvSpPr>
+          <p:cNvPr id="30" name="Rectangle 29"/>
+          <p:cNvSpPr/>
+          <p:nvPr/>
+        </p:nvSpPr>
+        <p:spPr>
+          <a:xfrm>
+            <a:off x="4320540" y="2011680"/>
+            <a:ext cx="411480" cy="411480"/>
+          </a:xfrm>
+          <a:prstGeom prst="rect">
+            <a:avLst/>
+          </a:prstGeom>
+          <a:solidFill>
+            <a:srgbClr val="FFFFFF"/>
+          </a:solidFill>
+          <a:ln w="12700">
+            <a:solidFill>
+              <a:srgbClr val="333D4A"/>
+            </a:solidFill>
+          </a:ln>
+          <a:effectLst/>
+        </p:spPr>
+        <p:style>
+          <a:lnRef idx="1">
+            <a:schemeClr val="accent1"/>
+          </a:lnRef>
+          <a:fillRef idx="3">
+            <a:schemeClr val="accent1"/>
+          </a:fillRef>
+          <a:effectRef idx="2">
+            <a:schemeClr val="accent1"/>
+          </a:effectRef>
+          <a:fontRef idx="minor">
+            <a:schemeClr val="lt1"/>
+          </a:fontRef>
+        </p:style>
+        <p:txBody>
+          <a:bodyPr rtlCol="0" anchor="ctr"/>
+          <a:lstStyle/>
+          <a:p>
+            <a:pPr algn="ctr"/>
+          </a:p>
+        </p:txBody>
+      </p:sp>
+      <p:sp>
+        <p:nvSpPr>
+          <p:cNvPr id="31" name="TextBox 30"/>
+          <p:cNvSpPr txBox="1"/>
+          <p:nvPr/>
+        </p:nvSpPr>
+        <p:spPr>
+          <a:xfrm>
+            <a:off x="4320540" y="2084832"/>
+            <a:ext cx="411480" cy="320040"/>
+          </a:xfrm>
+          <a:prstGeom prst="rect">
+            <a:avLst/>
+          </a:prstGeom>
+          <a:noFill/>
+        </p:spPr>
+        <p:txBody>
+          <a:bodyPr wrap="square" lIns="45720" rIns="45720" tIns="18288" bIns="18288" anchor="t">
+            <a:spAutoFit/>
+          </a:bodyPr>
+          <a:lstStyle/>
+          <a:p>
+            <a:pPr algn="ctr"/>
+            <a:r>
+              <a:rPr sz="1400" b="1" i="0">
+                <a:solidFill>
+                  <a:srgbClr val="333D4A"/>
+                </a:solidFill>
+                <a:latin typeface="Calibri"/>
+              </a:rPr>
+              <a:t> </a:t>
+            </a:r>
+          </a:p>
+        </p:txBody>
+      </p:sp>
+      <p:sp>
+        <p:nvSpPr>
+          <p:cNvPr id="32" name="TextBox 31"/>
+          <p:cNvSpPr txBox="1"/>
+          <p:nvPr/>
+        </p:nvSpPr>
+        <p:spPr>
+          <a:xfrm>
+            <a:off x="4320540" y="2450592"/>
+            <a:ext cx="411480" cy="228600"/>
+          </a:xfrm>
+          <a:prstGeom prst="rect">
+            <a:avLst/>
+          </a:prstGeom>
+          <a:noFill/>
+        </p:spPr>
+        <p:txBody>
+          <a:bodyPr wrap="square" lIns="45720" rIns="45720" tIns="18288" bIns="18288" anchor="t">
+            <a:spAutoFit/>
+          </a:bodyPr>
+          <a:lstStyle/>
+          <a:p>
+            <a:pPr algn="ctr"/>
+            <a:r>
+              <a:rPr sz="900" b="0" i="0">
+                <a:solidFill>
+                  <a:srgbClr val="333D4A"/>
+                </a:solidFill>
+                <a:latin typeface="Calibri"/>
+              </a:rPr>
+              <a:t>1</a:t>
+            </a:r>
+          </a:p>
+        </p:txBody>
+      </p:sp>
+      <p:sp>
+        <p:nvSpPr>
+          <p:cNvPr id="33" name="Rectangle 32"/>
+          <p:cNvSpPr/>
+          <p:nvPr/>
+        </p:nvSpPr>
+        <p:spPr>
+          <a:xfrm>
+            <a:off x="4777740" y="2011680"/>
+            <a:ext cx="411480" cy="411480"/>
+          </a:xfrm>
+          <a:prstGeom prst="rect">
+            <a:avLst/>
+          </a:prstGeom>
+          <a:solidFill>
+            <a:srgbClr val="127A8A"/>
+          </a:solidFill>
+          <a:ln w="12700">
+            <a:solidFill>
+              <a:srgbClr val="333D4A"/>
+            </a:solidFill>
+          </a:ln>
+          <a:effectLst/>
+        </p:spPr>
+        <p:style>
+          <a:lnRef idx="1">
+            <a:schemeClr val="accent1"/>
+          </a:lnRef>
+          <a:fillRef idx="3">
+            <a:schemeClr val="accent1"/>
+          </a:fillRef>
+          <a:effectRef idx="2">
+            <a:schemeClr val="accent1"/>
+          </a:effectRef>
+          <a:fontRef idx="minor">
+            <a:schemeClr val="lt1"/>
+          </a:fontRef>
+        </p:style>
+        <p:txBody>
+          <a:bodyPr rtlCol="0" anchor="ctr"/>
+          <a:lstStyle/>
+          <a:p>
+            <a:pPr algn="ctr"/>
+          </a:p>
+        </p:txBody>
+      </p:sp>
+      <p:sp>
+        <p:nvSpPr>
+          <p:cNvPr id="34" name="TextBox 33"/>
+          <p:cNvSpPr txBox="1"/>
+          <p:nvPr/>
+        </p:nvSpPr>
+        <p:spPr>
+          <a:xfrm>
+            <a:off x="4777740" y="2084832"/>
+            <a:ext cx="411480" cy="320040"/>
+          </a:xfrm>
+          <a:prstGeom prst="rect">
+            <a:avLst/>
+          </a:prstGeom>
+          <a:noFill/>
+        </p:spPr>
+        <p:txBody>
+          <a:bodyPr wrap="square" lIns="45720" rIns="45720" tIns="18288" bIns="18288" anchor="t">
+            <a:spAutoFit/>
+          </a:bodyPr>
+          <a:lstStyle/>
+          <a:p>
+            <a:pPr algn="ctr"/>
+            <a:r>
+              <a:rPr sz="1400" b="1" i="0">
+                <a:solidFill>
+                  <a:srgbClr val="FFFFFF"/>
+                </a:solidFill>
+                <a:latin typeface="Calibri"/>
+              </a:rPr>
+              <a:t>C</a:t>
+            </a:r>
+          </a:p>
+        </p:txBody>
+      </p:sp>
+      <p:sp>
+        <p:nvSpPr>
+          <p:cNvPr id="35" name="TextBox 34"/>
+          <p:cNvSpPr txBox="1"/>
+          <p:nvPr/>
+        </p:nvSpPr>
+        <p:spPr>
+          <a:xfrm>
+            <a:off x="4777740" y="2450592"/>
+            <a:ext cx="411480" cy="228600"/>
+          </a:xfrm>
+          <a:prstGeom prst="rect">
+            <a:avLst/>
+          </a:prstGeom>
+          <a:noFill/>
+        </p:spPr>
+        <p:txBody>
+          <a:bodyPr wrap="square" lIns="45720" rIns="45720" tIns="18288" bIns="18288" anchor="t">
+            <a:spAutoFit/>
+          </a:bodyPr>
+          <a:lstStyle/>
+          <a:p>
+            <a:pPr algn="ctr"/>
+            <a:r>
+              <a:rPr sz="900" b="0" i="0">
+                <a:solidFill>
+                  <a:srgbClr val="333D4A"/>
+                </a:solidFill>
+                <a:latin typeface="Calibri"/>
+              </a:rPr>
+              <a:t>2</a:t>
+            </a:r>
+          </a:p>
+        </p:txBody>
+      </p:sp>
+      <p:sp>
+        <p:nvSpPr>
+          <p:cNvPr id="36" name="Rectangle 35"/>
+          <p:cNvSpPr/>
+          <p:nvPr/>
+        </p:nvSpPr>
+        <p:spPr>
+          <a:xfrm>
+            <a:off x="5234940" y="2011680"/>
+            <a:ext cx="411480" cy="411480"/>
+          </a:xfrm>
+          <a:prstGeom prst="rect">
+            <a:avLst/>
+          </a:prstGeom>
+          <a:solidFill>
+            <a:srgbClr val="E0A81F"/>
+          </a:solidFill>
+          <a:ln w="12700">
+            <a:solidFill>
+              <a:srgbClr val="333D4A"/>
+            </a:solidFill>
+          </a:ln>
+          <a:effectLst/>
+        </p:spPr>
+        <p:style>
+          <a:lnRef idx="1">
+            <a:schemeClr val="accent1"/>
+          </a:lnRef>
+          <a:fillRef idx="3">
+            <a:schemeClr val="accent1"/>
+          </a:fillRef>
+          <a:effectRef idx="2">
+            <a:schemeClr val="accent1"/>
+          </a:effectRef>
+          <a:fontRef idx="minor">
+            <a:schemeClr val="lt1"/>
+          </a:fontRef>
+        </p:style>
+        <p:txBody>
+          <a:bodyPr rtlCol="0" anchor="ctr"/>
+          <a:lstStyle/>
+          <a:p>
+            <a:pPr algn="ctr"/>
+          </a:p>
+        </p:txBody>
+      </p:sp>
+      <p:sp>
+        <p:nvSpPr>
+          <p:cNvPr id="37" name="TextBox 36"/>
+          <p:cNvSpPr txBox="1"/>
+          <p:nvPr/>
+        </p:nvSpPr>
+        <p:spPr>
+          <a:xfrm>
+            <a:off x="5234940" y="2084832"/>
+            <a:ext cx="411480" cy="320040"/>
+          </a:xfrm>
+          <a:prstGeom prst="rect">
+            <a:avLst/>
+          </a:prstGeom>
+          <a:noFill/>
+        </p:spPr>
+        <p:txBody>
+          <a:bodyPr wrap="square" lIns="45720" rIns="45720" tIns="18288" bIns="18288" anchor="t">
+            <a:spAutoFit/>
+          </a:bodyPr>
+          <a:lstStyle/>
+          <a:p>
+            <a:pPr algn="ctr"/>
+            <a:r>
+              <a:rPr sz="1400" b="1" i="0">
+                <a:solidFill>
+                  <a:srgbClr val="FFFFFF"/>
+                </a:solidFill>
+                <a:latin typeface="Calibri"/>
+              </a:rPr>
+              <a:t>D</a:t>
+            </a:r>
+          </a:p>
+        </p:txBody>
+      </p:sp>
+      <p:sp>
+        <p:nvSpPr>
+          <p:cNvPr id="38" name="TextBox 37"/>
+          <p:cNvSpPr txBox="1"/>
+          <p:nvPr/>
+        </p:nvSpPr>
+        <p:spPr>
+          <a:xfrm>
+            <a:off x="5234940" y="2450592"/>
+            <a:ext cx="411480" cy="228600"/>
+          </a:xfrm>
+          <a:prstGeom prst="rect">
+            <a:avLst/>
+          </a:prstGeom>
+          <a:noFill/>
+        </p:spPr>
+        <p:txBody>
+          <a:bodyPr wrap="square" lIns="45720" rIns="45720" tIns="18288" bIns="18288" anchor="t">
+            <a:spAutoFit/>
+          </a:bodyPr>
+          <a:lstStyle/>
+          <a:p>
+            <a:pPr algn="ctr"/>
+            <a:r>
+              <a:rPr sz="900" b="0" i="0">
+                <a:solidFill>
+                  <a:srgbClr val="333D4A"/>
+                </a:solidFill>
+                <a:latin typeface="Calibri"/>
+              </a:rPr>
+              <a:t>3</a:t>
+            </a:r>
+          </a:p>
+        </p:txBody>
+      </p:sp>
+      <p:sp>
+        <p:nvSpPr>
+          <p:cNvPr id="39" name="TextBox 38"/>
+          <p:cNvSpPr txBox="1"/>
+          <p:nvPr/>
+        </p:nvSpPr>
+        <p:spPr>
+          <a:xfrm>
+            <a:off x="3520440" y="2834640"/>
+            <a:ext cx="2468880" cy="548640"/>
+          </a:xfrm>
+          <a:prstGeom prst="rect">
+            <a:avLst/>
+          </a:prstGeom>
+          <a:noFill/>
+        </p:spPr>
+        <p:txBody>
+          <a:bodyPr wrap="square" lIns="45720" rIns="45720" tIns="18288" bIns="18288" anchor="t">
+            <a:spAutoFit/>
+          </a:bodyPr>
+          <a:lstStyle/>
+          <a:p>
+            <a:pPr algn="ctr"/>
+            <a:r>
+              <a:rPr sz="1200" b="1" i="0">
+                <a:solidFill>
+                  <a:srgbClr val="333D4A"/>
+                </a:solidFill>
+                <a:latin typeface="Calibri"/>
+              </a:rPr>
+              <a:t>front: index 2
+rear: index 3</a:t>
+            </a:r>
+          </a:p>
+        </p:txBody>
+      </p:sp>
+      <p:sp>
+        <p:nvSpPr>
+          <p:cNvPr id="40" name="TextBox 39"/>
+          <p:cNvSpPr txBox="1"/>
+          <p:nvPr/>
+        </p:nvSpPr>
+        <p:spPr>
+          <a:xfrm>
+            <a:off x="3630168" y="3429000"/>
+            <a:ext cx="2249424" cy="2468880"/>
+          </a:xfrm>
+          <a:prstGeom prst="rect">
+            <a:avLst/>
+          </a:prstGeom>
+          <a:noFill/>
+        </p:spPr>
+        <p:txBody>
+          <a:bodyPr wrap="square" lIns="45720" rIns="45720">
+            <a:spAutoFit/>
+          </a:bodyPr>
+          <a:lstStyle/>
+          <a:p>
+            <a:pPr algn="l">
+              <a:lnSpc>
+                <a:spcPct val="120000"/>
+              </a:lnSpc>
+              <a:spcAft>
+                <a:spcPts val="400"/>
+              </a:spcAft>
+            </a:pPr>
+            <a:r>
+              <a:rPr sz="1100" b="1">
+                <a:solidFill>
+                  <a:srgbClr val="127A8A"/>
+                </a:solidFill>
+                <a:latin typeface="Calibri"/>
+              </a:rPr>
+              <a:t>▸  </a:t>
+            </a:r>
+            <a:r>
+              <a:rPr sz="1100" b="1">
+                <a:solidFill>
+                  <a:srgbClr val="0B2A4A"/>
+                </a:solidFill>
+                <a:latin typeface="Calibri"/>
+              </a:rPr>
+              <a:t>No shifting. </a:t>
+            </a:r>
+            <a:r>
+              <a:rPr sz="1100">
+                <a:solidFill>
+                  <a:srgbClr val="333D4A"/>
+                </a:solidFill>
+                <a:latin typeface="Calibri"/>
+              </a:rPr>
+              <a:t>We do not shift elements.</a:t>
+            </a:r>
+          </a:p>
+          <a:p>
+            <a:pPr algn="l">
+              <a:lnSpc>
+                <a:spcPct val="120000"/>
+              </a:lnSpc>
+              <a:spcAft>
+                <a:spcPts val="400"/>
+              </a:spcAft>
+            </a:pPr>
+            <a:r>
+              <a:rPr sz="1100" b="1">
+                <a:solidFill>
+                  <a:srgbClr val="127A8A"/>
+                </a:solidFill>
+                <a:latin typeface="Calibri"/>
+              </a:rPr>
+              <a:t>▸  </a:t>
+            </a:r>
+            <a:r>
+              <a:rPr sz="1100" b="1">
+                <a:solidFill>
+                  <a:srgbClr val="0B2A4A"/>
+                </a:solidFill>
+                <a:latin typeface="Calibri"/>
+              </a:rPr>
+              <a:t>Front moves </a:t>
+            </a:r>
+            <a:r>
+              <a:rPr sz="1100">
+                <a:solidFill>
+                  <a:srgbClr val="333D4A"/>
+                </a:solidFill>
+                <a:latin typeface="Calibri"/>
+              </a:rPr>
+              <a:t>from 0 to 1, then to 2.</a:t>
+            </a:r>
+          </a:p>
+          <a:p>
+            <a:pPr algn="l">
+              <a:lnSpc>
+                <a:spcPct val="120000"/>
+              </a:lnSpc>
+              <a:spcAft>
+                <a:spcPts val="400"/>
+              </a:spcAft>
+            </a:pPr>
+            <a:r>
+              <a:rPr sz="1100" b="1">
+                <a:solidFill>
+                  <a:srgbClr val="127A8A"/>
+                </a:solidFill>
+                <a:latin typeface="Calibri"/>
+              </a:rPr>
+              <a:t>▸  </a:t>
+            </a:r>
+            <a:r>
+              <a:rPr sz="1100" b="1">
+                <a:solidFill>
+                  <a:srgbClr val="0B2A4A"/>
+                </a:solidFill>
+                <a:latin typeface="Calibri"/>
+              </a:rPr>
+              <a:t>Empty space </a:t>
+            </a:r>
+            <a:r>
+              <a:rPr sz="1100">
+                <a:solidFill>
+                  <a:srgbClr val="333D4A"/>
+                </a:solidFill>
+                <a:latin typeface="Calibri"/>
+              </a:rPr>
+              <a:t>created at slots 0 &amp; 1.</a:t>
+            </a:r>
+          </a:p>
+        </p:txBody>
+      </p:sp>
+      <p:sp>
+        <p:nvSpPr>
+          <p:cNvPr id="41" name="Rounded Rectangle 40"/>
+          <p:cNvSpPr/>
+          <p:nvPr/>
+        </p:nvSpPr>
+        <p:spPr>
+          <a:xfrm>
+            <a:off x="6217920" y="1371600"/>
+            <a:ext cx="2468880" cy="4663440"/>
+          </a:xfrm>
+          <a:prstGeom prst="roundRect">
+            <a:avLst/>
+          </a:prstGeom>
+          <a:solidFill>
+            <a:srgbClr val="F2F4F7"/>
           </a:solidFill>
           <a:ln>
             <a:noFill/>
@@ -6412,24 +7292,59 @@
       </p:sp>
       <p:sp>
         <p:nvSpPr>
-          <p:cNvPr id="18" name="Rounded Rectangle 17"/>
+          <p:cNvPr id="42" name="TextBox 41"/>
+          <p:cNvSpPr txBox="1"/>
+          <p:nvPr/>
+        </p:nvSpPr>
+        <p:spPr>
+          <a:xfrm>
+            <a:off x="6217920" y="1508760"/>
+            <a:ext cx="2468880" cy="411480"/>
+          </a:xfrm>
+          <a:prstGeom prst="rect">
+            <a:avLst/>
+          </a:prstGeom>
+          <a:noFill/>
+        </p:spPr>
+        <p:txBody>
+          <a:bodyPr wrap="square" lIns="45720" rIns="45720" tIns="18288" bIns="18288" anchor="t">
+            <a:spAutoFit/>
+          </a:bodyPr>
+          <a:lstStyle/>
+          <a:p>
+            <a:pPr algn="ctr"/>
+            <a:r>
+              <a:rPr sz="1500" b="1" i="0">
+                <a:solidFill>
+                  <a:srgbClr val="0B2A4A"/>
+                </a:solidFill>
+                <a:latin typeface="Calibri"/>
+              </a:rPr>
+              <a:t>3. Enqueue E (Wrap)</a:t>
+            </a:r>
+          </a:p>
+        </p:txBody>
+      </p:sp>
+      <p:sp>
+        <p:nvSpPr>
+          <p:cNvPr id="43" name="Rectangle 42"/>
           <p:cNvSpPr/>
           <p:nvPr/>
         </p:nvSpPr>
         <p:spPr>
           <a:xfrm>
-            <a:off x="7223760" y="3200400"/>
-            <a:ext cx="914400" cy="914400"/>
-          </a:xfrm>
-          <a:prstGeom prst="roundRect">
+            <a:off x="6560820" y="2011680"/>
+            <a:ext cx="411480" cy="411480"/>
+          </a:xfrm>
+          <a:prstGeom prst="rect">
             <a:avLst/>
           </a:prstGeom>
           <a:solidFill>
-            <a:srgbClr val="FFFFFF"/>
+            <a:srgbClr val="E0A81F"/>
           </a:solidFill>
-          <a:ln w="25400">
+          <a:ln w="12700">
             <a:solidFill>
-              <a:srgbClr val="0B2A4A"/>
+              <a:srgbClr val="333D4A"/>
             </a:solidFill>
           </a:ln>
           <a:effectLst/>
@@ -6458,14 +7373,14 @@
       </p:sp>
       <p:sp>
         <p:nvSpPr>
-          <p:cNvPr id="19" name="TextBox 18"/>
+          <p:cNvPr id="44" name="TextBox 43"/>
           <p:cNvSpPr txBox="1"/>
           <p:nvPr/>
         </p:nvSpPr>
         <p:spPr>
           <a:xfrm>
-            <a:off x="7223760" y="3200400"/>
-            <a:ext cx="914400" cy="914400"/>
+            <a:off x="6560820" y="2084832"/>
+            <a:ext cx="411480" cy="320040"/>
           </a:xfrm>
           <a:prstGeom prst="rect">
             <a:avLst/>
@@ -6473,7 +7388,7 @@
           <a:noFill/>
         </p:spPr>
         <p:txBody>
-          <a:bodyPr wrap="square" lIns="45720" rIns="45720" tIns="18288" bIns="18288" anchor="ctr">
+          <a:bodyPr wrap="square" lIns="45720" rIns="45720" tIns="18288" bIns="18288" anchor="t">
             <a:spAutoFit/>
           </a:bodyPr>
           <a:lstStyle/>
@@ -6482,35 +7397,70 @@
             <a:r>
               <a:rPr sz="1400" b="1" i="0">
                 <a:solidFill>
-                  <a:srgbClr val="0B2A4A"/>
-                </a:solidFill>
-                <a:latin typeface="Calibri"/>
-              </a:rPr>
-              <a:t>10</a:t>
-            </a:r>
-          </a:p>
-        </p:txBody>
-      </p:sp>
-      <p:sp>
-        <p:nvSpPr>
-          <p:cNvPr id="20" name="Rounded Rectangle 19"/>
+                  <a:srgbClr val="FFFFFF"/>
+                </a:solidFill>
+                <a:latin typeface="Calibri"/>
+              </a:rPr>
+              <a:t>E</a:t>
+            </a:r>
+          </a:p>
+        </p:txBody>
+      </p:sp>
+      <p:sp>
+        <p:nvSpPr>
+          <p:cNvPr id="45" name="TextBox 44"/>
+          <p:cNvSpPr txBox="1"/>
+          <p:nvPr/>
+        </p:nvSpPr>
+        <p:spPr>
+          <a:xfrm>
+            <a:off x="6560820" y="2450592"/>
+            <a:ext cx="411480" cy="228600"/>
+          </a:xfrm>
+          <a:prstGeom prst="rect">
+            <a:avLst/>
+          </a:prstGeom>
+          <a:noFill/>
+        </p:spPr>
+        <p:txBody>
+          <a:bodyPr wrap="square" lIns="45720" rIns="45720" tIns="18288" bIns="18288" anchor="t">
+            <a:spAutoFit/>
+          </a:bodyPr>
+          <a:lstStyle/>
+          <a:p>
+            <a:pPr algn="ctr"/>
+            <a:r>
+              <a:rPr sz="900" b="0" i="0">
+                <a:solidFill>
+                  <a:srgbClr val="333D4A"/>
+                </a:solidFill>
+                <a:latin typeface="Calibri"/>
+              </a:rPr>
+              <a:t>0</a:t>
+            </a:r>
+          </a:p>
+        </p:txBody>
+      </p:sp>
+      <p:sp>
+        <p:nvSpPr>
+          <p:cNvPr id="46" name="Rectangle 45"/>
           <p:cNvSpPr/>
           <p:nvPr/>
         </p:nvSpPr>
         <p:spPr>
           <a:xfrm>
-            <a:off x="8321040" y="3200400"/>
-            <a:ext cx="914400" cy="914400"/>
-          </a:xfrm>
-          <a:prstGeom prst="roundRect">
+            <a:off x="7018020" y="2011680"/>
+            <a:ext cx="411480" cy="411480"/>
+          </a:xfrm>
+          <a:prstGeom prst="rect">
             <a:avLst/>
           </a:prstGeom>
           <a:solidFill>
             <a:srgbClr val="FFFFFF"/>
           </a:solidFill>
-          <a:ln w="25400">
+          <a:ln w="12700">
             <a:solidFill>
-              <a:srgbClr val="0B2A4A"/>
+              <a:srgbClr val="333D4A"/>
             </a:solidFill>
           </a:ln>
           <a:effectLst/>
@@ -6539,14 +7489,14 @@
       </p:sp>
       <p:sp>
         <p:nvSpPr>
-          <p:cNvPr id="21" name="TextBox 20"/>
+          <p:cNvPr id="47" name="TextBox 46"/>
           <p:cNvSpPr txBox="1"/>
           <p:nvPr/>
         </p:nvSpPr>
         <p:spPr>
           <a:xfrm>
-            <a:off x="8321040" y="3200400"/>
-            <a:ext cx="914400" cy="914400"/>
+            <a:off x="7018020" y="2084832"/>
+            <a:ext cx="411480" cy="320040"/>
           </a:xfrm>
           <a:prstGeom prst="rect">
             <a:avLst/>
@@ -6554,7 +7504,7 @@
           <a:noFill/>
         </p:spPr>
         <p:txBody>
-          <a:bodyPr wrap="square" lIns="45720" rIns="45720" tIns="18288" bIns="18288" anchor="ctr">
+          <a:bodyPr wrap="square" lIns="45720" rIns="45720" tIns="18288" bIns="18288" anchor="t">
             <a:spAutoFit/>
           </a:bodyPr>
           <a:lstStyle/>
@@ -6563,35 +7513,70 @@
             <a:r>
               <a:rPr sz="1400" b="1" i="0">
                 <a:solidFill>
-                  <a:srgbClr val="0B2A4A"/>
-                </a:solidFill>
-                <a:latin typeface="Calibri"/>
-              </a:rPr>
-              <a:t>20</a:t>
-            </a:r>
-          </a:p>
-        </p:txBody>
-      </p:sp>
-      <p:sp>
-        <p:nvSpPr>
-          <p:cNvPr id="22" name="Rounded Rectangle 21"/>
+                  <a:srgbClr val="333D4A"/>
+                </a:solidFill>
+                <a:latin typeface="Calibri"/>
+              </a:rPr>
+              <a:t> </a:t>
+            </a:r>
+          </a:p>
+        </p:txBody>
+      </p:sp>
+      <p:sp>
+        <p:nvSpPr>
+          <p:cNvPr id="48" name="TextBox 47"/>
+          <p:cNvSpPr txBox="1"/>
+          <p:nvPr/>
+        </p:nvSpPr>
+        <p:spPr>
+          <a:xfrm>
+            <a:off x="7018020" y="2450592"/>
+            <a:ext cx="411480" cy="228600"/>
+          </a:xfrm>
+          <a:prstGeom prst="rect">
+            <a:avLst/>
+          </a:prstGeom>
+          <a:noFill/>
+        </p:spPr>
+        <p:txBody>
+          <a:bodyPr wrap="square" lIns="45720" rIns="45720" tIns="18288" bIns="18288" anchor="t">
+            <a:spAutoFit/>
+          </a:bodyPr>
+          <a:lstStyle/>
+          <a:p>
+            <a:pPr algn="ctr"/>
+            <a:r>
+              <a:rPr sz="900" b="0" i="0">
+                <a:solidFill>
+                  <a:srgbClr val="333D4A"/>
+                </a:solidFill>
+                <a:latin typeface="Calibri"/>
+              </a:rPr>
+              <a:t>1</a:t>
+            </a:r>
+          </a:p>
+        </p:txBody>
+      </p:sp>
+      <p:sp>
+        <p:nvSpPr>
+          <p:cNvPr id="49" name="Rectangle 48"/>
           <p:cNvSpPr/>
           <p:nvPr/>
         </p:nvSpPr>
         <p:spPr>
           <a:xfrm>
-            <a:off x="9418320" y="3200400"/>
-            <a:ext cx="914400" cy="914400"/>
-          </a:xfrm>
-          <a:prstGeom prst="roundRect">
+            <a:off x="7475220" y="2011680"/>
+            <a:ext cx="411480" cy="411480"/>
+          </a:xfrm>
+          <a:prstGeom prst="rect">
             <a:avLst/>
           </a:prstGeom>
           <a:solidFill>
-            <a:srgbClr val="FFFFFF"/>
+            <a:srgbClr val="127A8A"/>
           </a:solidFill>
-          <a:ln w="25400">
+          <a:ln w="12700">
             <a:solidFill>
-              <a:srgbClr val="0B2A4A"/>
+              <a:srgbClr val="333D4A"/>
             </a:solidFill>
           </a:ln>
           <a:effectLst/>
@@ -6620,14 +7605,14 @@
       </p:sp>
       <p:sp>
         <p:nvSpPr>
-          <p:cNvPr id="23" name="TextBox 22"/>
+          <p:cNvPr id="50" name="TextBox 49"/>
           <p:cNvSpPr txBox="1"/>
           <p:nvPr/>
         </p:nvSpPr>
         <p:spPr>
           <a:xfrm>
-            <a:off x="9418320" y="3200400"/>
-            <a:ext cx="914400" cy="914400"/>
+            <a:off x="7475220" y="2084832"/>
+            <a:ext cx="411480" cy="320040"/>
           </a:xfrm>
           <a:prstGeom prst="rect">
             <a:avLst/>
@@ -6635,7 +7620,7 @@
           <a:noFill/>
         </p:spPr>
         <p:txBody>
-          <a:bodyPr wrap="square" lIns="45720" rIns="45720" tIns="18288" bIns="18288" anchor="ctr">
+          <a:bodyPr wrap="square" lIns="45720" rIns="45720" tIns="18288" bIns="18288" anchor="t">
             <a:spAutoFit/>
           </a:bodyPr>
           <a:lstStyle/>
@@ -6644,97 +7629,390 @@
             <a:r>
               <a:rPr sz="1400" b="1" i="0">
                 <a:solidFill>
-                  <a:srgbClr val="0B2A4A"/>
-                </a:solidFill>
-                <a:latin typeface="Calibri"/>
-              </a:rPr>
-              <a:t>30</a:t>
-            </a:r>
-          </a:p>
-        </p:txBody>
-      </p:sp>
-      <p:cxnSp>
-        <p:nvCxnSpPr>
-          <p:cNvPr id="24" name="Connector 23"/>
-          <p:cNvCxnSpPr/>
-          <p:nvPr/>
-        </p:nvCxnSpPr>
-        <p:spPr>
-          <a:xfrm>
-            <a:off x="6492240" y="3383280"/>
-            <a:ext cx="548640" cy="0"/>
-          </a:xfrm>
-          <a:prstGeom prst="line">
-            <a:avLst/>
-          </a:prstGeom>
-          <a:ln w="28575">
+                  <a:srgbClr val="FFFFFF"/>
+                </a:solidFill>
+                <a:latin typeface="Calibri"/>
+              </a:rPr>
+              <a:t>C</a:t>
+            </a:r>
+          </a:p>
+        </p:txBody>
+      </p:sp>
+      <p:sp>
+        <p:nvSpPr>
+          <p:cNvPr id="51" name="TextBox 50"/>
+          <p:cNvSpPr txBox="1"/>
+          <p:nvPr/>
+        </p:nvSpPr>
+        <p:spPr>
+          <a:xfrm>
+            <a:off x="7475220" y="2450592"/>
+            <a:ext cx="411480" cy="228600"/>
+          </a:xfrm>
+          <a:prstGeom prst="rect">
+            <a:avLst/>
+          </a:prstGeom>
+          <a:noFill/>
+        </p:spPr>
+        <p:txBody>
+          <a:bodyPr wrap="square" lIns="45720" rIns="45720" tIns="18288" bIns="18288" anchor="t">
+            <a:spAutoFit/>
+          </a:bodyPr>
+          <a:lstStyle/>
+          <a:p>
+            <a:pPr algn="ctr"/>
+            <a:r>
+              <a:rPr sz="900" b="0" i="0">
+                <a:solidFill>
+                  <a:srgbClr val="333D4A"/>
+                </a:solidFill>
+                <a:latin typeface="Calibri"/>
+              </a:rPr>
+              <a:t>2</a:t>
+            </a:r>
+          </a:p>
+        </p:txBody>
+      </p:sp>
+      <p:sp>
+        <p:nvSpPr>
+          <p:cNvPr id="52" name="Rectangle 51"/>
+          <p:cNvSpPr/>
+          <p:nvPr/>
+        </p:nvSpPr>
+        <p:spPr>
+          <a:xfrm>
+            <a:off x="7932420" y="2011680"/>
+            <a:ext cx="411480" cy="411480"/>
+          </a:xfrm>
+          <a:prstGeom prst="rect">
+            <a:avLst/>
+          </a:prstGeom>
+          <a:solidFill>
+            <a:srgbClr val="FFFFFF"/>
+          </a:solidFill>
+          <a:ln w="12700">
             <a:solidFill>
-              <a:srgbClr val="127A8A"/>
+              <a:srgbClr val="333D4A"/>
             </a:solidFill>
-            <a:tailEnd type="triangle" w="med" len="med"/>
           </a:ln>
+          <a:effectLst/>
         </p:spPr>
         <p:style>
-          <a:lnRef idx="2">
+          <a:lnRef idx="1">
             <a:schemeClr val="accent1"/>
           </a:lnRef>
-          <a:fillRef idx="0">
+          <a:fillRef idx="3">
             <a:schemeClr val="accent1"/>
           </a:fillRef>
-          <a:effectRef idx="1">
+          <a:effectRef idx="2">
             <a:schemeClr val="accent1"/>
           </a:effectRef>
           <a:fontRef idx="minor">
-            <a:schemeClr val="tx1"/>
+            <a:schemeClr val="lt1"/>
           </a:fontRef>
         </p:style>
-      </p:cxnSp>
-      <p:cxnSp>
-        <p:nvCxnSpPr>
-          <p:cNvPr id="25" name="Connector 24"/>
-          <p:cNvCxnSpPr/>
-          <p:nvPr/>
-        </p:nvCxnSpPr>
-        <p:spPr>
-          <a:xfrm flipH="1">
-            <a:off x="6492240" y="3931920"/>
-            <a:ext cx="548640" cy="0"/>
-          </a:xfrm>
-          <a:prstGeom prst="line">
-            <a:avLst/>
-          </a:prstGeom>
-          <a:ln w="28575">
-            <a:solidFill>
-              <a:srgbClr val="E0A81F"/>
-            </a:solidFill>
-            <a:tailEnd type="triangle" w="med" len="med"/>
+        <p:txBody>
+          <a:bodyPr rtlCol="0" anchor="ctr"/>
+          <a:lstStyle/>
+          <a:p>
+            <a:pPr algn="ctr"/>
+          </a:p>
+        </p:txBody>
+      </p:sp>
+      <p:sp>
+        <p:nvSpPr>
+          <p:cNvPr id="53" name="TextBox 52"/>
+          <p:cNvSpPr txBox="1"/>
+          <p:nvPr/>
+        </p:nvSpPr>
+        <p:spPr>
+          <a:xfrm>
+            <a:off x="7932420" y="2084832"/>
+            <a:ext cx="411480" cy="320040"/>
+          </a:xfrm>
+          <a:prstGeom prst="rect">
+            <a:avLst/>
+          </a:prstGeom>
+          <a:noFill/>
+        </p:spPr>
+        <p:txBody>
+          <a:bodyPr wrap="square" lIns="45720" rIns="45720" tIns="18288" bIns="18288" anchor="t">
+            <a:spAutoFit/>
+          </a:bodyPr>
+          <a:lstStyle/>
+          <a:p>
+            <a:pPr algn="ctr"/>
+            <a:r>
+              <a:rPr sz="1400" b="1" i="0">
+                <a:solidFill>
+                  <a:srgbClr val="333D4A"/>
+                </a:solidFill>
+                <a:latin typeface="Calibri"/>
+              </a:rPr>
+              <a:t>D</a:t>
+            </a:r>
+          </a:p>
+        </p:txBody>
+      </p:sp>
+      <p:sp>
+        <p:nvSpPr>
+          <p:cNvPr id="54" name="TextBox 53"/>
+          <p:cNvSpPr txBox="1"/>
+          <p:nvPr/>
+        </p:nvSpPr>
+        <p:spPr>
+          <a:xfrm>
+            <a:off x="7932420" y="2450592"/>
+            <a:ext cx="411480" cy="228600"/>
+          </a:xfrm>
+          <a:prstGeom prst="rect">
+            <a:avLst/>
+          </a:prstGeom>
+          <a:noFill/>
+        </p:spPr>
+        <p:txBody>
+          <a:bodyPr wrap="square" lIns="45720" rIns="45720" tIns="18288" bIns="18288" anchor="t">
+            <a:spAutoFit/>
+          </a:bodyPr>
+          <a:lstStyle/>
+          <a:p>
+            <a:pPr algn="ctr"/>
+            <a:r>
+              <a:rPr sz="900" b="0" i="0">
+                <a:solidFill>
+                  <a:srgbClr val="333D4A"/>
+                </a:solidFill>
+                <a:latin typeface="Calibri"/>
+              </a:rPr>
+              <a:t>3</a:t>
+            </a:r>
+          </a:p>
+        </p:txBody>
+      </p:sp>
+      <p:sp>
+        <p:nvSpPr>
+          <p:cNvPr id="55" name="TextBox 54"/>
+          <p:cNvSpPr txBox="1"/>
+          <p:nvPr/>
+        </p:nvSpPr>
+        <p:spPr>
+          <a:xfrm>
+            <a:off x="6217920" y="2834640"/>
+            <a:ext cx="2468880" cy="548640"/>
+          </a:xfrm>
+          <a:prstGeom prst="rect">
+            <a:avLst/>
+          </a:prstGeom>
+          <a:noFill/>
+        </p:spPr>
+        <p:txBody>
+          <a:bodyPr wrap="square" lIns="45720" rIns="45720" tIns="18288" bIns="18288" anchor="t">
+            <a:spAutoFit/>
+          </a:bodyPr>
+          <a:lstStyle/>
+          <a:p>
+            <a:pPr algn="ctr"/>
+            <a:r>
+              <a:rPr sz="1200" b="1" i="0">
+                <a:solidFill>
+                  <a:srgbClr val="333D4A"/>
+                </a:solidFill>
+                <a:latin typeface="Calibri"/>
+              </a:rPr>
+              <a:t>front: index 2
+rear: index 0</a:t>
+            </a:r>
+          </a:p>
+        </p:txBody>
+      </p:sp>
+      <p:sp>
+        <p:nvSpPr>
+          <p:cNvPr id="56" name="TextBox 55"/>
+          <p:cNvSpPr txBox="1"/>
+          <p:nvPr/>
+        </p:nvSpPr>
+        <p:spPr>
+          <a:xfrm>
+            <a:off x="6327648" y="3429000"/>
+            <a:ext cx="2249424" cy="2468880"/>
+          </a:xfrm>
+          <a:prstGeom prst="rect">
+            <a:avLst/>
+          </a:prstGeom>
+          <a:noFill/>
+        </p:spPr>
+        <p:txBody>
+          <a:bodyPr wrap="square" lIns="45720" rIns="45720">
+            <a:spAutoFit/>
+          </a:bodyPr>
+          <a:lstStyle/>
+          <a:p>
+            <a:pPr algn="l">
+              <a:lnSpc>
+                <a:spcPct val="120000"/>
+              </a:lnSpc>
+              <a:spcAft>
+                <a:spcPts val="400"/>
+              </a:spcAft>
+            </a:pPr>
+            <a:r>
+              <a:rPr sz="1100" b="1">
+                <a:solidFill>
+                  <a:srgbClr val="127A8A"/>
+                </a:solidFill>
+                <a:latin typeface="Calibri"/>
+              </a:rPr>
+              <a:t>▸  </a:t>
+            </a:r>
+            <a:r>
+              <a:rPr sz="1100" b="1">
+                <a:solidFill>
+                  <a:srgbClr val="0B2A4A"/>
+                </a:solidFill>
+                <a:latin typeface="Calibri"/>
+              </a:rPr>
+              <a:t>Space Reused. </a:t>
+            </a:r>
+            <a:r>
+              <a:rPr sz="1100">
+                <a:solidFill>
+                  <a:srgbClr val="333D4A"/>
+                </a:solidFill>
+                <a:latin typeface="Calibri"/>
+              </a:rPr>
+              <a:t>We place E at index 0.</a:t>
+            </a:r>
+          </a:p>
+          <a:p>
+            <a:pPr algn="l">
+              <a:lnSpc>
+                <a:spcPct val="120000"/>
+              </a:lnSpc>
+              <a:spcAft>
+                <a:spcPts val="400"/>
+              </a:spcAft>
+            </a:pPr>
+            <a:r>
+              <a:rPr sz="1100" b="1">
+                <a:solidFill>
+                  <a:srgbClr val="127A8A"/>
+                </a:solidFill>
+                <a:latin typeface="Calibri"/>
+              </a:rPr>
+              <a:t>▸  </a:t>
+            </a:r>
+            <a:r>
+              <a:rPr sz="1100" b="1">
+                <a:solidFill>
+                  <a:srgbClr val="0B2A4A"/>
+                </a:solidFill>
+                <a:latin typeface="Calibri"/>
+              </a:rPr>
+              <a:t>Rear wraps: </a:t>
+            </a:r>
+            <a:r>
+              <a:rPr sz="1100">
+                <a:solidFill>
+                  <a:srgbClr val="333D4A"/>
+                </a:solidFill>
+                <a:latin typeface="Calibri"/>
+              </a:rPr>
+              <a:t>(3 + 1) % 4 = 0.</a:t>
+            </a:r>
+          </a:p>
+          <a:p>
+            <a:pPr algn="l">
+              <a:lnSpc>
+                <a:spcPct val="120000"/>
+              </a:lnSpc>
+              <a:spcAft>
+                <a:spcPts val="400"/>
+              </a:spcAft>
+            </a:pPr>
+            <a:r>
+              <a:rPr sz="1100" b="1">
+                <a:solidFill>
+                  <a:srgbClr val="127A8A"/>
+                </a:solidFill>
+                <a:latin typeface="Calibri"/>
+              </a:rPr>
+              <a:t>▸  </a:t>
+            </a:r>
+            <a:r>
+              <a:rPr sz="1100" b="1">
+                <a:solidFill>
+                  <a:srgbClr val="0B2A4A"/>
+                </a:solidFill>
+                <a:latin typeface="Calibri"/>
+              </a:rPr>
+              <a:t>Queue is now </a:t>
+            </a:r>
+            <a:r>
+              <a:rPr sz="1100">
+                <a:solidFill>
+                  <a:srgbClr val="333D4A"/>
+                </a:solidFill>
+                <a:latin typeface="Calibri"/>
+              </a:rPr>
+              <a:t>divided across boundaries.</a:t>
+            </a:r>
+          </a:p>
+        </p:txBody>
+      </p:sp>
+      <p:sp>
+        <p:nvSpPr>
+          <p:cNvPr id="57" name="Rounded Rectangle 56"/>
+          <p:cNvSpPr/>
+          <p:nvPr/>
+        </p:nvSpPr>
+        <p:spPr>
+          <a:xfrm>
+            <a:off x="8915400" y="1371600"/>
+            <a:ext cx="2468880" cy="4663440"/>
+          </a:xfrm>
+          <a:prstGeom prst="roundRect">
+            <a:avLst/>
+          </a:prstGeom>
+          <a:solidFill>
+            <a:srgbClr val="F2F4F7"/>
+          </a:solidFill>
+          <a:ln>
+            <a:noFill/>
           </a:ln>
+          <a:effectLst/>
         </p:spPr>
         <p:style>
-          <a:lnRef idx="2">
+          <a:lnRef idx="1">
             <a:schemeClr val="accent1"/>
           </a:lnRef>
-          <a:fillRef idx="0">
+          <a:fillRef idx="3">
             <a:schemeClr val="accent1"/>
           </a:fillRef>
-          <a:effectRef idx="1">
+          <a:effectRef idx="2">
             <a:schemeClr val="accent1"/>
           </a:effectRef>
           <a:fontRef idx="minor">
-            <a:schemeClr val="tx1"/>
+            <a:schemeClr val="lt1"/>
           </a:fontRef>
         </p:style>
-      </p:cxnSp>
-      <p:sp>
-        <p:nvSpPr>
-          <p:cNvPr id="26" name="TextBox 25"/>
+        <p:txBody>
+          <a:bodyPr rtlCol="0" anchor="ctr"/>
+          <a:lstStyle/>
+          <a:p>
+            <a:pPr algn="ctr"/>
+          </a:p>
+        </p:txBody>
+      </p:sp>
+      <p:sp>
+        <p:nvSpPr>
+          <p:cNvPr id="58" name="TextBox 57"/>
           <p:cNvSpPr txBox="1"/>
           <p:nvPr/>
         </p:nvSpPr>
         <p:spPr>
           <a:xfrm>
-            <a:off x="6309360" y="4206240"/>
-            <a:ext cx="1280160" cy="320040"/>
+            <a:off x="8915400" y="1508760"/>
+            <a:ext cx="2468880" cy="411480"/>
           </a:xfrm>
           <a:prstGeom prst="rect">
             <a:avLst/>
@@ -6747,101 +8025,191 @@
           </a:bodyPr>
           <a:lstStyle/>
           <a:p>
-            <a:pPr algn="l"/>
-            <a:r>
-              <a:rPr sz="1000" b="0" i="1">
+            <a:pPr algn="ctr"/>
+            <a:r>
+              <a:rPr sz="1500" b="1" i="0">
                 <a:solidFill>
                   <a:srgbClr val="0B2A4A"/>
                 </a:solidFill>
                 <a:latin typeface="Calibri"/>
               </a:rPr>
-              <a:t>Front appends/pops</a:t>
-            </a:r>
-          </a:p>
-        </p:txBody>
-      </p:sp>
-      <p:cxnSp>
-        <p:nvCxnSpPr>
-          <p:cNvPr id="27" name="Connector 26"/>
-          <p:cNvCxnSpPr/>
-          <p:nvPr/>
-        </p:nvCxnSpPr>
-        <p:spPr>
-          <a:xfrm flipH="1">
-            <a:off x="11064240" y="3383280"/>
-            <a:ext cx="548640" cy="0"/>
-          </a:xfrm>
-          <a:prstGeom prst="line">
-            <a:avLst/>
-          </a:prstGeom>
-          <a:ln w="28575">
+              <a:t>4. Dequeue C &amp; D</a:t>
+            </a:r>
+          </a:p>
+        </p:txBody>
+      </p:sp>
+      <p:sp>
+        <p:nvSpPr>
+          <p:cNvPr id="59" name="Rectangle 58"/>
+          <p:cNvSpPr/>
+          <p:nvPr/>
+        </p:nvSpPr>
+        <p:spPr>
+          <a:xfrm>
+            <a:off x="9258300" y="2011680"/>
+            <a:ext cx="411480" cy="411480"/>
+          </a:xfrm>
+          <a:prstGeom prst="rect">
+            <a:avLst/>
+          </a:prstGeom>
+          <a:solidFill>
+            <a:srgbClr val="6A1B9A"/>
+          </a:solidFill>
+          <a:ln w="12700">
             <a:solidFill>
-              <a:srgbClr val="127A8A"/>
+              <a:srgbClr val="333D4A"/>
             </a:solidFill>
-            <a:tailEnd type="triangle" w="med" len="med"/>
           </a:ln>
+          <a:effectLst/>
         </p:spPr>
         <p:style>
-          <a:lnRef idx="2">
+          <a:lnRef idx="1">
             <a:schemeClr val="accent1"/>
           </a:lnRef>
-          <a:fillRef idx="0">
+          <a:fillRef idx="3">
             <a:schemeClr val="accent1"/>
           </a:fillRef>
-          <a:effectRef idx="1">
+          <a:effectRef idx="2">
             <a:schemeClr val="accent1"/>
           </a:effectRef>
           <a:fontRef idx="minor">
-            <a:schemeClr val="tx1"/>
+            <a:schemeClr val="lt1"/>
           </a:fontRef>
         </p:style>
-      </p:cxnSp>
-      <p:cxnSp>
-        <p:nvCxnSpPr>
-          <p:cNvPr id="28" name="Connector 27"/>
-          <p:cNvCxnSpPr/>
-          <p:nvPr/>
-        </p:nvCxnSpPr>
-        <p:spPr>
-          <a:xfrm>
-            <a:off x="11064240" y="3931920"/>
-            <a:ext cx="548640" cy="0"/>
-          </a:xfrm>
-          <a:prstGeom prst="line">
-            <a:avLst/>
-          </a:prstGeom>
-          <a:ln w="28575">
+        <p:txBody>
+          <a:bodyPr rtlCol="0" anchor="ctr"/>
+          <a:lstStyle/>
+          <a:p>
+            <a:pPr algn="ctr"/>
+          </a:p>
+        </p:txBody>
+      </p:sp>
+      <p:sp>
+        <p:nvSpPr>
+          <p:cNvPr id="60" name="TextBox 59"/>
+          <p:cNvSpPr txBox="1"/>
+          <p:nvPr/>
+        </p:nvSpPr>
+        <p:spPr>
+          <a:xfrm>
+            <a:off x="9258300" y="2084832"/>
+            <a:ext cx="411480" cy="320040"/>
+          </a:xfrm>
+          <a:prstGeom prst="rect">
+            <a:avLst/>
+          </a:prstGeom>
+          <a:noFill/>
+        </p:spPr>
+        <p:txBody>
+          <a:bodyPr wrap="square" lIns="45720" rIns="45720" tIns="18288" bIns="18288" anchor="t">
+            <a:spAutoFit/>
+          </a:bodyPr>
+          <a:lstStyle/>
+          <a:p>
+            <a:pPr algn="ctr"/>
+            <a:r>
+              <a:rPr sz="1400" b="1" i="0">
+                <a:solidFill>
+                  <a:srgbClr val="FFFFFF"/>
+                </a:solidFill>
+                <a:latin typeface="Calibri"/>
+              </a:rPr>
+              <a:t>E</a:t>
+            </a:r>
+          </a:p>
+        </p:txBody>
+      </p:sp>
+      <p:sp>
+        <p:nvSpPr>
+          <p:cNvPr id="61" name="TextBox 60"/>
+          <p:cNvSpPr txBox="1"/>
+          <p:nvPr/>
+        </p:nvSpPr>
+        <p:spPr>
+          <a:xfrm>
+            <a:off x="9258300" y="2450592"/>
+            <a:ext cx="411480" cy="228600"/>
+          </a:xfrm>
+          <a:prstGeom prst="rect">
+            <a:avLst/>
+          </a:prstGeom>
+          <a:noFill/>
+        </p:spPr>
+        <p:txBody>
+          <a:bodyPr wrap="square" lIns="45720" rIns="45720" tIns="18288" bIns="18288" anchor="t">
+            <a:spAutoFit/>
+          </a:bodyPr>
+          <a:lstStyle/>
+          <a:p>
+            <a:pPr algn="ctr"/>
+            <a:r>
+              <a:rPr sz="900" b="0" i="0">
+                <a:solidFill>
+                  <a:srgbClr val="333D4A"/>
+                </a:solidFill>
+                <a:latin typeface="Calibri"/>
+              </a:rPr>
+              <a:t>0</a:t>
+            </a:r>
+          </a:p>
+        </p:txBody>
+      </p:sp>
+      <p:sp>
+        <p:nvSpPr>
+          <p:cNvPr id="62" name="Rectangle 61"/>
+          <p:cNvSpPr/>
+          <p:nvPr/>
+        </p:nvSpPr>
+        <p:spPr>
+          <a:xfrm>
+            <a:off x="9715500" y="2011680"/>
+            <a:ext cx="411480" cy="411480"/>
+          </a:xfrm>
+          <a:prstGeom prst="rect">
+            <a:avLst/>
+          </a:prstGeom>
+          <a:solidFill>
+            <a:srgbClr val="FFFFFF"/>
+          </a:solidFill>
+          <a:ln w="12700">
             <a:solidFill>
-              <a:srgbClr val="E0A81F"/>
+              <a:srgbClr val="333D4A"/>
             </a:solidFill>
-            <a:tailEnd type="triangle" w="med" len="med"/>
           </a:ln>
+          <a:effectLst/>
         </p:spPr>
         <p:style>
-          <a:lnRef idx="2">
+          <a:lnRef idx="1">
             <a:schemeClr val="accent1"/>
           </a:lnRef>
-          <a:fillRef idx="0">
+          <a:fillRef idx="3">
             <a:schemeClr val="accent1"/>
           </a:fillRef>
-          <a:effectRef idx="1">
+          <a:effectRef idx="2">
             <a:schemeClr val="accent1"/>
           </a:effectRef>
           <a:fontRef idx="minor">
-            <a:schemeClr val="tx1"/>
+            <a:schemeClr val="lt1"/>
           </a:fontRef>
         </p:style>
-      </p:cxnSp>
-      <p:sp>
-        <p:nvSpPr>
-          <p:cNvPr id="29" name="TextBox 28"/>
+        <p:txBody>
+          <a:bodyPr rtlCol="0" anchor="ctr"/>
+          <a:lstStyle/>
+          <a:p>
+            <a:pPr algn="ctr"/>
+          </a:p>
+        </p:txBody>
+      </p:sp>
+      <p:sp>
+        <p:nvSpPr>
+          <p:cNvPr id="63" name="TextBox 62"/>
           <p:cNvSpPr txBox="1"/>
           <p:nvPr/>
         </p:nvSpPr>
         <p:spPr>
           <a:xfrm>
-            <a:off x="10515600" y="4206240"/>
-            <a:ext cx="1280160" cy="320040"/>
+            <a:off x="9715500" y="2084832"/>
+            <a:ext cx="411480" cy="320040"/>
           </a:xfrm>
           <a:prstGeom prst="rect">
             <a:avLst/>
@@ -6854,15 +8222,452 @@
           </a:bodyPr>
           <a:lstStyle/>
           <a:p>
-            <a:pPr algn="l"/>
-            <a:r>
-              <a:rPr sz="1000" b="0" i="1">
+            <a:pPr algn="ctr"/>
+            <a:r>
+              <a:rPr sz="1400" b="1" i="0">
+                <a:solidFill>
+                  <a:srgbClr val="333D4A"/>
+                </a:solidFill>
+                <a:latin typeface="Calibri"/>
+              </a:rPr>
+              <a:t> </a:t>
+            </a:r>
+          </a:p>
+        </p:txBody>
+      </p:sp>
+      <p:sp>
+        <p:nvSpPr>
+          <p:cNvPr id="64" name="TextBox 63"/>
+          <p:cNvSpPr txBox="1"/>
+          <p:nvPr/>
+        </p:nvSpPr>
+        <p:spPr>
+          <a:xfrm>
+            <a:off x="9715500" y="2450592"/>
+            <a:ext cx="411480" cy="228600"/>
+          </a:xfrm>
+          <a:prstGeom prst="rect">
+            <a:avLst/>
+          </a:prstGeom>
+          <a:noFill/>
+        </p:spPr>
+        <p:txBody>
+          <a:bodyPr wrap="square" lIns="45720" rIns="45720" tIns="18288" bIns="18288" anchor="t">
+            <a:spAutoFit/>
+          </a:bodyPr>
+          <a:lstStyle/>
+          <a:p>
+            <a:pPr algn="ctr"/>
+            <a:r>
+              <a:rPr sz="900" b="0" i="0">
+                <a:solidFill>
+                  <a:srgbClr val="333D4A"/>
+                </a:solidFill>
+                <a:latin typeface="Calibri"/>
+              </a:rPr>
+              <a:t>1</a:t>
+            </a:r>
+          </a:p>
+        </p:txBody>
+      </p:sp>
+      <p:sp>
+        <p:nvSpPr>
+          <p:cNvPr id="65" name="Rectangle 64"/>
+          <p:cNvSpPr/>
+          <p:nvPr/>
+        </p:nvSpPr>
+        <p:spPr>
+          <a:xfrm>
+            <a:off x="10172700" y="2011680"/>
+            <a:ext cx="411480" cy="411480"/>
+          </a:xfrm>
+          <a:prstGeom prst="rect">
+            <a:avLst/>
+          </a:prstGeom>
+          <a:solidFill>
+            <a:srgbClr val="FFFFFF"/>
+          </a:solidFill>
+          <a:ln w="12700">
+            <a:solidFill>
+              <a:srgbClr val="333D4A"/>
+            </a:solidFill>
+          </a:ln>
+          <a:effectLst/>
+        </p:spPr>
+        <p:style>
+          <a:lnRef idx="1">
+            <a:schemeClr val="accent1"/>
+          </a:lnRef>
+          <a:fillRef idx="3">
+            <a:schemeClr val="accent1"/>
+          </a:fillRef>
+          <a:effectRef idx="2">
+            <a:schemeClr val="accent1"/>
+          </a:effectRef>
+          <a:fontRef idx="minor">
+            <a:schemeClr val="lt1"/>
+          </a:fontRef>
+        </p:style>
+        <p:txBody>
+          <a:bodyPr rtlCol="0" anchor="ctr"/>
+          <a:lstStyle/>
+          <a:p>
+            <a:pPr algn="ctr"/>
+          </a:p>
+        </p:txBody>
+      </p:sp>
+      <p:sp>
+        <p:nvSpPr>
+          <p:cNvPr id="66" name="TextBox 65"/>
+          <p:cNvSpPr txBox="1"/>
+          <p:nvPr/>
+        </p:nvSpPr>
+        <p:spPr>
+          <a:xfrm>
+            <a:off x="10172700" y="2084832"/>
+            <a:ext cx="411480" cy="320040"/>
+          </a:xfrm>
+          <a:prstGeom prst="rect">
+            <a:avLst/>
+          </a:prstGeom>
+          <a:noFill/>
+        </p:spPr>
+        <p:txBody>
+          <a:bodyPr wrap="square" lIns="45720" rIns="45720" tIns="18288" bIns="18288" anchor="t">
+            <a:spAutoFit/>
+          </a:bodyPr>
+          <a:lstStyle/>
+          <a:p>
+            <a:pPr algn="ctr"/>
+            <a:r>
+              <a:rPr sz="1400" b="1" i="0">
+                <a:solidFill>
+                  <a:srgbClr val="333D4A"/>
+                </a:solidFill>
+                <a:latin typeface="Calibri"/>
+              </a:rPr>
+              <a:t> </a:t>
+            </a:r>
+          </a:p>
+        </p:txBody>
+      </p:sp>
+      <p:sp>
+        <p:nvSpPr>
+          <p:cNvPr id="67" name="TextBox 66"/>
+          <p:cNvSpPr txBox="1"/>
+          <p:nvPr/>
+        </p:nvSpPr>
+        <p:spPr>
+          <a:xfrm>
+            <a:off x="10172700" y="2450592"/>
+            <a:ext cx="411480" cy="228600"/>
+          </a:xfrm>
+          <a:prstGeom prst="rect">
+            <a:avLst/>
+          </a:prstGeom>
+          <a:noFill/>
+        </p:spPr>
+        <p:txBody>
+          <a:bodyPr wrap="square" lIns="45720" rIns="45720" tIns="18288" bIns="18288" anchor="t">
+            <a:spAutoFit/>
+          </a:bodyPr>
+          <a:lstStyle/>
+          <a:p>
+            <a:pPr algn="ctr"/>
+            <a:r>
+              <a:rPr sz="900" b="0" i="0">
+                <a:solidFill>
+                  <a:srgbClr val="333D4A"/>
+                </a:solidFill>
+                <a:latin typeface="Calibri"/>
+              </a:rPr>
+              <a:t>2</a:t>
+            </a:r>
+          </a:p>
+        </p:txBody>
+      </p:sp>
+      <p:sp>
+        <p:nvSpPr>
+          <p:cNvPr id="68" name="Rectangle 67"/>
+          <p:cNvSpPr/>
+          <p:nvPr/>
+        </p:nvSpPr>
+        <p:spPr>
+          <a:xfrm>
+            <a:off x="10629900" y="2011680"/>
+            <a:ext cx="411480" cy="411480"/>
+          </a:xfrm>
+          <a:prstGeom prst="rect">
+            <a:avLst/>
+          </a:prstGeom>
+          <a:solidFill>
+            <a:srgbClr val="FFFFFF"/>
+          </a:solidFill>
+          <a:ln w="12700">
+            <a:solidFill>
+              <a:srgbClr val="333D4A"/>
+            </a:solidFill>
+          </a:ln>
+          <a:effectLst/>
+        </p:spPr>
+        <p:style>
+          <a:lnRef idx="1">
+            <a:schemeClr val="accent1"/>
+          </a:lnRef>
+          <a:fillRef idx="3">
+            <a:schemeClr val="accent1"/>
+          </a:fillRef>
+          <a:effectRef idx="2">
+            <a:schemeClr val="accent1"/>
+          </a:effectRef>
+          <a:fontRef idx="minor">
+            <a:schemeClr val="lt1"/>
+          </a:fontRef>
+        </p:style>
+        <p:txBody>
+          <a:bodyPr rtlCol="0" anchor="ctr"/>
+          <a:lstStyle/>
+          <a:p>
+            <a:pPr algn="ctr"/>
+          </a:p>
+        </p:txBody>
+      </p:sp>
+      <p:sp>
+        <p:nvSpPr>
+          <p:cNvPr id="69" name="TextBox 68"/>
+          <p:cNvSpPr txBox="1"/>
+          <p:nvPr/>
+        </p:nvSpPr>
+        <p:spPr>
+          <a:xfrm>
+            <a:off x="10629900" y="2084832"/>
+            <a:ext cx="411480" cy="320040"/>
+          </a:xfrm>
+          <a:prstGeom prst="rect">
+            <a:avLst/>
+          </a:prstGeom>
+          <a:noFill/>
+        </p:spPr>
+        <p:txBody>
+          <a:bodyPr wrap="square" lIns="45720" rIns="45720" tIns="18288" bIns="18288" anchor="t">
+            <a:spAutoFit/>
+          </a:bodyPr>
+          <a:lstStyle/>
+          <a:p>
+            <a:pPr algn="ctr"/>
+            <a:r>
+              <a:rPr sz="1400" b="1" i="0">
+                <a:solidFill>
+                  <a:srgbClr val="333D4A"/>
+                </a:solidFill>
+                <a:latin typeface="Calibri"/>
+              </a:rPr>
+              <a:t> </a:t>
+            </a:r>
+          </a:p>
+        </p:txBody>
+      </p:sp>
+      <p:sp>
+        <p:nvSpPr>
+          <p:cNvPr id="70" name="TextBox 69"/>
+          <p:cNvSpPr txBox="1"/>
+          <p:nvPr/>
+        </p:nvSpPr>
+        <p:spPr>
+          <a:xfrm>
+            <a:off x="10629900" y="2450592"/>
+            <a:ext cx="411480" cy="228600"/>
+          </a:xfrm>
+          <a:prstGeom prst="rect">
+            <a:avLst/>
+          </a:prstGeom>
+          <a:noFill/>
+        </p:spPr>
+        <p:txBody>
+          <a:bodyPr wrap="square" lIns="45720" rIns="45720" tIns="18288" bIns="18288" anchor="t">
+            <a:spAutoFit/>
+          </a:bodyPr>
+          <a:lstStyle/>
+          <a:p>
+            <a:pPr algn="ctr"/>
+            <a:r>
+              <a:rPr sz="900" b="0" i="0">
+                <a:solidFill>
+                  <a:srgbClr val="333D4A"/>
+                </a:solidFill>
+                <a:latin typeface="Calibri"/>
+              </a:rPr>
+              <a:t>3</a:t>
+            </a:r>
+          </a:p>
+        </p:txBody>
+      </p:sp>
+      <p:sp>
+        <p:nvSpPr>
+          <p:cNvPr id="71" name="TextBox 70"/>
+          <p:cNvSpPr txBox="1"/>
+          <p:nvPr/>
+        </p:nvSpPr>
+        <p:spPr>
+          <a:xfrm>
+            <a:off x="8915400" y="2834640"/>
+            <a:ext cx="2468880" cy="548640"/>
+          </a:xfrm>
+          <a:prstGeom prst="rect">
+            <a:avLst/>
+          </a:prstGeom>
+          <a:noFill/>
+        </p:spPr>
+        <p:txBody>
+          <a:bodyPr wrap="square" lIns="45720" rIns="45720" tIns="18288" bIns="18288" anchor="t">
+            <a:spAutoFit/>
+          </a:bodyPr>
+          <a:lstStyle/>
+          <a:p>
+            <a:pPr algn="ctr"/>
+            <a:r>
+              <a:rPr sz="1200" b="1" i="0">
+                <a:solidFill>
+                  <a:srgbClr val="333D4A"/>
+                </a:solidFill>
+                <a:latin typeface="Calibri"/>
+              </a:rPr>
+              <a:t>front: index 0
+rear: index 0</a:t>
+            </a:r>
+          </a:p>
+        </p:txBody>
+      </p:sp>
+      <p:sp>
+        <p:nvSpPr>
+          <p:cNvPr id="72" name="TextBox 71"/>
+          <p:cNvSpPr txBox="1"/>
+          <p:nvPr/>
+        </p:nvSpPr>
+        <p:spPr>
+          <a:xfrm>
+            <a:off x="9025128" y="3429000"/>
+            <a:ext cx="2249424" cy="2468880"/>
+          </a:xfrm>
+          <a:prstGeom prst="rect">
+            <a:avLst/>
+          </a:prstGeom>
+          <a:noFill/>
+        </p:spPr>
+        <p:txBody>
+          <a:bodyPr wrap="square" lIns="45720" rIns="45720">
+            <a:spAutoFit/>
+          </a:bodyPr>
+          <a:lstStyle/>
+          <a:p>
+            <a:pPr algn="l">
+              <a:lnSpc>
+                <a:spcPct val="120000"/>
+              </a:lnSpc>
+              <a:spcAft>
+                <a:spcPts val="400"/>
+              </a:spcAft>
+            </a:pPr>
+            <a:r>
+              <a:rPr sz="1100" b="1">
+                <a:solidFill>
+                  <a:srgbClr val="127A8A"/>
+                </a:solidFill>
+                <a:latin typeface="Calibri"/>
+              </a:rPr>
+              <a:t>▸  </a:t>
+            </a:r>
+            <a:r>
+              <a:rPr sz="1100" b="1">
                 <a:solidFill>
                   <a:srgbClr val="0B2A4A"/>
                 </a:solidFill>
                 <a:latin typeface="Calibri"/>
               </a:rPr>
-              <a:t>Rear appends/pops</a:t>
+              <a:t>Front wraps. </a:t>
+            </a:r>
+            <a:r>
+              <a:rPr sz="1100">
+                <a:solidFill>
+                  <a:srgbClr val="333D4A"/>
+                </a:solidFill>
+                <a:latin typeface="Calibri"/>
+              </a:rPr>
+              <a:t>C at 2, then D at 3 are removed.</a:t>
+            </a:r>
+          </a:p>
+          <a:p>
+            <a:pPr algn="l">
+              <a:lnSpc>
+                <a:spcPct val="120000"/>
+              </a:lnSpc>
+              <a:spcAft>
+                <a:spcPts val="400"/>
+              </a:spcAft>
+            </a:pPr>
+            <a:r>
+              <a:rPr sz="1100" b="1">
+                <a:solidFill>
+                  <a:srgbClr val="127A8A"/>
+                </a:solidFill>
+                <a:latin typeface="Calibri"/>
+              </a:rPr>
+              <a:t>▸  </a:t>
+            </a:r>
+            <a:r>
+              <a:rPr sz="1100" b="1">
+                <a:solidFill>
+                  <a:srgbClr val="0B2A4A"/>
+                </a:solidFill>
+                <a:latin typeface="Calibri"/>
+              </a:rPr>
+              <a:t>Modulo wrapping: </a:t>
+            </a:r>
+            <a:r>
+              <a:rPr sz="1100">
+                <a:solidFill>
+                  <a:srgbClr val="333D4A"/>
+                </a:solidFill>
+                <a:latin typeface="Calibri"/>
+              </a:rPr>
+              <a:t>(3 + 1) % 4 = 0.</a:t>
+            </a:r>
+          </a:p>
+          <a:p>
+            <a:pPr algn="l">
+              <a:lnSpc>
+                <a:spcPct val="120000"/>
+              </a:lnSpc>
+              <a:spcAft>
+                <a:spcPts val="400"/>
+              </a:spcAft>
+            </a:pPr>
+            <a:r>
+              <a:rPr sz="1100" b="1">
+                <a:solidFill>
+                  <a:srgbClr val="127A8A"/>
+                </a:solidFill>
+                <a:latin typeface="Calibri"/>
+              </a:rPr>
+              <a:t>▸  </a:t>
+            </a:r>
+            <a:r>
+              <a:rPr sz="1100" b="1">
+                <a:solidFill>
+                  <a:srgbClr val="0B2A4A"/>
+                </a:solidFill>
+                <a:latin typeface="Calibri"/>
+              </a:rPr>
+              <a:t>Front = Rear = 0 </a:t>
+            </a:r>
+            <a:r>
+              <a:rPr sz="1100">
+                <a:solidFill>
+                  <a:srgbClr val="333D4A"/>
+                </a:solidFill>
+                <a:latin typeface="Calibri"/>
+              </a:rPr>
+              <a:t>pointing to E.</a:t>
             </a:r>
           </a:p>
         </p:txBody>
@@ -7003,7 +8808,7 @@
                 </a:solidFill>
                 <a:latin typeface="Calibri"/>
               </a:rPr>
-              <a:t>7.  Real-World Applications</a:t>
+              <a:t>6.  Double-Ended Queue (Deque)</a:t>
             </a:r>
           </a:p>
         </p:txBody>
@@ -7038,7 +8843,7 @@
                 </a:solidFill>
                 <a:latin typeface="Calibri"/>
               </a:rPr>
-              <a:t>How Stacks and Queues power critical computer systems</a:t>
+              <a:t>Linear structure supporting insertions and deletions at both ends</a:t>
             </a:r>
           </a:p>
         </p:txBody>
@@ -7152,27 +8957,196 @@
                 </a:solidFill>
                 <a:latin typeface="Calibri"/>
               </a:rPr>
-              <a:t>Slide 13 / 17</a:t>
-            </a:r>
-          </a:p>
-        </p:txBody>
-      </p:sp>
-      <p:sp>
-        <p:nvSpPr>
-          <p:cNvPr id="9" name="Rectangle 8"/>
+              <a:t>Slide 13 / 18</a:t>
+            </a:r>
+          </a:p>
+        </p:txBody>
+      </p:sp>
+      <p:sp>
+        <p:nvSpPr>
+          <p:cNvPr id="9" name="TextBox 8"/>
+          <p:cNvSpPr txBox="1"/>
+          <p:nvPr/>
+        </p:nvSpPr>
+        <p:spPr>
+          <a:xfrm>
+            <a:off x="822960" y="1325880"/>
+            <a:ext cx="5303520" cy="457200"/>
+          </a:xfrm>
+          <a:prstGeom prst="rect">
+            <a:avLst/>
+          </a:prstGeom>
+          <a:noFill/>
+        </p:spPr>
+        <p:txBody>
+          <a:bodyPr wrap="square" lIns="45720" rIns="45720" tIns="18288" bIns="18288" anchor="t">
+            <a:spAutoFit/>
+          </a:bodyPr>
+          <a:lstStyle/>
+          <a:p>
+            <a:pPr algn="l"/>
+            <a:r>
+              <a:rPr sz="2000" b="1" i="0">
+                <a:solidFill>
+                  <a:srgbClr val="0B2A4A"/>
+                </a:solidFill>
+                <a:latin typeface="Calibri"/>
+              </a:rPr>
+              <a:t>Generalizing Stacks and Queues</a:t>
+            </a:r>
+          </a:p>
+        </p:txBody>
+      </p:sp>
+      <p:sp>
+        <p:nvSpPr>
+          <p:cNvPr id="10" name="TextBox 9"/>
+          <p:cNvSpPr txBox="1"/>
+          <p:nvPr/>
+        </p:nvSpPr>
+        <p:spPr>
+          <a:xfrm>
+            <a:off x="822960" y="1828800"/>
+            <a:ext cx="5303520" cy="2560320"/>
+          </a:xfrm>
+          <a:prstGeom prst="rect">
+            <a:avLst/>
+          </a:prstGeom>
+          <a:noFill/>
+        </p:spPr>
+        <p:txBody>
+          <a:bodyPr wrap="square" lIns="45720" rIns="45720">
+            <a:spAutoFit/>
+          </a:bodyPr>
+          <a:lstStyle/>
+          <a:p>
+            <a:pPr algn="l">
+              <a:lnSpc>
+                <a:spcPct val="135000"/>
+              </a:lnSpc>
+              <a:spcAft>
+                <a:spcPts val="400"/>
+              </a:spcAft>
+            </a:pPr>
+            <a:r>
+              <a:rPr sz="1500" b="1">
+                <a:solidFill>
+                  <a:srgbClr val="127A8A"/>
+                </a:solidFill>
+                <a:latin typeface="Calibri"/>
+              </a:rPr>
+              <a:t>▸  </a:t>
+            </a:r>
+            <a:r>
+              <a:rPr sz="1500" b="1">
+                <a:solidFill>
+                  <a:srgbClr val="0B2A4A"/>
+                </a:solidFill>
+                <a:latin typeface="Calibri"/>
+              </a:rPr>
+              <a:t>Combination of ADTs.  </a:t>
+            </a:r>
+            <a:r>
+              <a:rPr sz="1500">
+                <a:solidFill>
+                  <a:srgbClr val="333D4A"/>
+                </a:solidFill>
+                <a:latin typeface="Calibri"/>
+              </a:rPr>
+              <a:t>Supports push/pop at the front, and push/pop at the rear.</a:t>
+            </a:r>
+          </a:p>
+          <a:p>
+            <a:pPr algn="l">
+              <a:lnSpc>
+                <a:spcPct val="135000"/>
+              </a:lnSpc>
+              <a:spcAft>
+                <a:spcPts val="400"/>
+              </a:spcAft>
+            </a:pPr>
+            <a:r>
+              <a:rPr sz="1500" b="1">
+                <a:solidFill>
+                  <a:srgbClr val="127A8A"/>
+                </a:solidFill>
+                <a:latin typeface="Calibri"/>
+              </a:rPr>
+              <a:t>▸  </a:t>
+            </a:r>
+            <a:r>
+              <a:rPr sz="1500" b="1">
+                <a:solidFill>
+                  <a:srgbClr val="0B2A4A"/>
+                </a:solidFill>
+                <a:latin typeface="Calibri"/>
+              </a:rPr>
+              <a:t>Versatile.  </a:t>
+            </a:r>
+            <a:r>
+              <a:rPr sz="1500">
+                <a:solidFill>
+                  <a:srgbClr val="333D4A"/>
+                </a:solidFill>
+                <a:latin typeface="Calibri"/>
+              </a:rPr>
+              <a:t>Can act as a Stack, a Queue, or both simultaneously.</a:t>
+            </a:r>
+          </a:p>
+          <a:p>
+            <a:pPr algn="l">
+              <a:lnSpc>
+                <a:spcPct val="135000"/>
+              </a:lnSpc>
+              <a:spcAft>
+                <a:spcPts val="400"/>
+              </a:spcAft>
+            </a:pPr>
+            <a:r>
+              <a:rPr sz="1500" b="1">
+                <a:solidFill>
+                  <a:srgbClr val="127A8A"/>
+                </a:solidFill>
+                <a:latin typeface="Calibri"/>
+              </a:rPr>
+              <a:t>▸  </a:t>
+            </a:r>
+            <a:r>
+              <a:rPr sz="1500" b="1">
+                <a:solidFill>
+                  <a:srgbClr val="0B2A4A"/>
+                </a:solidFill>
+                <a:latin typeface="Calibri"/>
+              </a:rPr>
+              <a:t>Python standard.  </a:t>
+            </a:r>
+            <a:r>
+              <a:rPr sz="1500">
+                <a:solidFill>
+                  <a:srgbClr val="333D4A"/>
+                </a:solidFill>
+                <a:latin typeface="Calibri"/>
+              </a:rPr>
+              <a:t>Implemented natively as collections.deque in Python, optimized for fast O(1) appends and pops at both ends.</a:t>
+            </a:r>
+          </a:p>
+        </p:txBody>
+      </p:sp>
+      <p:sp>
+        <p:nvSpPr>
+          <p:cNvPr id="11" name="Rectangle 10"/>
           <p:cNvSpPr/>
           <p:nvPr/>
         </p:nvSpPr>
         <p:spPr>
           <a:xfrm>
-            <a:off x="548640" y="1417320"/>
-            <a:ext cx="3657600" cy="502920"/>
+            <a:off x="822960" y="4480560"/>
+            <a:ext cx="5303520" cy="1920240"/>
           </a:xfrm>
           <a:prstGeom prst="rect">
             <a:avLst/>
           </a:prstGeom>
           <a:solidFill>
-            <a:srgbClr val="0B2A4A"/>
+            <a:srgbClr val="1E1E2E"/>
           </a:solidFill>
           <a:ln>
             <a:noFill/>
@@ -7203,14 +9177,58 @@
       </p:sp>
       <p:sp>
         <p:nvSpPr>
-          <p:cNvPr id="10" name="TextBox 9"/>
+          <p:cNvPr id="12" name="Rectangle 11"/>
+          <p:cNvSpPr/>
+          <p:nvPr/>
+        </p:nvSpPr>
+        <p:spPr>
+          <a:xfrm>
+            <a:off x="822960" y="4480560"/>
+            <a:ext cx="73152" cy="1920240"/>
+          </a:xfrm>
+          <a:prstGeom prst="rect">
+            <a:avLst/>
+          </a:prstGeom>
+          <a:solidFill>
+            <a:srgbClr val="E0A81F"/>
+          </a:solidFill>
+          <a:ln>
+            <a:noFill/>
+          </a:ln>
+          <a:effectLst/>
+        </p:spPr>
+        <p:style>
+          <a:lnRef idx="1">
+            <a:schemeClr val="accent1"/>
+          </a:lnRef>
+          <a:fillRef idx="3">
+            <a:schemeClr val="accent1"/>
+          </a:fillRef>
+          <a:effectRef idx="2">
+            <a:schemeClr val="accent1"/>
+          </a:effectRef>
+          <a:fontRef idx="minor">
+            <a:schemeClr val="lt1"/>
+          </a:fontRef>
+        </p:style>
+        <p:txBody>
+          <a:bodyPr rtlCol="0" anchor="ctr"/>
+          <a:lstStyle/>
+          <a:p>
+            <a:pPr algn="ctr"/>
+          </a:p>
+        </p:txBody>
+      </p:sp>
+      <p:sp>
+        <p:nvSpPr>
+          <p:cNvPr id="13" name="TextBox 12"/>
           <p:cNvSpPr txBox="1"/>
           <p:nvPr/>
         </p:nvSpPr>
         <p:spPr>
           <a:xfrm>
-            <a:off x="548640" y="1417320"/>
-            <a:ext cx="3657600" cy="502920"/>
+            <a:off x="960120" y="4572000"/>
+            <a:ext cx="5074920" cy="1737360"/>
           </a:xfrm>
           <a:prstGeom prst="rect">
             <a:avLst/>
@@ -7218,34 +9236,166 @@
           <a:noFill/>
         </p:spPr>
         <p:txBody>
-          <a:bodyPr wrap="square" lIns="45720" rIns="45720" tIns="18288" bIns="18288" anchor="ctr">
+          <a:bodyPr wrap="square">
             <a:spAutoFit/>
           </a:bodyPr>
           <a:lstStyle/>
           <a:p>
-            <a:pPr algn="ctr"/>
-            <a:r>
-              <a:rPr sz="1500" b="1" i="0">
-                <a:solidFill>
-                  <a:srgbClr val="FFFFFF"/>
-                </a:solidFill>
-                <a:latin typeface="Calibri"/>
-              </a:rPr>
-              <a:t>The Program Call Stack</a:t>
-            </a:r>
-          </a:p>
-        </p:txBody>
-      </p:sp>
-      <p:sp>
-        <p:nvSpPr>
-          <p:cNvPr id="11" name="Rectangle 10"/>
+            <a:pPr algn="l">
+              <a:lnSpc>
+                <a:spcPct val="115000"/>
+              </a:lnSpc>
+            </a:pPr>
+            <a:r>
+              <a:rPr sz="1300">
+                <a:solidFill>
+                  <a:srgbClr val="E6E6E6"/>
+                </a:solidFill>
+                <a:latin typeface="Consolas"/>
+              </a:rPr>
+              <a:t>from collections import deque</a:t>
+            </a:r>
+          </a:p>
+          <a:p>
+            <a:pPr algn="l">
+              <a:lnSpc>
+                <a:spcPct val="115000"/>
+              </a:lnSpc>
+            </a:pPr>
+            <a:r>
+              <a:rPr sz="1300">
+                <a:solidFill>
+                  <a:srgbClr val="E6E6E6"/>
+                </a:solidFill>
+                <a:latin typeface="Consolas"/>
+              </a:rPr>
+              <a:t> </a:t>
+            </a:r>
+          </a:p>
+          <a:p>
+            <a:pPr algn="l">
+              <a:lnSpc>
+                <a:spcPct val="115000"/>
+              </a:lnSpc>
+            </a:pPr>
+            <a:r>
+              <a:rPr sz="1300">
+                <a:solidFill>
+                  <a:srgbClr val="E6E6E6"/>
+                </a:solidFill>
+                <a:latin typeface="Consolas"/>
+              </a:rPr>
+              <a:t>dq = deque()          # create deque</a:t>
+            </a:r>
+          </a:p>
+          <a:p>
+            <a:pPr algn="l">
+              <a:lnSpc>
+                <a:spcPct val="115000"/>
+              </a:lnSpc>
+            </a:pPr>
+            <a:r>
+              <a:rPr sz="1300">
+                <a:solidFill>
+                  <a:srgbClr val="E6E6E6"/>
+                </a:solidFill>
+                <a:latin typeface="Consolas"/>
+              </a:rPr>
+              <a:t>dq.append(20)         # rear append: [20]</a:t>
+            </a:r>
+          </a:p>
+          <a:p>
+            <a:pPr algn="l">
+              <a:lnSpc>
+                <a:spcPct val="115000"/>
+              </a:lnSpc>
+            </a:pPr>
+            <a:r>
+              <a:rPr sz="1300">
+                <a:solidFill>
+                  <a:srgbClr val="E6E6E6"/>
+                </a:solidFill>
+                <a:latin typeface="Consolas"/>
+              </a:rPr>
+              <a:t>dq.appendleft(10)     # front append: [10, 20]</a:t>
+            </a:r>
+          </a:p>
+          <a:p>
+            <a:pPr algn="l">
+              <a:lnSpc>
+                <a:spcPct val="115000"/>
+              </a:lnSpc>
+            </a:pPr>
+            <a:r>
+              <a:rPr sz="1300">
+                <a:solidFill>
+                  <a:srgbClr val="E6E6E6"/>
+                </a:solidFill>
+                <a:latin typeface="Consolas"/>
+              </a:rPr>
+              <a:t>dq.append(30)         # rear append: [10, 20, 30]</a:t>
+            </a:r>
+          </a:p>
+          <a:p>
+            <a:pPr algn="l">
+              <a:lnSpc>
+                <a:spcPct val="115000"/>
+              </a:lnSpc>
+            </a:pPr>
+            <a:r>
+              <a:rPr sz="1300">
+                <a:solidFill>
+                  <a:srgbClr val="E6E6E6"/>
+                </a:solidFill>
+                <a:latin typeface="Consolas"/>
+              </a:rPr>
+              <a:t> </a:t>
+            </a:r>
+          </a:p>
+          <a:p>
+            <a:pPr algn="l">
+              <a:lnSpc>
+                <a:spcPct val="115000"/>
+              </a:lnSpc>
+            </a:pPr>
+            <a:r>
+              <a:rPr sz="1300">
+                <a:solidFill>
+                  <a:srgbClr val="E6E6E6"/>
+                </a:solidFill>
+                <a:latin typeface="Consolas"/>
+              </a:rPr>
+              <a:t>dq.popleft()          # front remove: returns 10</a:t>
+            </a:r>
+          </a:p>
+          <a:p>
+            <a:pPr algn="l">
+              <a:lnSpc>
+                <a:spcPct val="115000"/>
+              </a:lnSpc>
+            </a:pPr>
+            <a:r>
+              <a:rPr sz="1300">
+                <a:solidFill>
+                  <a:srgbClr val="E6E6E6"/>
+                </a:solidFill>
+                <a:latin typeface="Consolas"/>
+              </a:rPr>
+              <a:t>dq.pop()              # rear remove: returns 30</a:t>
+            </a:r>
+          </a:p>
+        </p:txBody>
+      </p:sp>
+      <p:sp>
+        <p:nvSpPr>
+          <p:cNvPr id="14" name="Rectangle 13"/>
           <p:cNvSpPr/>
           <p:nvPr/>
         </p:nvSpPr>
         <p:spPr>
           <a:xfrm>
-            <a:off x="548640" y="1920240"/>
-            <a:ext cx="3657600" cy="1691640"/>
+            <a:off x="6492240" y="1325880"/>
+            <a:ext cx="5120640" cy="5029200"/>
           </a:xfrm>
           <a:prstGeom prst="rect">
             <a:avLst/>
@@ -7282,14 +9432,14 @@
       </p:sp>
       <p:sp>
         <p:nvSpPr>
-          <p:cNvPr id="12" name="TextBox 11"/>
+          <p:cNvPr id="15" name="TextBox 14"/>
           <p:cNvSpPr txBox="1"/>
           <p:nvPr/>
         </p:nvSpPr>
         <p:spPr>
           <a:xfrm>
-            <a:off x="713232" y="2075688"/>
-            <a:ext cx="3337560" cy="1463040"/>
+            <a:off x="6492240" y="1554480"/>
+            <a:ext cx="5120640" cy="365760"/>
           </a:xfrm>
           <a:prstGeom prst="rect">
             <a:avLst/>
@@ -7302,35 +9452,35 @@
           </a:bodyPr>
           <a:lstStyle/>
           <a:p>
-            <a:pPr algn="l"/>
-            <a:r>
-              <a:rPr sz="1200" b="0" i="0">
-                <a:solidFill>
-                  <a:srgbClr val="333D4A"/>
-                </a:solidFill>
-                <a:latin typeface="Calibri"/>
-              </a:rPr>
-              <a:t>Manages function execution frames, recursion stack space (costing O(N) auxiliary space), and local variables in runtime environments.</a:t>
-            </a:r>
-          </a:p>
-        </p:txBody>
-      </p:sp>
-      <p:sp>
-        <p:nvSpPr>
-          <p:cNvPr id="13" name="Rectangle 12"/>
+            <a:pPr algn="ctr"/>
+            <a:r>
+              <a:rPr sz="1600" b="1" i="0">
+                <a:solidFill>
+                  <a:srgbClr val="0B2A4A"/>
+                </a:solidFill>
+                <a:latin typeface="Calibri"/>
+              </a:rPr>
+              <a:t>Deque Layout</a:t>
+            </a:r>
+          </a:p>
+        </p:txBody>
+      </p:sp>
+      <p:sp>
+        <p:nvSpPr>
+          <p:cNvPr id="16" name="Rectangle 15"/>
           <p:cNvSpPr/>
           <p:nvPr/>
         </p:nvSpPr>
         <p:spPr>
           <a:xfrm>
-            <a:off x="4434840" y="1417320"/>
-            <a:ext cx="3657600" cy="502920"/>
+            <a:off x="6675120" y="2926080"/>
+            <a:ext cx="4754880" cy="73152"/>
           </a:xfrm>
           <a:prstGeom prst="rect">
             <a:avLst/>
           </a:prstGeom>
           <a:solidFill>
-            <a:srgbClr val="127A8A"/>
+            <a:srgbClr val="333D4A"/>
           </a:solidFill>
           <a:ln>
             <a:noFill/>
@@ -7361,55 +9511,20 @@
       </p:sp>
       <p:sp>
         <p:nvSpPr>
-          <p:cNvPr id="14" name="TextBox 13"/>
-          <p:cNvSpPr txBox="1"/>
-          <p:nvPr/>
-        </p:nvSpPr>
-        <p:spPr>
-          <a:xfrm>
-            <a:off x="4434840" y="1417320"/>
-            <a:ext cx="3657600" cy="502920"/>
-          </a:xfrm>
-          <a:prstGeom prst="rect">
-            <a:avLst/>
-          </a:prstGeom>
-          <a:noFill/>
-        </p:spPr>
-        <p:txBody>
-          <a:bodyPr wrap="square" lIns="45720" rIns="45720" tIns="18288" bIns="18288" anchor="ctr">
-            <a:spAutoFit/>
-          </a:bodyPr>
-          <a:lstStyle/>
-          <a:p>
-            <a:pPr algn="ctr"/>
-            <a:r>
-              <a:rPr sz="1500" b="1" i="0">
-                <a:solidFill>
-                  <a:srgbClr val="FFFFFF"/>
-                </a:solidFill>
-                <a:latin typeface="Calibri"/>
-              </a:rPr>
-              <a:t>Undo/Redo History</a:t>
-            </a:r>
-          </a:p>
-        </p:txBody>
-      </p:sp>
-      <p:sp>
-        <p:nvSpPr>
-          <p:cNvPr id="15" name="Rectangle 14"/>
+          <p:cNvPr id="17" name="Rectangle 16"/>
           <p:cNvSpPr/>
           <p:nvPr/>
         </p:nvSpPr>
         <p:spPr>
           <a:xfrm>
-            <a:off x="4434840" y="1920240"/>
-            <a:ext cx="3657600" cy="1691640"/>
+            <a:off x="6675120" y="4389120"/>
+            <a:ext cx="4754880" cy="73152"/>
           </a:xfrm>
           <a:prstGeom prst="rect">
             <a:avLst/>
           </a:prstGeom>
           <a:solidFill>
-            <a:srgbClr val="F2F4F7"/>
+            <a:srgbClr val="333D4A"/>
           </a:solidFill>
           <a:ln>
             <a:noFill/>
@@ -7440,58 +9555,25 @@
       </p:sp>
       <p:sp>
         <p:nvSpPr>
-          <p:cNvPr id="16" name="TextBox 15"/>
-          <p:cNvSpPr txBox="1"/>
-          <p:nvPr/>
-        </p:nvSpPr>
-        <p:spPr>
-          <a:xfrm>
-            <a:off x="4599432" y="2075688"/>
-            <a:ext cx="3337560" cy="1463040"/>
-          </a:xfrm>
-          <a:prstGeom prst="rect">
-            <a:avLst/>
-          </a:prstGeom>
-          <a:noFill/>
-        </p:spPr>
-        <p:txBody>
-          <a:bodyPr wrap="square" lIns="45720" rIns="45720" tIns="18288" bIns="18288" anchor="t">
-            <a:spAutoFit/>
-          </a:bodyPr>
-          <a:lstStyle/>
-          <a:p>
-            <a:pPr algn="l"/>
-            <a:r>
-              <a:rPr sz="1200" b="0" i="0">
-                <a:solidFill>
-                  <a:srgbClr val="333D4A"/>
-                </a:solidFill>
-                <a:latin typeface="Calibri"/>
-              </a:rPr>
-              <a:t>Text editors use two stacks (Undo stack and Redo stack) to track document modifications in reverse order.</a:t>
-            </a:r>
-          </a:p>
-        </p:txBody>
-      </p:sp>
-      <p:sp>
-        <p:nvSpPr>
-          <p:cNvPr id="17" name="Rectangle 16"/>
+          <p:cNvPr id="18" name="Rounded Rectangle 17"/>
           <p:cNvSpPr/>
           <p:nvPr/>
         </p:nvSpPr>
         <p:spPr>
           <a:xfrm>
-            <a:off x="8321040" y="1417320"/>
-            <a:ext cx="3657600" cy="502920"/>
-          </a:xfrm>
-          <a:prstGeom prst="rect">
+            <a:off x="7223760" y="3200400"/>
+            <a:ext cx="914400" cy="914400"/>
+          </a:xfrm>
+          <a:prstGeom prst="roundRect">
             <a:avLst/>
           </a:prstGeom>
           <a:solidFill>
-            <a:srgbClr val="E0A81F"/>
+            <a:srgbClr val="FFFFFF"/>
           </a:solidFill>
-          <a:ln>
-            <a:noFill/>
+          <a:ln w="25400">
+            <a:solidFill>
+              <a:srgbClr val="0B2A4A"/>
+            </a:solidFill>
           </a:ln>
           <a:effectLst/>
         </p:spPr>
@@ -7519,14 +9601,14 @@
       </p:sp>
       <p:sp>
         <p:nvSpPr>
-          <p:cNvPr id="18" name="TextBox 17"/>
+          <p:cNvPr id="19" name="TextBox 18"/>
           <p:cNvSpPr txBox="1"/>
           <p:nvPr/>
         </p:nvSpPr>
         <p:spPr>
           <a:xfrm>
-            <a:off x="8321040" y="1417320"/>
-            <a:ext cx="3657600" cy="502920"/>
+            <a:off x="7223760" y="3200400"/>
+            <a:ext cx="914400" cy="914400"/>
           </a:xfrm>
           <a:prstGeom prst="rect">
             <a:avLst/>
@@ -7541,36 +9623,38 @@
           <a:p>
             <a:pPr algn="ctr"/>
             <a:r>
-              <a:rPr sz="1500" b="1" i="0">
-                <a:solidFill>
-                  <a:srgbClr val="FFFFFF"/>
-                </a:solidFill>
-                <a:latin typeface="Calibri"/>
-              </a:rPr>
-              <a:t>Breadth-First Search (BFS)</a:t>
-            </a:r>
-          </a:p>
-        </p:txBody>
-      </p:sp>
-      <p:sp>
-        <p:nvSpPr>
-          <p:cNvPr id="19" name="Rectangle 18"/>
+              <a:rPr sz="1400" b="1" i="0">
+                <a:solidFill>
+                  <a:srgbClr val="0B2A4A"/>
+                </a:solidFill>
+                <a:latin typeface="Calibri"/>
+              </a:rPr>
+              <a:t>10</a:t>
+            </a:r>
+          </a:p>
+        </p:txBody>
+      </p:sp>
+      <p:sp>
+        <p:nvSpPr>
+          <p:cNvPr id="20" name="Rounded Rectangle 19"/>
           <p:cNvSpPr/>
           <p:nvPr/>
         </p:nvSpPr>
         <p:spPr>
           <a:xfrm>
-            <a:off x="8321040" y="1920240"/>
-            <a:ext cx="3657600" cy="1691640"/>
-          </a:xfrm>
-          <a:prstGeom prst="rect">
+            <a:off x="8321040" y="3200400"/>
+            <a:ext cx="914400" cy="914400"/>
+          </a:xfrm>
+          <a:prstGeom prst="roundRect">
             <a:avLst/>
           </a:prstGeom>
           <a:solidFill>
-            <a:srgbClr val="F2F4F7"/>
+            <a:srgbClr val="FFFFFF"/>
           </a:solidFill>
-          <a:ln>
-            <a:noFill/>
+          <a:ln w="25400">
+            <a:solidFill>
+              <a:srgbClr val="0B2A4A"/>
+            </a:solidFill>
           </a:ln>
           <a:effectLst/>
         </p:spPr>
@@ -7598,14 +9682,14 @@
       </p:sp>
       <p:sp>
         <p:nvSpPr>
-          <p:cNvPr id="20" name="TextBox 19"/>
+          <p:cNvPr id="21" name="TextBox 20"/>
           <p:cNvSpPr txBox="1"/>
           <p:nvPr/>
         </p:nvSpPr>
         <p:spPr>
           <a:xfrm>
-            <a:off x="8485632" y="2075688"/>
-            <a:ext cx="3337560" cy="1463040"/>
+            <a:off x="8321040" y="3200400"/>
+            <a:ext cx="914400" cy="914400"/>
           </a:xfrm>
           <a:prstGeom prst="rect">
             <a:avLst/>
@@ -7613,43 +9697,45 @@
           <a:noFill/>
         </p:spPr>
         <p:txBody>
-          <a:bodyPr wrap="square" lIns="45720" rIns="45720" tIns="18288" bIns="18288" anchor="t">
+          <a:bodyPr wrap="square" lIns="45720" rIns="45720" tIns="18288" bIns="18288" anchor="ctr">
             <a:spAutoFit/>
           </a:bodyPr>
           <a:lstStyle/>
           <a:p>
-            <a:pPr algn="l"/>
-            <a:r>
-              <a:rPr sz="1200" b="0" i="0">
-                <a:solidFill>
-                  <a:srgbClr val="333D4A"/>
-                </a:solidFill>
-                <a:latin typeface="Calibri"/>
-              </a:rPr>
-              <a:t>Graph traversals use a queue to track visited nodes in a level-order fashion (shortest path, web crawlers).</a:t>
-            </a:r>
-          </a:p>
-        </p:txBody>
-      </p:sp>
-      <p:sp>
-        <p:nvSpPr>
-          <p:cNvPr id="21" name="Rectangle 20"/>
+            <a:pPr algn="ctr"/>
+            <a:r>
+              <a:rPr sz="1400" b="1" i="0">
+                <a:solidFill>
+                  <a:srgbClr val="0B2A4A"/>
+                </a:solidFill>
+                <a:latin typeface="Calibri"/>
+              </a:rPr>
+              <a:t>20</a:t>
+            </a:r>
+          </a:p>
+        </p:txBody>
+      </p:sp>
+      <p:sp>
+        <p:nvSpPr>
+          <p:cNvPr id="22" name="Rounded Rectangle 21"/>
           <p:cNvSpPr/>
           <p:nvPr/>
         </p:nvSpPr>
         <p:spPr>
           <a:xfrm>
-            <a:off x="548640" y="3794760"/>
-            <a:ext cx="3657600" cy="502920"/>
-          </a:xfrm>
-          <a:prstGeom prst="rect">
+            <a:off x="9418320" y="3200400"/>
+            <a:ext cx="914400" cy="914400"/>
+          </a:xfrm>
+          <a:prstGeom prst="roundRect">
             <a:avLst/>
           </a:prstGeom>
           <a:solidFill>
-            <a:srgbClr val="C0392B"/>
+            <a:srgbClr val="FFFFFF"/>
           </a:solidFill>
-          <a:ln>
-            <a:noFill/>
+          <a:ln w="25400">
+            <a:solidFill>
+              <a:srgbClr val="0B2A4A"/>
+            </a:solidFill>
           </a:ln>
           <a:effectLst/>
         </p:spPr>
@@ -7677,14 +9763,14 @@
       </p:sp>
       <p:sp>
         <p:nvSpPr>
-          <p:cNvPr id="22" name="TextBox 21"/>
+          <p:cNvPr id="23" name="TextBox 22"/>
           <p:cNvSpPr txBox="1"/>
           <p:nvPr/>
         </p:nvSpPr>
         <p:spPr>
           <a:xfrm>
-            <a:off x="548640" y="3794760"/>
-            <a:ext cx="3657600" cy="502920"/>
+            <a:off x="9418320" y="3200400"/>
+            <a:ext cx="914400" cy="914400"/>
           </a:xfrm>
           <a:prstGeom prst="rect">
             <a:avLst/>
@@ -7699,71 +9785,99 @@
           <a:p>
             <a:pPr algn="ctr"/>
             <a:r>
-              <a:rPr sz="1500" b="1" i="0">
-                <a:solidFill>
-                  <a:srgbClr val="FFFFFF"/>
-                </a:solidFill>
-                <a:latin typeface="Calibri"/>
-              </a:rPr>
-              <a:t>Asynchronous Buffers</a:t>
-            </a:r>
-          </a:p>
-        </p:txBody>
-      </p:sp>
-      <p:sp>
-        <p:nvSpPr>
-          <p:cNvPr id="23" name="Rectangle 22"/>
-          <p:cNvSpPr/>
-          <p:nvPr/>
-        </p:nvSpPr>
-        <p:spPr>
-          <a:xfrm>
-            <a:off x="548640" y="4297680"/>
-            <a:ext cx="3657600" cy="1691640"/>
-          </a:xfrm>
-          <a:prstGeom prst="rect">
-            <a:avLst/>
-          </a:prstGeom>
-          <a:solidFill>
-            <a:srgbClr val="F2F4F7"/>
-          </a:solidFill>
-          <a:ln>
-            <a:noFill/>
+              <a:rPr sz="1400" b="1" i="0">
+                <a:solidFill>
+                  <a:srgbClr val="0B2A4A"/>
+                </a:solidFill>
+                <a:latin typeface="Calibri"/>
+              </a:rPr>
+              <a:t>30</a:t>
+            </a:r>
+          </a:p>
+        </p:txBody>
+      </p:sp>
+      <p:cxnSp>
+        <p:nvCxnSpPr>
+          <p:cNvPr id="24" name="Connector 23"/>
+          <p:cNvCxnSpPr/>
+          <p:nvPr/>
+        </p:nvCxnSpPr>
+        <p:spPr>
+          <a:xfrm>
+            <a:off x="6492240" y="3383280"/>
+            <a:ext cx="548640" cy="0"/>
+          </a:xfrm>
+          <a:prstGeom prst="line">
+            <a:avLst/>
+          </a:prstGeom>
+          <a:ln w="28575">
+            <a:solidFill>
+              <a:srgbClr val="127A8A"/>
+            </a:solidFill>
+            <a:tailEnd type="triangle" w="med" len="med"/>
           </a:ln>
-          <a:effectLst/>
         </p:spPr>
         <p:style>
-          <a:lnRef idx="1">
+          <a:lnRef idx="2">
             <a:schemeClr val="accent1"/>
           </a:lnRef>
-          <a:fillRef idx="3">
+          <a:fillRef idx="0">
             <a:schemeClr val="accent1"/>
           </a:fillRef>
-          <a:effectRef idx="2">
+          <a:effectRef idx="1">
             <a:schemeClr val="accent1"/>
           </a:effectRef>
           <a:fontRef idx="minor">
-            <a:schemeClr val="lt1"/>
+            <a:schemeClr val="tx1"/>
           </a:fontRef>
         </p:style>
-        <p:txBody>
-          <a:bodyPr rtlCol="0" anchor="ctr"/>
-          <a:lstStyle/>
-          <a:p>
-            <a:pPr algn="ctr"/>
-          </a:p>
-        </p:txBody>
-      </p:sp>
-      <p:sp>
-        <p:nvSpPr>
-          <p:cNvPr id="24" name="TextBox 23"/>
+      </p:cxnSp>
+      <p:cxnSp>
+        <p:nvCxnSpPr>
+          <p:cNvPr id="25" name="Connector 24"/>
+          <p:cNvCxnSpPr/>
+          <p:nvPr/>
+        </p:nvCxnSpPr>
+        <p:spPr>
+          <a:xfrm flipH="1">
+            <a:off x="6492240" y="3931920"/>
+            <a:ext cx="548640" cy="0"/>
+          </a:xfrm>
+          <a:prstGeom prst="line">
+            <a:avLst/>
+          </a:prstGeom>
+          <a:ln w="28575">
+            <a:solidFill>
+              <a:srgbClr val="E0A81F"/>
+            </a:solidFill>
+            <a:tailEnd type="triangle" w="med" len="med"/>
+          </a:ln>
+        </p:spPr>
+        <p:style>
+          <a:lnRef idx="2">
+            <a:schemeClr val="accent1"/>
+          </a:lnRef>
+          <a:fillRef idx="0">
+            <a:schemeClr val="accent1"/>
+          </a:fillRef>
+          <a:effectRef idx="1">
+            <a:schemeClr val="accent1"/>
+          </a:effectRef>
+          <a:fontRef idx="minor">
+            <a:schemeClr val="tx1"/>
+          </a:fontRef>
+        </p:style>
+      </p:cxnSp>
+      <p:sp>
+        <p:nvSpPr>
+          <p:cNvPr id="26" name="TextBox 25"/>
           <p:cNvSpPr txBox="1"/>
           <p:nvPr/>
         </p:nvSpPr>
         <p:spPr>
           <a:xfrm>
-            <a:off x="713232" y="4453128"/>
-            <a:ext cx="3337560" cy="1463040"/>
+            <a:off x="6309360" y="4206240"/>
+            <a:ext cx="1280160" cy="320040"/>
           </a:xfrm>
           <a:prstGeom prst="rect">
             <a:avLst/>
@@ -7778,150 +9892,99 @@
           <a:p>
             <a:pPr algn="l"/>
             <a:r>
-              <a:rPr sz="1200" b="0" i="0">
-                <a:solidFill>
-                  <a:srgbClr val="333D4A"/>
-                </a:solidFill>
-                <a:latin typeface="Calibri"/>
-              </a:rPr>
-              <a:t>Data sent between asymmetric processes (network socket packets, printer spoolers, keyboard event loops).</a:t>
-            </a:r>
-          </a:p>
-        </p:txBody>
-      </p:sp>
-      <p:sp>
-        <p:nvSpPr>
-          <p:cNvPr id="25" name="Rectangle 24"/>
-          <p:cNvSpPr/>
-          <p:nvPr/>
-        </p:nvSpPr>
-        <p:spPr>
-          <a:xfrm>
-            <a:off x="4434840" y="3794760"/>
-            <a:ext cx="3657600" cy="502920"/>
-          </a:xfrm>
-          <a:prstGeom prst="rect">
-            <a:avLst/>
-          </a:prstGeom>
-          <a:solidFill>
-            <a:srgbClr val="2E7D32"/>
-          </a:solidFill>
-          <a:ln>
-            <a:noFill/>
+              <a:rPr sz="1000" b="0" i="1">
+                <a:solidFill>
+                  <a:srgbClr val="0B2A4A"/>
+                </a:solidFill>
+                <a:latin typeface="Calibri"/>
+              </a:rPr>
+              <a:t>Front appends/pops</a:t>
+            </a:r>
+          </a:p>
+        </p:txBody>
+      </p:sp>
+      <p:cxnSp>
+        <p:nvCxnSpPr>
+          <p:cNvPr id="27" name="Connector 26"/>
+          <p:cNvCxnSpPr/>
+          <p:nvPr/>
+        </p:nvCxnSpPr>
+        <p:spPr>
+          <a:xfrm flipH="1">
+            <a:off x="11064240" y="3383280"/>
+            <a:ext cx="548640" cy="0"/>
+          </a:xfrm>
+          <a:prstGeom prst="line">
+            <a:avLst/>
+          </a:prstGeom>
+          <a:ln w="28575">
+            <a:solidFill>
+              <a:srgbClr val="127A8A"/>
+            </a:solidFill>
+            <a:tailEnd type="triangle" w="med" len="med"/>
           </a:ln>
-          <a:effectLst/>
         </p:spPr>
         <p:style>
-          <a:lnRef idx="1">
+          <a:lnRef idx="2">
             <a:schemeClr val="accent1"/>
           </a:lnRef>
-          <a:fillRef idx="3">
+          <a:fillRef idx="0">
             <a:schemeClr val="accent1"/>
           </a:fillRef>
-          <a:effectRef idx="2">
+          <a:effectRef idx="1">
             <a:schemeClr val="accent1"/>
           </a:effectRef>
           <a:fontRef idx="minor">
-            <a:schemeClr val="lt1"/>
+            <a:schemeClr val="tx1"/>
           </a:fontRef>
         </p:style>
-        <p:txBody>
-          <a:bodyPr rtlCol="0" anchor="ctr"/>
-          <a:lstStyle/>
-          <a:p>
-            <a:pPr algn="ctr"/>
-          </a:p>
-        </p:txBody>
-      </p:sp>
-      <p:sp>
-        <p:nvSpPr>
-          <p:cNvPr id="26" name="TextBox 25"/>
-          <p:cNvSpPr txBox="1"/>
-          <p:nvPr/>
-        </p:nvSpPr>
-        <p:spPr>
-          <a:xfrm>
-            <a:off x="4434840" y="3794760"/>
-            <a:ext cx="3657600" cy="502920"/>
-          </a:xfrm>
-          <a:prstGeom prst="rect">
-            <a:avLst/>
-          </a:prstGeom>
-          <a:noFill/>
-        </p:spPr>
-        <p:txBody>
-          <a:bodyPr wrap="square" lIns="45720" rIns="45720" tIns="18288" bIns="18288" anchor="ctr">
-            <a:spAutoFit/>
-          </a:bodyPr>
-          <a:lstStyle/>
-          <a:p>
-            <a:pPr algn="ctr"/>
-            <a:r>
-              <a:rPr sz="1500" b="1" i="0">
-                <a:solidFill>
-                  <a:srgbClr val="FFFFFF"/>
-                </a:solidFill>
-                <a:latin typeface="Calibri"/>
-              </a:rPr>
-              <a:t>Round-Robin Scheduling</a:t>
-            </a:r>
-          </a:p>
-        </p:txBody>
-      </p:sp>
-      <p:sp>
-        <p:nvSpPr>
-          <p:cNvPr id="27" name="Rectangle 26"/>
-          <p:cNvSpPr/>
-          <p:nvPr/>
-        </p:nvSpPr>
-        <p:spPr>
-          <a:xfrm>
-            <a:off x="4434840" y="4297680"/>
-            <a:ext cx="3657600" cy="1691640"/>
-          </a:xfrm>
-          <a:prstGeom prst="rect">
-            <a:avLst/>
-          </a:prstGeom>
-          <a:solidFill>
-            <a:srgbClr val="F2F4F7"/>
-          </a:solidFill>
-          <a:ln>
-            <a:noFill/>
+      </p:cxnSp>
+      <p:cxnSp>
+        <p:nvCxnSpPr>
+          <p:cNvPr id="28" name="Connector 27"/>
+          <p:cNvCxnSpPr/>
+          <p:nvPr/>
+        </p:nvCxnSpPr>
+        <p:spPr>
+          <a:xfrm>
+            <a:off x="11064240" y="3931920"/>
+            <a:ext cx="548640" cy="0"/>
+          </a:xfrm>
+          <a:prstGeom prst="line">
+            <a:avLst/>
+          </a:prstGeom>
+          <a:ln w="28575">
+            <a:solidFill>
+              <a:srgbClr val="E0A81F"/>
+            </a:solidFill>
+            <a:tailEnd type="triangle" w="med" len="med"/>
           </a:ln>
-          <a:effectLst/>
         </p:spPr>
         <p:style>
-          <a:lnRef idx="1">
+          <a:lnRef idx="2">
             <a:schemeClr val="accent1"/>
           </a:lnRef>
-          <a:fillRef idx="3">
+          <a:fillRef idx="0">
             <a:schemeClr val="accent1"/>
           </a:fillRef>
-          <a:effectRef idx="2">
+          <a:effectRef idx="1">
             <a:schemeClr val="accent1"/>
           </a:effectRef>
           <a:fontRef idx="minor">
-            <a:schemeClr val="lt1"/>
+            <a:schemeClr val="tx1"/>
           </a:fontRef>
         </p:style>
-        <p:txBody>
-          <a:bodyPr rtlCol="0" anchor="ctr"/>
-          <a:lstStyle/>
-          <a:p>
-            <a:pPr algn="ctr"/>
-          </a:p>
-        </p:txBody>
-      </p:sp>
-      <p:sp>
-        <p:nvSpPr>
-          <p:cNvPr id="28" name="TextBox 27"/>
+      </p:cxnSp>
+      <p:sp>
+        <p:nvSpPr>
+          <p:cNvPr id="29" name="TextBox 28"/>
           <p:cNvSpPr txBox="1"/>
           <p:nvPr/>
         </p:nvSpPr>
         <p:spPr>
           <a:xfrm>
-            <a:off x="4599432" y="4453128"/>
-            <a:ext cx="3337560" cy="1463040"/>
+            <a:off x="10515600" y="4206240"/>
+            <a:ext cx="1280160" cy="320040"/>
           </a:xfrm>
           <a:prstGeom prst="rect">
             <a:avLst/>
@@ -7936,171 +9999,13 @@
           <a:p>
             <a:pPr algn="l"/>
             <a:r>
-              <a:rPr sz="1200" b="0" i="0">
-                <a:solidFill>
-                  <a:srgbClr val="333D4A"/>
-                </a:solidFill>
-                <a:latin typeface="Calibri"/>
-              </a:rPr>
-              <a:t>OS CPU schedulers cycle executing processes by rotating a circular queue of threads.</a:t>
-            </a:r>
-          </a:p>
-        </p:txBody>
-      </p:sp>
-      <p:sp>
-        <p:nvSpPr>
-          <p:cNvPr id="29" name="Rectangle 28"/>
-          <p:cNvSpPr/>
-          <p:nvPr/>
-        </p:nvSpPr>
-        <p:spPr>
-          <a:xfrm>
-            <a:off x="8321040" y="3794760"/>
-            <a:ext cx="3657600" cy="502920"/>
-          </a:xfrm>
-          <a:prstGeom prst="rect">
-            <a:avLst/>
-          </a:prstGeom>
-          <a:solidFill>
-            <a:srgbClr val="6A1B9A"/>
-          </a:solidFill>
-          <a:ln>
-            <a:noFill/>
-          </a:ln>
-          <a:effectLst/>
-        </p:spPr>
-        <p:style>
-          <a:lnRef idx="1">
-            <a:schemeClr val="accent1"/>
-          </a:lnRef>
-          <a:fillRef idx="3">
-            <a:schemeClr val="accent1"/>
-          </a:fillRef>
-          <a:effectRef idx="2">
-            <a:schemeClr val="accent1"/>
-          </a:effectRef>
-          <a:fontRef idx="minor">
-            <a:schemeClr val="lt1"/>
-          </a:fontRef>
-        </p:style>
-        <p:txBody>
-          <a:bodyPr rtlCol="0" anchor="ctr"/>
-          <a:lstStyle/>
-          <a:p>
-            <a:pPr algn="ctr"/>
-          </a:p>
-        </p:txBody>
-      </p:sp>
-      <p:sp>
-        <p:nvSpPr>
-          <p:cNvPr id="30" name="TextBox 29"/>
-          <p:cNvSpPr txBox="1"/>
-          <p:nvPr/>
-        </p:nvSpPr>
-        <p:spPr>
-          <a:xfrm>
-            <a:off x="8321040" y="3794760"/>
-            <a:ext cx="3657600" cy="502920"/>
-          </a:xfrm>
-          <a:prstGeom prst="rect">
-            <a:avLst/>
-          </a:prstGeom>
-          <a:noFill/>
-        </p:spPr>
-        <p:txBody>
-          <a:bodyPr wrap="square" lIns="45720" rIns="45720" tIns="18288" bIns="18288" anchor="ctr">
-            <a:spAutoFit/>
-          </a:bodyPr>
-          <a:lstStyle/>
-          <a:p>
-            <a:pPr algn="ctr"/>
-            <a:r>
-              <a:rPr sz="1500" b="1" i="0">
-                <a:solidFill>
-                  <a:srgbClr val="FFFFFF"/>
-                </a:solidFill>
-                <a:latin typeface="Calibri"/>
-              </a:rPr>
-              <a:t>Backtracking (DFS)</a:t>
-            </a:r>
-          </a:p>
-        </p:txBody>
-      </p:sp>
-      <p:sp>
-        <p:nvSpPr>
-          <p:cNvPr id="31" name="Rectangle 30"/>
-          <p:cNvSpPr/>
-          <p:nvPr/>
-        </p:nvSpPr>
-        <p:spPr>
-          <a:xfrm>
-            <a:off x="8321040" y="4297680"/>
-            <a:ext cx="3657600" cy="1691640"/>
-          </a:xfrm>
-          <a:prstGeom prst="rect">
-            <a:avLst/>
-          </a:prstGeom>
-          <a:solidFill>
-            <a:srgbClr val="F2F4F7"/>
-          </a:solidFill>
-          <a:ln>
-            <a:noFill/>
-          </a:ln>
-          <a:effectLst/>
-        </p:spPr>
-        <p:style>
-          <a:lnRef idx="1">
-            <a:schemeClr val="accent1"/>
-          </a:lnRef>
-          <a:fillRef idx="3">
-            <a:schemeClr val="accent1"/>
-          </a:fillRef>
-          <a:effectRef idx="2">
-            <a:schemeClr val="accent1"/>
-          </a:effectRef>
-          <a:fontRef idx="minor">
-            <a:schemeClr val="lt1"/>
-          </a:fontRef>
-        </p:style>
-        <p:txBody>
-          <a:bodyPr rtlCol="0" anchor="ctr"/>
-          <a:lstStyle/>
-          <a:p>
-            <a:pPr algn="ctr"/>
-          </a:p>
-        </p:txBody>
-      </p:sp>
-      <p:sp>
-        <p:nvSpPr>
-          <p:cNvPr id="32" name="TextBox 31"/>
-          <p:cNvSpPr txBox="1"/>
-          <p:nvPr/>
-        </p:nvSpPr>
-        <p:spPr>
-          <a:xfrm>
-            <a:off x="8485632" y="4453128"/>
-            <a:ext cx="3337560" cy="1463040"/>
-          </a:xfrm>
-          <a:prstGeom prst="rect">
-            <a:avLst/>
-          </a:prstGeom>
-          <a:noFill/>
-        </p:spPr>
-        <p:txBody>
-          <a:bodyPr wrap="square" lIns="45720" rIns="45720" tIns="18288" bIns="18288" anchor="t">
-            <a:spAutoFit/>
-          </a:bodyPr>
-          <a:lstStyle/>
-          <a:p>
-            <a:pPr algn="l"/>
-            <a:r>
-              <a:rPr sz="1200" b="0" i="0">
-                <a:solidFill>
-                  <a:srgbClr val="333D4A"/>
-                </a:solidFill>
-                <a:latin typeface="Calibri"/>
-              </a:rPr>
-              <a:t>DFS uses a stack (explicit or recursion call stack) to backtrack. Dijkstra's Shunting-yard uses an operator stack for math parsing.</a:t>
+              <a:rPr sz="1000" b="0" i="1">
+                <a:solidFill>
+                  <a:srgbClr val="0B2A4A"/>
+                </a:solidFill>
+                <a:latin typeface="Calibri"/>
+              </a:rPr>
+              <a:t>Rear appends/pops</a:t>
             </a:r>
           </a:p>
         </p:txBody>
@@ -8241,7 +10146,7 @@
                 </a:solidFill>
                 <a:latin typeface="Calibri"/>
               </a:rPr>
-              <a:t>8.  Practice Problems</a:t>
+              <a:t>7.  Real-World Applications</a:t>
             </a:r>
           </a:p>
         </p:txBody>
@@ -8276,7 +10181,7 @@
                 </a:solidFill>
                 <a:latin typeface="Calibri"/>
               </a:rPr>
-              <a:t>Crucial algorithmic challenges to build your mastery</a:t>
+              <a:t>How Stacks and Queues power critical computer systems</a:t>
             </a:r>
           </a:p>
         </p:txBody>
@@ -8390,7 +10295,7 @@
                 </a:solidFill>
                 <a:latin typeface="Calibri"/>
               </a:rPr>
-              <a:t>Slide 14 / 17</a:t>
+              <a:t>Slide 14 / 18</a:t>
             </a:r>
           </a:p>
         </p:txBody>
@@ -8404,7 +10309,165 @@
         <p:spPr>
           <a:xfrm>
             <a:off x="548640" y="1417320"/>
-            <a:ext cx="3657600" cy="475488"/>
+            <a:ext cx="3657600" cy="502920"/>
+          </a:xfrm>
+          <a:prstGeom prst="rect">
+            <a:avLst/>
+          </a:prstGeom>
+          <a:solidFill>
+            <a:srgbClr val="0B2A4A"/>
+          </a:solidFill>
+          <a:ln>
+            <a:noFill/>
+          </a:ln>
+          <a:effectLst/>
+        </p:spPr>
+        <p:style>
+          <a:lnRef idx="1">
+            <a:schemeClr val="accent1"/>
+          </a:lnRef>
+          <a:fillRef idx="3">
+            <a:schemeClr val="accent1"/>
+          </a:fillRef>
+          <a:effectRef idx="2">
+            <a:schemeClr val="accent1"/>
+          </a:effectRef>
+          <a:fontRef idx="minor">
+            <a:schemeClr val="lt1"/>
+          </a:fontRef>
+        </p:style>
+        <p:txBody>
+          <a:bodyPr rtlCol="0" anchor="ctr"/>
+          <a:lstStyle/>
+          <a:p>
+            <a:pPr algn="ctr"/>
+          </a:p>
+        </p:txBody>
+      </p:sp>
+      <p:sp>
+        <p:nvSpPr>
+          <p:cNvPr id="10" name="TextBox 9"/>
+          <p:cNvSpPr txBox="1"/>
+          <p:nvPr/>
+        </p:nvSpPr>
+        <p:spPr>
+          <a:xfrm>
+            <a:off x="548640" y="1417320"/>
+            <a:ext cx="3657600" cy="502920"/>
+          </a:xfrm>
+          <a:prstGeom prst="rect">
+            <a:avLst/>
+          </a:prstGeom>
+          <a:noFill/>
+        </p:spPr>
+        <p:txBody>
+          <a:bodyPr wrap="square" lIns="45720" rIns="45720" tIns="18288" bIns="18288" anchor="ctr">
+            <a:spAutoFit/>
+          </a:bodyPr>
+          <a:lstStyle/>
+          <a:p>
+            <a:pPr algn="ctr"/>
+            <a:r>
+              <a:rPr sz="1500" b="1" i="0">
+                <a:solidFill>
+                  <a:srgbClr val="FFFFFF"/>
+                </a:solidFill>
+                <a:latin typeface="Calibri"/>
+              </a:rPr>
+              <a:t>The Program Call Stack</a:t>
+            </a:r>
+          </a:p>
+        </p:txBody>
+      </p:sp>
+      <p:sp>
+        <p:nvSpPr>
+          <p:cNvPr id="11" name="Rectangle 10"/>
+          <p:cNvSpPr/>
+          <p:nvPr/>
+        </p:nvSpPr>
+        <p:spPr>
+          <a:xfrm>
+            <a:off x="548640" y="1920240"/>
+            <a:ext cx="3657600" cy="1691640"/>
+          </a:xfrm>
+          <a:prstGeom prst="rect">
+            <a:avLst/>
+          </a:prstGeom>
+          <a:solidFill>
+            <a:srgbClr val="F2F4F7"/>
+          </a:solidFill>
+          <a:ln>
+            <a:noFill/>
+          </a:ln>
+          <a:effectLst/>
+        </p:spPr>
+        <p:style>
+          <a:lnRef idx="1">
+            <a:schemeClr val="accent1"/>
+          </a:lnRef>
+          <a:fillRef idx="3">
+            <a:schemeClr val="accent1"/>
+          </a:fillRef>
+          <a:effectRef idx="2">
+            <a:schemeClr val="accent1"/>
+          </a:effectRef>
+          <a:fontRef idx="minor">
+            <a:schemeClr val="lt1"/>
+          </a:fontRef>
+        </p:style>
+        <p:txBody>
+          <a:bodyPr rtlCol="0" anchor="ctr"/>
+          <a:lstStyle/>
+          <a:p>
+            <a:pPr algn="ctr"/>
+          </a:p>
+        </p:txBody>
+      </p:sp>
+      <p:sp>
+        <p:nvSpPr>
+          <p:cNvPr id="12" name="TextBox 11"/>
+          <p:cNvSpPr txBox="1"/>
+          <p:nvPr/>
+        </p:nvSpPr>
+        <p:spPr>
+          <a:xfrm>
+            <a:off x="713232" y="2075688"/>
+            <a:ext cx="3337560" cy="1463040"/>
+          </a:xfrm>
+          <a:prstGeom prst="rect">
+            <a:avLst/>
+          </a:prstGeom>
+          <a:noFill/>
+        </p:spPr>
+        <p:txBody>
+          <a:bodyPr wrap="square" lIns="45720" rIns="45720" tIns="18288" bIns="18288" anchor="t">
+            <a:spAutoFit/>
+          </a:bodyPr>
+          <a:lstStyle/>
+          <a:p>
+            <a:pPr algn="l"/>
+            <a:r>
+              <a:rPr sz="1200" b="0" i="0">
+                <a:solidFill>
+                  <a:srgbClr val="333D4A"/>
+                </a:solidFill>
+                <a:latin typeface="Calibri"/>
+              </a:rPr>
+              <a:t>Manages function execution frames, recursion stack space (costing O(N) auxiliary space), and local variables in runtime environments.</a:t>
+            </a:r>
+          </a:p>
+        </p:txBody>
+      </p:sp>
+      <p:sp>
+        <p:nvSpPr>
+          <p:cNvPr id="13" name="Rectangle 12"/>
+          <p:cNvSpPr/>
+          <p:nvPr/>
+        </p:nvSpPr>
+        <p:spPr>
+          <a:xfrm>
+            <a:off x="4434840" y="1417320"/>
+            <a:ext cx="3657600" cy="502920"/>
           </a:xfrm>
           <a:prstGeom prst="rect">
             <a:avLst/>
@@ -8441,14 +10504,14 @@
       </p:sp>
       <p:sp>
         <p:nvSpPr>
-          <p:cNvPr id="10" name="TextBox 9"/>
+          <p:cNvPr id="14" name="TextBox 13"/>
           <p:cNvSpPr txBox="1"/>
           <p:nvPr/>
         </p:nvSpPr>
         <p:spPr>
           <a:xfrm>
-            <a:off x="548640" y="1417320"/>
-            <a:ext cx="3657600" cy="475488"/>
+            <a:off x="4434840" y="1417320"/>
+            <a:ext cx="3657600" cy="502920"/>
           </a:xfrm>
           <a:prstGeom prst="rect">
             <a:avLst/>
@@ -8463,27 +10526,27 @@
           <a:p>
             <a:pPr algn="ctr"/>
             <a:r>
-              <a:rPr sz="1400" b="1" i="0">
+              <a:rPr sz="1500" b="1" i="0">
                 <a:solidFill>
                   <a:srgbClr val="FFFFFF"/>
                 </a:solidFill>
                 <a:latin typeface="Calibri"/>
               </a:rPr>
-              <a:t>Valid Parentheses</a:t>
-            </a:r>
-          </a:p>
-        </p:txBody>
-      </p:sp>
-      <p:sp>
-        <p:nvSpPr>
-          <p:cNvPr id="11" name="Rectangle 10"/>
+              <a:t>Undo/Redo History</a:t>
+            </a:r>
+          </a:p>
+        </p:txBody>
+      </p:sp>
+      <p:sp>
+        <p:nvSpPr>
+          <p:cNvPr id="15" name="Rectangle 14"/>
           <p:cNvSpPr/>
           <p:nvPr/>
         </p:nvSpPr>
         <p:spPr>
           <a:xfrm>
-            <a:off x="548640" y="1892808"/>
-            <a:ext cx="3657600" cy="1673352"/>
+            <a:off x="4434840" y="1920240"/>
+            <a:ext cx="3657600" cy="1691640"/>
           </a:xfrm>
           <a:prstGeom prst="rect">
             <a:avLst/>
@@ -8520,13 +10583,13 @@
       </p:sp>
       <p:sp>
         <p:nvSpPr>
-          <p:cNvPr id="12" name="TextBox 11"/>
+          <p:cNvPr id="16" name="TextBox 15"/>
           <p:cNvSpPr txBox="1"/>
           <p:nvPr/>
         </p:nvSpPr>
         <p:spPr>
           <a:xfrm>
-            <a:off x="713232" y="2039112"/>
+            <a:off x="4599432" y="2075688"/>
             <a:ext cx="3337560" cy="1463040"/>
           </a:xfrm>
           <a:prstGeom prst="rect">
@@ -8548,23 +10611,21 @@
                 </a:solidFill>
                 <a:latin typeface="Calibri"/>
               </a:rPr>
-              <a:t>LeetCode 20 (Easy)
-Given a string of brackets '{}()[]', check if closed in correct order.
-Use a Stack to match open-to-close brackets.</a:t>
-            </a:r>
-          </a:p>
-        </p:txBody>
-      </p:sp>
-      <p:sp>
-        <p:nvSpPr>
-          <p:cNvPr id="13" name="Rectangle 12"/>
+              <a:t>Text editors use two stacks (Undo stack and Redo stack) to track document modifications in reverse order.</a:t>
+            </a:r>
+          </a:p>
+        </p:txBody>
+      </p:sp>
+      <p:sp>
+        <p:nvSpPr>
+          <p:cNvPr id="17" name="Rectangle 16"/>
           <p:cNvSpPr/>
           <p:nvPr/>
         </p:nvSpPr>
         <p:spPr>
           <a:xfrm>
-            <a:off x="4434840" y="1417320"/>
-            <a:ext cx="3657600" cy="475488"/>
+            <a:off x="8321040" y="1417320"/>
+            <a:ext cx="3657600" cy="502920"/>
           </a:xfrm>
           <a:prstGeom prst="rect">
             <a:avLst/>
@@ -8601,14 +10662,14 @@
       </p:sp>
       <p:sp>
         <p:nvSpPr>
-          <p:cNvPr id="14" name="TextBox 13"/>
+          <p:cNvPr id="18" name="TextBox 17"/>
           <p:cNvSpPr txBox="1"/>
           <p:nvPr/>
         </p:nvSpPr>
         <p:spPr>
           <a:xfrm>
-            <a:off x="4434840" y="1417320"/>
-            <a:ext cx="3657600" cy="475488"/>
+            <a:off x="8321040" y="1417320"/>
+            <a:ext cx="3657600" cy="502920"/>
           </a:xfrm>
           <a:prstGeom prst="rect">
             <a:avLst/>
@@ -8623,27 +10684,27 @@
           <a:p>
             <a:pPr algn="ctr"/>
             <a:r>
-              <a:rPr sz="1400" b="1" i="0">
+              <a:rPr sz="1500" b="1" i="0">
                 <a:solidFill>
                   <a:srgbClr val="FFFFFF"/>
                 </a:solidFill>
                 <a:latin typeface="Calibri"/>
               </a:rPr>
-              <a:t>Implement Queue using Stacks</a:t>
-            </a:r>
-          </a:p>
-        </p:txBody>
-      </p:sp>
-      <p:sp>
-        <p:nvSpPr>
-          <p:cNvPr id="15" name="Rectangle 14"/>
+              <a:t>Breadth-First Search (BFS)</a:t>
+            </a:r>
+          </a:p>
+        </p:txBody>
+      </p:sp>
+      <p:sp>
+        <p:nvSpPr>
+          <p:cNvPr id="19" name="Rectangle 18"/>
           <p:cNvSpPr/>
           <p:nvPr/>
         </p:nvSpPr>
         <p:spPr>
           <a:xfrm>
-            <a:off x="4434840" y="1892808"/>
-            <a:ext cx="3657600" cy="1673352"/>
+            <a:off x="8321040" y="1920240"/>
+            <a:ext cx="3657600" cy="1691640"/>
           </a:xfrm>
           <a:prstGeom prst="rect">
             <a:avLst/>
@@ -8680,13 +10741,13 @@
       </p:sp>
       <p:sp>
         <p:nvSpPr>
-          <p:cNvPr id="16" name="TextBox 15"/>
+          <p:cNvPr id="20" name="TextBox 19"/>
           <p:cNvSpPr txBox="1"/>
           <p:nvPr/>
         </p:nvSpPr>
         <p:spPr>
           <a:xfrm>
-            <a:off x="4599432" y="2039112"/>
+            <a:off x="8485632" y="2075688"/>
             <a:ext cx="3337560" cy="1463040"/>
           </a:xfrm>
           <a:prstGeom prst="rect">
@@ -8708,29 +10769,27 @@
                 </a:solidFill>
                 <a:latin typeface="Calibri"/>
               </a:rPr>
-              <a:t>LeetCode 232 (Medium)
-FIFO queue using Stack1 (enqueue) and Stack2 (dequeue). Transfer elements if empty.
-Amortized O(1) dequeue: elements are pushed/popped a constant number of times.</a:t>
-            </a:r>
-          </a:p>
-        </p:txBody>
-      </p:sp>
-      <p:sp>
-        <p:nvSpPr>
-          <p:cNvPr id="17" name="Rectangle 16"/>
+              <a:t>Graph traversals use a queue to track visited nodes in a level-order fashion (shortest path, web crawlers).</a:t>
+            </a:r>
+          </a:p>
+        </p:txBody>
+      </p:sp>
+      <p:sp>
+        <p:nvSpPr>
+          <p:cNvPr id="21" name="Rectangle 20"/>
           <p:cNvSpPr/>
           <p:nvPr/>
         </p:nvSpPr>
         <p:spPr>
           <a:xfrm>
-            <a:off x="8321040" y="1417320"/>
-            <a:ext cx="3657600" cy="475488"/>
+            <a:off x="548640" y="3794760"/>
+            <a:ext cx="3657600" cy="502920"/>
           </a:xfrm>
           <a:prstGeom prst="rect">
             <a:avLst/>
           </a:prstGeom>
           <a:solidFill>
-            <a:srgbClr val="0B2A4A"/>
+            <a:srgbClr val="C0392B"/>
           </a:solidFill>
           <a:ln>
             <a:noFill/>
@@ -8761,14 +10820,14 @@
       </p:sp>
       <p:sp>
         <p:nvSpPr>
-          <p:cNvPr id="18" name="TextBox 17"/>
+          <p:cNvPr id="22" name="TextBox 21"/>
           <p:cNvSpPr txBox="1"/>
           <p:nvPr/>
         </p:nvSpPr>
         <p:spPr>
           <a:xfrm>
-            <a:off x="8321040" y="1417320"/>
-            <a:ext cx="3657600" cy="475488"/>
+            <a:off x="548640" y="3794760"/>
+            <a:ext cx="3657600" cy="502920"/>
           </a:xfrm>
           <a:prstGeom prst="rect">
             <a:avLst/>
@@ -8783,27 +10842,27 @@
           <a:p>
             <a:pPr algn="ctr"/>
             <a:r>
-              <a:rPr sz="1400" b="1" i="0">
+              <a:rPr sz="1500" b="1" i="0">
                 <a:solidFill>
                   <a:srgbClr val="FFFFFF"/>
                 </a:solidFill>
                 <a:latin typeface="Calibri"/>
               </a:rPr>
-              <a:t>Implement Stack using Queues</a:t>
-            </a:r>
-          </a:p>
-        </p:txBody>
-      </p:sp>
-      <p:sp>
-        <p:nvSpPr>
-          <p:cNvPr id="19" name="Rectangle 18"/>
+              <a:t>Asynchronous Buffers</a:t>
+            </a:r>
+          </a:p>
+        </p:txBody>
+      </p:sp>
+      <p:sp>
+        <p:nvSpPr>
+          <p:cNvPr id="23" name="Rectangle 22"/>
           <p:cNvSpPr/>
           <p:nvPr/>
         </p:nvSpPr>
         <p:spPr>
           <a:xfrm>
-            <a:off x="8321040" y="1892808"/>
-            <a:ext cx="3657600" cy="1673352"/>
+            <a:off x="548640" y="4297680"/>
+            <a:ext cx="3657600" cy="1691640"/>
           </a:xfrm>
           <a:prstGeom prst="rect">
             <a:avLst/>
@@ -8840,13 +10899,13 @@
       </p:sp>
       <p:sp>
         <p:nvSpPr>
-          <p:cNvPr id="20" name="TextBox 19"/>
+          <p:cNvPr id="24" name="TextBox 23"/>
           <p:cNvSpPr txBox="1"/>
           <p:nvPr/>
         </p:nvSpPr>
         <p:spPr>
           <a:xfrm>
-            <a:off x="8485632" y="2039112"/>
+            <a:off x="713232" y="4453128"/>
             <a:ext cx="3337560" cy="1463040"/>
           </a:xfrm>
           <a:prstGeom prst="rect">
@@ -8868,23 +10927,21 @@
                 </a:solidFill>
                 <a:latin typeface="Calibri"/>
               </a:rPr>
-              <a:t>LeetCode 225 (Easy)
-Build a LIFO stack API using only FIFO queues.
-Rotate elements within a single queue on push/pop.</a:t>
-            </a:r>
-          </a:p>
-        </p:txBody>
-      </p:sp>
-      <p:sp>
-        <p:nvSpPr>
-          <p:cNvPr id="21" name="Rectangle 20"/>
+              <a:t>Data sent between asymmetric processes (network socket packets, printer spoolers, keyboard event loops).</a:t>
+            </a:r>
+          </a:p>
+        </p:txBody>
+      </p:sp>
+      <p:sp>
+        <p:nvSpPr>
+          <p:cNvPr id="25" name="Rectangle 24"/>
           <p:cNvSpPr/>
           <p:nvPr/>
         </p:nvSpPr>
         <p:spPr>
           <a:xfrm>
-            <a:off x="548640" y="3749040"/>
-            <a:ext cx="3657600" cy="475488"/>
+            <a:off x="4434840" y="3794760"/>
+            <a:ext cx="3657600" cy="502920"/>
           </a:xfrm>
           <a:prstGeom prst="rect">
             <a:avLst/>
@@ -8921,14 +10978,14 @@
       </p:sp>
       <p:sp>
         <p:nvSpPr>
-          <p:cNvPr id="22" name="TextBox 21"/>
+          <p:cNvPr id="26" name="TextBox 25"/>
           <p:cNvSpPr txBox="1"/>
           <p:nvPr/>
         </p:nvSpPr>
         <p:spPr>
           <a:xfrm>
-            <a:off x="548640" y="3749040"/>
-            <a:ext cx="3657600" cy="475488"/>
+            <a:off x="4434840" y="3794760"/>
+            <a:ext cx="3657600" cy="502920"/>
           </a:xfrm>
           <a:prstGeom prst="rect">
             <a:avLst/>
@@ -8943,27 +11000,27 @@
           <a:p>
             <a:pPr algn="ctr"/>
             <a:r>
-              <a:rPr sz="1400" b="1" i="0">
+              <a:rPr sz="1500" b="1" i="0">
                 <a:solidFill>
                   <a:srgbClr val="FFFFFF"/>
                 </a:solidFill>
                 <a:latin typeface="Calibri"/>
               </a:rPr>
-              <a:t>Min Stack</a:t>
-            </a:r>
-          </a:p>
-        </p:txBody>
-      </p:sp>
-      <p:sp>
-        <p:nvSpPr>
-          <p:cNvPr id="23" name="Rectangle 22"/>
+              <a:t>Round-Robin Scheduling</a:t>
+            </a:r>
+          </a:p>
+        </p:txBody>
+      </p:sp>
+      <p:sp>
+        <p:nvSpPr>
+          <p:cNvPr id="27" name="Rectangle 26"/>
           <p:cNvSpPr/>
           <p:nvPr/>
         </p:nvSpPr>
         <p:spPr>
           <a:xfrm>
-            <a:off x="548640" y="4224528"/>
-            <a:ext cx="3657600" cy="1673352"/>
+            <a:off x="4434840" y="4297680"/>
+            <a:ext cx="3657600" cy="1691640"/>
           </a:xfrm>
           <a:prstGeom prst="rect">
             <a:avLst/>
@@ -9000,13 +11057,13 @@
       </p:sp>
       <p:sp>
         <p:nvSpPr>
-          <p:cNvPr id="24" name="TextBox 23"/>
+          <p:cNvPr id="28" name="TextBox 27"/>
           <p:cNvSpPr txBox="1"/>
           <p:nvPr/>
         </p:nvSpPr>
         <p:spPr>
           <a:xfrm>
-            <a:off x="713232" y="4370832"/>
+            <a:off x="4599432" y="4453128"/>
             <a:ext cx="3337560" cy="1463040"/>
           </a:xfrm>
           <a:prstGeom prst="rect">
@@ -9028,23 +11085,21 @@
                 </a:solidFill>
                 <a:latin typeface="Calibri"/>
               </a:rPr>
-              <a:t>LeetCode 155 (Medium)
-Design a stack that supports get_min() in O(1) time.
-Uses a parallel auxiliary stack to track the minimum values.</a:t>
-            </a:r>
-          </a:p>
-        </p:txBody>
-      </p:sp>
-      <p:sp>
-        <p:nvSpPr>
-          <p:cNvPr id="25" name="Rectangle 24"/>
+              <a:t>OS CPU schedulers cycle executing processes by rotating a circular queue of threads.</a:t>
+            </a:r>
+          </a:p>
+        </p:txBody>
+      </p:sp>
+      <p:sp>
+        <p:nvSpPr>
+          <p:cNvPr id="29" name="Rectangle 28"/>
           <p:cNvSpPr/>
           <p:nvPr/>
         </p:nvSpPr>
         <p:spPr>
           <a:xfrm>
-            <a:off x="4434840" y="3749040"/>
-            <a:ext cx="3657600" cy="475488"/>
+            <a:off x="8321040" y="3794760"/>
+            <a:ext cx="3657600" cy="502920"/>
           </a:xfrm>
           <a:prstGeom prst="rect">
             <a:avLst/>
@@ -9081,14 +11136,14 @@
       </p:sp>
       <p:sp>
         <p:nvSpPr>
-          <p:cNvPr id="26" name="TextBox 25"/>
+          <p:cNvPr id="30" name="TextBox 29"/>
           <p:cNvSpPr txBox="1"/>
           <p:nvPr/>
         </p:nvSpPr>
         <p:spPr>
           <a:xfrm>
-            <a:off x="4434840" y="3749040"/>
-            <a:ext cx="3657600" cy="475488"/>
+            <a:off x="8321040" y="3794760"/>
+            <a:ext cx="3657600" cy="502920"/>
           </a:xfrm>
           <a:prstGeom prst="rect">
             <a:avLst/>
@@ -9103,27 +11158,27 @@
           <a:p>
             <a:pPr algn="ctr"/>
             <a:r>
-              <a:rPr sz="1400" b="1" i="0">
+              <a:rPr sz="1500" b="1" i="0">
                 <a:solidFill>
                   <a:srgbClr val="FFFFFF"/>
                 </a:solidFill>
                 <a:latin typeface="Calibri"/>
               </a:rPr>
-              <a:t>Evaluate Reverse Polish Notation</a:t>
-            </a:r>
-          </a:p>
-        </p:txBody>
-      </p:sp>
-      <p:sp>
-        <p:nvSpPr>
-          <p:cNvPr id="27" name="Rectangle 26"/>
+              <a:t>Backtracking (DFS)</a:t>
+            </a:r>
+          </a:p>
+        </p:txBody>
+      </p:sp>
+      <p:sp>
+        <p:nvSpPr>
+          <p:cNvPr id="31" name="Rectangle 30"/>
           <p:cNvSpPr/>
           <p:nvPr/>
         </p:nvSpPr>
         <p:spPr>
           <a:xfrm>
-            <a:off x="4434840" y="4224528"/>
-            <a:ext cx="3657600" cy="1673352"/>
+            <a:off x="8321040" y="4297680"/>
+            <a:ext cx="3657600" cy="1691640"/>
           </a:xfrm>
           <a:prstGeom prst="rect">
             <a:avLst/>
@@ -9160,13 +11215,13 @@
       </p:sp>
       <p:sp>
         <p:nvSpPr>
-          <p:cNvPr id="28" name="TextBox 27"/>
+          <p:cNvPr id="32" name="TextBox 31"/>
           <p:cNvSpPr txBox="1"/>
           <p:nvPr/>
         </p:nvSpPr>
         <p:spPr>
           <a:xfrm>
-            <a:off x="4599432" y="4370832"/>
+            <a:off x="8485632" y="4453128"/>
             <a:ext cx="3337560" cy="1463040"/>
           </a:xfrm>
           <a:prstGeom prst="rect">
@@ -9188,169 +11243,7 @@
                 </a:solidFill>
                 <a:latin typeface="Calibri"/>
               </a:rPr>
-              <a:t>LeetCode 150 (Medium)
-Evaluate math strings like ['2', '1', '+', '3', '*'] -&gt; 9.
-Push operands; pop for operations. (Related: Dijkstra's Shunting-yard).</a:t>
-            </a:r>
-          </a:p>
-        </p:txBody>
-      </p:sp>
-      <p:sp>
-        <p:nvSpPr>
-          <p:cNvPr id="29" name="Rectangle 28"/>
-          <p:cNvSpPr/>
-          <p:nvPr/>
-        </p:nvSpPr>
-        <p:spPr>
-          <a:xfrm>
-            <a:off x="8321040" y="3749040"/>
-            <a:ext cx="3657600" cy="475488"/>
-          </a:xfrm>
-          <a:prstGeom prst="rect">
-            <a:avLst/>
-          </a:prstGeom>
-          <a:solidFill>
-            <a:srgbClr val="C0392B"/>
-          </a:solidFill>
-          <a:ln>
-            <a:noFill/>
-          </a:ln>
-          <a:effectLst/>
-        </p:spPr>
-        <p:style>
-          <a:lnRef idx="1">
-            <a:schemeClr val="accent1"/>
-          </a:lnRef>
-          <a:fillRef idx="3">
-            <a:schemeClr val="accent1"/>
-          </a:fillRef>
-          <a:effectRef idx="2">
-            <a:schemeClr val="accent1"/>
-          </a:effectRef>
-          <a:fontRef idx="minor">
-            <a:schemeClr val="lt1"/>
-          </a:fontRef>
-        </p:style>
-        <p:txBody>
-          <a:bodyPr rtlCol="0" anchor="ctr"/>
-          <a:lstStyle/>
-          <a:p>
-            <a:pPr algn="ctr"/>
-          </a:p>
-        </p:txBody>
-      </p:sp>
-      <p:sp>
-        <p:nvSpPr>
-          <p:cNvPr id="30" name="TextBox 29"/>
-          <p:cNvSpPr txBox="1"/>
-          <p:nvPr/>
-        </p:nvSpPr>
-        <p:spPr>
-          <a:xfrm>
-            <a:off x="8321040" y="3749040"/>
-            <a:ext cx="3657600" cy="475488"/>
-          </a:xfrm>
-          <a:prstGeom prst="rect">
-            <a:avLst/>
-          </a:prstGeom>
-          <a:noFill/>
-        </p:spPr>
-        <p:txBody>
-          <a:bodyPr wrap="square" lIns="45720" rIns="45720" tIns="18288" bIns="18288" anchor="ctr">
-            <a:spAutoFit/>
-          </a:bodyPr>
-          <a:lstStyle/>
-          <a:p>
-            <a:pPr algn="ctr"/>
-            <a:r>
-              <a:rPr sz="1400" b="1" i="0">
-                <a:solidFill>
-                  <a:srgbClr val="FFFFFF"/>
-                </a:solidFill>
-                <a:latin typeface="Calibri"/>
-              </a:rPr>
-              <a:t>Next Greater Element</a:t>
-            </a:r>
-          </a:p>
-        </p:txBody>
-      </p:sp>
-      <p:sp>
-        <p:nvSpPr>
-          <p:cNvPr id="31" name="Rectangle 30"/>
-          <p:cNvSpPr/>
-          <p:nvPr/>
-        </p:nvSpPr>
-        <p:spPr>
-          <a:xfrm>
-            <a:off x="8321040" y="4224528"/>
-            <a:ext cx="3657600" cy="1673352"/>
-          </a:xfrm>
-          <a:prstGeom prst="rect">
-            <a:avLst/>
-          </a:prstGeom>
-          <a:solidFill>
-            <a:srgbClr val="F2F4F7"/>
-          </a:solidFill>
-          <a:ln>
-            <a:noFill/>
-          </a:ln>
-          <a:effectLst/>
-        </p:spPr>
-        <p:style>
-          <a:lnRef idx="1">
-            <a:schemeClr val="accent1"/>
-          </a:lnRef>
-          <a:fillRef idx="3">
-            <a:schemeClr val="accent1"/>
-          </a:fillRef>
-          <a:effectRef idx="2">
-            <a:schemeClr val="accent1"/>
-          </a:effectRef>
-          <a:fontRef idx="minor">
-            <a:schemeClr val="lt1"/>
-          </a:fontRef>
-        </p:style>
-        <p:txBody>
-          <a:bodyPr rtlCol="0" anchor="ctr"/>
-          <a:lstStyle/>
-          <a:p>
-            <a:pPr algn="ctr"/>
-          </a:p>
-        </p:txBody>
-      </p:sp>
-      <p:sp>
-        <p:nvSpPr>
-          <p:cNvPr id="32" name="TextBox 31"/>
-          <p:cNvSpPr txBox="1"/>
-          <p:nvPr/>
-        </p:nvSpPr>
-        <p:spPr>
-          <a:xfrm>
-            <a:off x="8485632" y="4370832"/>
-            <a:ext cx="3337560" cy="1463040"/>
-          </a:xfrm>
-          <a:prstGeom prst="rect">
-            <a:avLst/>
-          </a:prstGeom>
-          <a:noFill/>
-        </p:spPr>
-        <p:txBody>
-          <a:bodyPr wrap="square" lIns="45720" rIns="45720" tIns="18288" bIns="18288" anchor="t">
-            <a:spAutoFit/>
-          </a:bodyPr>
-          <a:lstStyle/>
-          <a:p>
-            <a:pPr algn="l"/>
-            <a:r>
-              <a:rPr sz="1200" b="0" i="0">
-                <a:solidFill>
-                  <a:srgbClr val="333D4A"/>
-                </a:solidFill>
-                <a:latin typeface="Calibri"/>
-              </a:rPr>
-              <a:t>LeetCode 496 / 739 (Medium)
-Find the next larger element for each array index in O(N) time.
-Solved using a Monotonic Stack to store elements in decreasing order.</a:t>
+              <a:t>DFS uses a stack (explicit or recursion call stack) to backtrack. Dijkstra's Shunting-yard uses an operator stack for math parsing.</a:t>
             </a:r>
           </a:p>
         </p:txBody>
@@ -9491,7 +11384,7 @@
                 </a:solidFill>
                 <a:latin typeface="Calibri"/>
               </a:rPr>
-              <a:t>Summary — Core ADT Concepts</a:t>
+              <a:t>8.  Practice Problems</a:t>
             </a:r>
           </a:p>
         </p:txBody>
@@ -9526,7 +11419,7 @@
                 </a:solidFill>
                 <a:latin typeface="Calibri"/>
               </a:rPr>
-              <a:t>Key takeaways to review before leaving</a:t>
+              <a:t>Crucial algorithmic challenges to build your mastery</a:t>
             </a:r>
           </a:p>
         </p:txBody>
@@ -9640,21 +11533,65 @@
                 </a:solidFill>
                 <a:latin typeface="Calibri"/>
               </a:rPr>
-              <a:t>Slide 15 / 17</a:t>
-            </a:r>
-          </a:p>
-        </p:txBody>
-      </p:sp>
-      <p:sp>
-        <p:nvSpPr>
-          <p:cNvPr id="9" name="TextBox 8"/>
+              <a:t>Slide 15 / 18</a:t>
+            </a:r>
+          </a:p>
+        </p:txBody>
+      </p:sp>
+      <p:sp>
+        <p:nvSpPr>
+          <p:cNvPr id="9" name="Rectangle 8"/>
+          <p:cNvSpPr/>
+          <p:nvPr/>
+        </p:nvSpPr>
+        <p:spPr>
+          <a:xfrm>
+            <a:off x="548640" y="1417320"/>
+            <a:ext cx="3657600" cy="475488"/>
+          </a:xfrm>
+          <a:prstGeom prst="rect">
+            <a:avLst/>
+          </a:prstGeom>
+          <a:solidFill>
+            <a:srgbClr val="127A8A"/>
+          </a:solidFill>
+          <a:ln>
+            <a:noFill/>
+          </a:ln>
+          <a:effectLst/>
+        </p:spPr>
+        <p:style>
+          <a:lnRef idx="1">
+            <a:schemeClr val="accent1"/>
+          </a:lnRef>
+          <a:fillRef idx="3">
+            <a:schemeClr val="accent1"/>
+          </a:fillRef>
+          <a:effectRef idx="2">
+            <a:schemeClr val="accent1"/>
+          </a:effectRef>
+          <a:fontRef idx="minor">
+            <a:schemeClr val="lt1"/>
+          </a:fontRef>
+        </p:style>
+        <p:txBody>
+          <a:bodyPr rtlCol="0" anchor="ctr"/>
+          <a:lstStyle/>
+          <a:p>
+            <a:pPr algn="ctr"/>
+          </a:p>
+        </p:txBody>
+      </p:sp>
+      <p:sp>
+        <p:nvSpPr>
+          <p:cNvPr id="10" name="TextBox 9"/>
           <p:cNvSpPr txBox="1"/>
           <p:nvPr/>
         </p:nvSpPr>
         <p:spPr>
           <a:xfrm>
-            <a:off x="822960" y="1417320"/>
-            <a:ext cx="11064240" cy="5074920"/>
+            <a:off x="548640" y="1417320"/>
+            <a:ext cx="3657600" cy="475488"/>
           </a:xfrm>
           <a:prstGeom prst="rect">
             <a:avLst/>
@@ -9662,176 +11599,901 @@
           <a:noFill/>
         </p:spPr>
         <p:txBody>
-          <a:bodyPr wrap="square" lIns="45720" rIns="45720">
+          <a:bodyPr wrap="square" lIns="45720" rIns="45720" tIns="18288" bIns="18288" anchor="ctr">
             <a:spAutoFit/>
           </a:bodyPr>
           <a:lstStyle/>
           <a:p>
-            <a:pPr algn="l">
-              <a:lnSpc>
-                <a:spcPct val="145000"/>
-              </a:lnSpc>
-              <a:spcAft>
-                <a:spcPts val="400"/>
-              </a:spcAft>
-            </a:pPr>
-            <a:r>
-              <a:rPr sz="1800" b="1">
-                <a:solidFill>
-                  <a:srgbClr val="E0A81F"/>
-                </a:solidFill>
-                <a:latin typeface="Calibri"/>
-              </a:rPr>
-              <a:t>▸  </a:t>
-            </a:r>
-            <a:r>
-              <a:rPr sz="1800">
+            <a:pPr algn="ctr"/>
+            <a:r>
+              <a:rPr sz="1400" b="1" i="0">
+                <a:solidFill>
+                  <a:srgbClr val="FFFFFF"/>
+                </a:solidFill>
+                <a:latin typeface="Calibri"/>
+              </a:rPr>
+              <a:t>Valid Parentheses</a:t>
+            </a:r>
+          </a:p>
+        </p:txBody>
+      </p:sp>
+      <p:sp>
+        <p:nvSpPr>
+          <p:cNvPr id="11" name="Rectangle 10"/>
+          <p:cNvSpPr/>
+          <p:nvPr/>
+        </p:nvSpPr>
+        <p:spPr>
+          <a:xfrm>
+            <a:off x="548640" y="1892808"/>
+            <a:ext cx="3657600" cy="1673352"/>
+          </a:xfrm>
+          <a:prstGeom prst="rect">
+            <a:avLst/>
+          </a:prstGeom>
+          <a:solidFill>
+            <a:srgbClr val="F2F4F7"/>
+          </a:solidFill>
+          <a:ln>
+            <a:noFill/>
+          </a:ln>
+          <a:effectLst/>
+        </p:spPr>
+        <p:style>
+          <a:lnRef idx="1">
+            <a:schemeClr val="accent1"/>
+          </a:lnRef>
+          <a:fillRef idx="3">
+            <a:schemeClr val="accent1"/>
+          </a:fillRef>
+          <a:effectRef idx="2">
+            <a:schemeClr val="accent1"/>
+          </a:effectRef>
+          <a:fontRef idx="minor">
+            <a:schemeClr val="lt1"/>
+          </a:fontRef>
+        </p:style>
+        <p:txBody>
+          <a:bodyPr rtlCol="0" anchor="ctr"/>
+          <a:lstStyle/>
+          <a:p>
+            <a:pPr algn="ctr"/>
+          </a:p>
+        </p:txBody>
+      </p:sp>
+      <p:sp>
+        <p:nvSpPr>
+          <p:cNvPr id="12" name="TextBox 11"/>
+          <p:cNvSpPr txBox="1"/>
+          <p:nvPr/>
+        </p:nvSpPr>
+        <p:spPr>
+          <a:xfrm>
+            <a:off x="713232" y="2039112"/>
+            <a:ext cx="3337560" cy="1463040"/>
+          </a:xfrm>
+          <a:prstGeom prst="rect">
+            <a:avLst/>
+          </a:prstGeom>
+          <a:noFill/>
+        </p:spPr>
+        <p:txBody>
+          <a:bodyPr wrap="square" lIns="45720" rIns="45720" tIns="18288" bIns="18288" anchor="t">
+            <a:spAutoFit/>
+          </a:bodyPr>
+          <a:lstStyle/>
+          <a:p>
+            <a:pPr algn="l"/>
+            <a:r>
+              <a:rPr sz="1200" b="0" i="0">
                 <a:solidFill>
                   <a:srgbClr val="333D4A"/>
                 </a:solidFill>
                 <a:latin typeface="Calibri"/>
               </a:rPr>
-              <a:t>Abstract Data Types define the behaviors (API) and operations, decoupling from physical memory representations.</a:t>
-            </a:r>
-          </a:p>
-          <a:p>
-            <a:pPr algn="l">
-              <a:lnSpc>
-                <a:spcPct val="145000"/>
-              </a:lnSpc>
-              <a:spcAft>
-                <a:spcPts val="400"/>
-              </a:spcAft>
-            </a:pPr>
-            <a:r>
-              <a:rPr sz="1800" b="1">
-                <a:solidFill>
-                  <a:srgbClr val="E0A81F"/>
-                </a:solidFill>
-                <a:latin typeface="Calibri"/>
-              </a:rPr>
-              <a:t>▸  </a:t>
-            </a:r>
-            <a:r>
-              <a:rPr sz="1800">
+              <a:t>LeetCode 20 (Easy)
+Given a string of brackets '{}()[]', check if closed in correct order.
+Use a Stack to match open-to-close brackets.</a:t>
+            </a:r>
+          </a:p>
+        </p:txBody>
+      </p:sp>
+      <p:sp>
+        <p:nvSpPr>
+          <p:cNvPr id="13" name="Rectangle 12"/>
+          <p:cNvSpPr/>
+          <p:nvPr/>
+        </p:nvSpPr>
+        <p:spPr>
+          <a:xfrm>
+            <a:off x="4434840" y="1417320"/>
+            <a:ext cx="3657600" cy="475488"/>
+          </a:xfrm>
+          <a:prstGeom prst="rect">
+            <a:avLst/>
+          </a:prstGeom>
+          <a:solidFill>
+            <a:srgbClr val="E0A81F"/>
+          </a:solidFill>
+          <a:ln>
+            <a:noFill/>
+          </a:ln>
+          <a:effectLst/>
+        </p:spPr>
+        <p:style>
+          <a:lnRef idx="1">
+            <a:schemeClr val="accent1"/>
+          </a:lnRef>
+          <a:fillRef idx="3">
+            <a:schemeClr val="accent1"/>
+          </a:fillRef>
+          <a:effectRef idx="2">
+            <a:schemeClr val="accent1"/>
+          </a:effectRef>
+          <a:fontRef idx="minor">
+            <a:schemeClr val="lt1"/>
+          </a:fontRef>
+        </p:style>
+        <p:txBody>
+          <a:bodyPr rtlCol="0" anchor="ctr"/>
+          <a:lstStyle/>
+          <a:p>
+            <a:pPr algn="ctr"/>
+          </a:p>
+        </p:txBody>
+      </p:sp>
+      <p:sp>
+        <p:nvSpPr>
+          <p:cNvPr id="14" name="TextBox 13"/>
+          <p:cNvSpPr txBox="1"/>
+          <p:nvPr/>
+        </p:nvSpPr>
+        <p:spPr>
+          <a:xfrm>
+            <a:off x="4434840" y="1417320"/>
+            <a:ext cx="3657600" cy="475488"/>
+          </a:xfrm>
+          <a:prstGeom prst="rect">
+            <a:avLst/>
+          </a:prstGeom>
+          <a:noFill/>
+        </p:spPr>
+        <p:txBody>
+          <a:bodyPr wrap="square" lIns="45720" rIns="45720" tIns="18288" bIns="18288" anchor="ctr">
+            <a:spAutoFit/>
+          </a:bodyPr>
+          <a:lstStyle/>
+          <a:p>
+            <a:pPr algn="ctr"/>
+            <a:r>
+              <a:rPr sz="1400" b="1" i="0">
+                <a:solidFill>
+                  <a:srgbClr val="FFFFFF"/>
+                </a:solidFill>
+                <a:latin typeface="Calibri"/>
+              </a:rPr>
+              <a:t>Implement Queue using Stacks</a:t>
+            </a:r>
+          </a:p>
+        </p:txBody>
+      </p:sp>
+      <p:sp>
+        <p:nvSpPr>
+          <p:cNvPr id="15" name="Rectangle 14"/>
+          <p:cNvSpPr/>
+          <p:nvPr/>
+        </p:nvSpPr>
+        <p:spPr>
+          <a:xfrm>
+            <a:off x="4434840" y="1892808"/>
+            <a:ext cx="3657600" cy="1673352"/>
+          </a:xfrm>
+          <a:prstGeom prst="rect">
+            <a:avLst/>
+          </a:prstGeom>
+          <a:solidFill>
+            <a:srgbClr val="F2F4F7"/>
+          </a:solidFill>
+          <a:ln>
+            <a:noFill/>
+          </a:ln>
+          <a:effectLst/>
+        </p:spPr>
+        <p:style>
+          <a:lnRef idx="1">
+            <a:schemeClr val="accent1"/>
+          </a:lnRef>
+          <a:fillRef idx="3">
+            <a:schemeClr val="accent1"/>
+          </a:fillRef>
+          <a:effectRef idx="2">
+            <a:schemeClr val="accent1"/>
+          </a:effectRef>
+          <a:fontRef idx="minor">
+            <a:schemeClr val="lt1"/>
+          </a:fontRef>
+        </p:style>
+        <p:txBody>
+          <a:bodyPr rtlCol="0" anchor="ctr"/>
+          <a:lstStyle/>
+          <a:p>
+            <a:pPr algn="ctr"/>
+          </a:p>
+        </p:txBody>
+      </p:sp>
+      <p:sp>
+        <p:nvSpPr>
+          <p:cNvPr id="16" name="TextBox 15"/>
+          <p:cNvSpPr txBox="1"/>
+          <p:nvPr/>
+        </p:nvSpPr>
+        <p:spPr>
+          <a:xfrm>
+            <a:off x="4599432" y="2039112"/>
+            <a:ext cx="3337560" cy="1463040"/>
+          </a:xfrm>
+          <a:prstGeom prst="rect">
+            <a:avLst/>
+          </a:prstGeom>
+          <a:noFill/>
+        </p:spPr>
+        <p:txBody>
+          <a:bodyPr wrap="square" lIns="45720" rIns="45720" tIns="18288" bIns="18288" anchor="t">
+            <a:spAutoFit/>
+          </a:bodyPr>
+          <a:lstStyle/>
+          <a:p>
+            <a:pPr algn="l"/>
+            <a:r>
+              <a:rPr sz="1200" b="0" i="0">
                 <a:solidFill>
                   <a:srgbClr val="333D4A"/>
                 </a:solidFill>
                 <a:latin typeface="Calibri"/>
               </a:rPr>
-              <a:t>A Stack is LIFO (Last-In-First-Out). Operations push, pop, and peek occur at the top of the stack.</a:t>
-            </a:r>
-          </a:p>
-          <a:p>
-            <a:pPr algn="l">
-              <a:lnSpc>
-                <a:spcPct val="145000"/>
-              </a:lnSpc>
-              <a:spcAft>
-                <a:spcPts val="400"/>
-              </a:spcAft>
-            </a:pPr>
-            <a:r>
-              <a:rPr sz="1800" b="1">
-                <a:solidFill>
-                  <a:srgbClr val="E0A81F"/>
-                </a:solidFill>
-                <a:latin typeface="Calibri"/>
-              </a:rPr>
-              <a:t>▸  </a:t>
-            </a:r>
-            <a:r>
-              <a:rPr sz="1800">
+              <a:t>LeetCode 232 (Medium)
+FIFO queue using Stack1 (enqueue) and Stack2 (dequeue). Transfer elements if empty.
+Amortized O(1) dequeue: elements are pushed/popped a constant number of times.</a:t>
+            </a:r>
+          </a:p>
+        </p:txBody>
+      </p:sp>
+      <p:sp>
+        <p:nvSpPr>
+          <p:cNvPr id="17" name="Rectangle 16"/>
+          <p:cNvSpPr/>
+          <p:nvPr/>
+        </p:nvSpPr>
+        <p:spPr>
+          <a:xfrm>
+            <a:off x="8321040" y="1417320"/>
+            <a:ext cx="3657600" cy="475488"/>
+          </a:xfrm>
+          <a:prstGeom prst="rect">
+            <a:avLst/>
+          </a:prstGeom>
+          <a:solidFill>
+            <a:srgbClr val="0B2A4A"/>
+          </a:solidFill>
+          <a:ln>
+            <a:noFill/>
+          </a:ln>
+          <a:effectLst/>
+        </p:spPr>
+        <p:style>
+          <a:lnRef idx="1">
+            <a:schemeClr val="accent1"/>
+          </a:lnRef>
+          <a:fillRef idx="3">
+            <a:schemeClr val="accent1"/>
+          </a:fillRef>
+          <a:effectRef idx="2">
+            <a:schemeClr val="accent1"/>
+          </a:effectRef>
+          <a:fontRef idx="minor">
+            <a:schemeClr val="lt1"/>
+          </a:fontRef>
+        </p:style>
+        <p:txBody>
+          <a:bodyPr rtlCol="0" anchor="ctr"/>
+          <a:lstStyle/>
+          <a:p>
+            <a:pPr algn="ctr"/>
+          </a:p>
+        </p:txBody>
+      </p:sp>
+      <p:sp>
+        <p:nvSpPr>
+          <p:cNvPr id="18" name="TextBox 17"/>
+          <p:cNvSpPr txBox="1"/>
+          <p:nvPr/>
+        </p:nvSpPr>
+        <p:spPr>
+          <a:xfrm>
+            <a:off x="8321040" y="1417320"/>
+            <a:ext cx="3657600" cy="475488"/>
+          </a:xfrm>
+          <a:prstGeom prst="rect">
+            <a:avLst/>
+          </a:prstGeom>
+          <a:noFill/>
+        </p:spPr>
+        <p:txBody>
+          <a:bodyPr wrap="square" lIns="45720" rIns="45720" tIns="18288" bIns="18288" anchor="ctr">
+            <a:spAutoFit/>
+          </a:bodyPr>
+          <a:lstStyle/>
+          <a:p>
+            <a:pPr algn="ctr"/>
+            <a:r>
+              <a:rPr sz="1400" b="1" i="0">
+                <a:solidFill>
+                  <a:srgbClr val="FFFFFF"/>
+                </a:solidFill>
+                <a:latin typeface="Calibri"/>
+              </a:rPr>
+              <a:t>Implement Stack using Queues</a:t>
+            </a:r>
+          </a:p>
+        </p:txBody>
+      </p:sp>
+      <p:sp>
+        <p:nvSpPr>
+          <p:cNvPr id="19" name="Rectangle 18"/>
+          <p:cNvSpPr/>
+          <p:nvPr/>
+        </p:nvSpPr>
+        <p:spPr>
+          <a:xfrm>
+            <a:off x="8321040" y="1892808"/>
+            <a:ext cx="3657600" cy="1673352"/>
+          </a:xfrm>
+          <a:prstGeom prst="rect">
+            <a:avLst/>
+          </a:prstGeom>
+          <a:solidFill>
+            <a:srgbClr val="F2F4F7"/>
+          </a:solidFill>
+          <a:ln>
+            <a:noFill/>
+          </a:ln>
+          <a:effectLst/>
+        </p:spPr>
+        <p:style>
+          <a:lnRef idx="1">
+            <a:schemeClr val="accent1"/>
+          </a:lnRef>
+          <a:fillRef idx="3">
+            <a:schemeClr val="accent1"/>
+          </a:fillRef>
+          <a:effectRef idx="2">
+            <a:schemeClr val="accent1"/>
+          </a:effectRef>
+          <a:fontRef idx="minor">
+            <a:schemeClr val="lt1"/>
+          </a:fontRef>
+        </p:style>
+        <p:txBody>
+          <a:bodyPr rtlCol="0" anchor="ctr"/>
+          <a:lstStyle/>
+          <a:p>
+            <a:pPr algn="ctr"/>
+          </a:p>
+        </p:txBody>
+      </p:sp>
+      <p:sp>
+        <p:nvSpPr>
+          <p:cNvPr id="20" name="TextBox 19"/>
+          <p:cNvSpPr txBox="1"/>
+          <p:nvPr/>
+        </p:nvSpPr>
+        <p:spPr>
+          <a:xfrm>
+            <a:off x="8485632" y="2039112"/>
+            <a:ext cx="3337560" cy="1463040"/>
+          </a:xfrm>
+          <a:prstGeom prst="rect">
+            <a:avLst/>
+          </a:prstGeom>
+          <a:noFill/>
+        </p:spPr>
+        <p:txBody>
+          <a:bodyPr wrap="square" lIns="45720" rIns="45720" tIns="18288" bIns="18288" anchor="t">
+            <a:spAutoFit/>
+          </a:bodyPr>
+          <a:lstStyle/>
+          <a:p>
+            <a:pPr algn="l"/>
+            <a:r>
+              <a:rPr sz="1200" b="0" i="0">
                 <a:solidFill>
                   <a:srgbClr val="333D4A"/>
                 </a:solidFill>
                 <a:latin typeface="Calibri"/>
               </a:rPr>
-              <a:t>A Queue is FIFO (First-In-First-Out). Elements are added at the rear and removed from the front.</a:t>
-            </a:r>
-          </a:p>
-          <a:p>
-            <a:pPr algn="l">
-              <a:lnSpc>
-                <a:spcPct val="145000"/>
-              </a:lnSpc>
-              <a:spcAft>
-                <a:spcPts val="400"/>
-              </a:spcAft>
-            </a:pPr>
-            <a:r>
-              <a:rPr sz="1800" b="1">
-                <a:solidFill>
-                  <a:srgbClr val="E0A81F"/>
-                </a:solidFill>
-                <a:latin typeface="Calibri"/>
-              </a:rPr>
-              <a:t>▸  </a:t>
-            </a:r>
-            <a:r>
-              <a:rPr sz="1800">
+              <a:t>LeetCode 225 (Easy)
+Build a LIFO stack API using only FIFO queues.
+Rotate elements within a single queue on push/pop.</a:t>
+            </a:r>
+          </a:p>
+        </p:txBody>
+      </p:sp>
+      <p:sp>
+        <p:nvSpPr>
+          <p:cNvPr id="21" name="Rectangle 20"/>
+          <p:cNvSpPr/>
+          <p:nvPr/>
+        </p:nvSpPr>
+        <p:spPr>
+          <a:xfrm>
+            <a:off x="548640" y="3749040"/>
+            <a:ext cx="3657600" cy="475488"/>
+          </a:xfrm>
+          <a:prstGeom prst="rect">
+            <a:avLst/>
+          </a:prstGeom>
+          <a:solidFill>
+            <a:srgbClr val="2E7D32"/>
+          </a:solidFill>
+          <a:ln>
+            <a:noFill/>
+          </a:ln>
+          <a:effectLst/>
+        </p:spPr>
+        <p:style>
+          <a:lnRef idx="1">
+            <a:schemeClr val="accent1"/>
+          </a:lnRef>
+          <a:fillRef idx="3">
+            <a:schemeClr val="accent1"/>
+          </a:fillRef>
+          <a:effectRef idx="2">
+            <a:schemeClr val="accent1"/>
+          </a:effectRef>
+          <a:fontRef idx="minor">
+            <a:schemeClr val="lt1"/>
+          </a:fontRef>
+        </p:style>
+        <p:txBody>
+          <a:bodyPr rtlCol="0" anchor="ctr"/>
+          <a:lstStyle/>
+          <a:p>
+            <a:pPr algn="ctr"/>
+          </a:p>
+        </p:txBody>
+      </p:sp>
+      <p:sp>
+        <p:nvSpPr>
+          <p:cNvPr id="22" name="TextBox 21"/>
+          <p:cNvSpPr txBox="1"/>
+          <p:nvPr/>
+        </p:nvSpPr>
+        <p:spPr>
+          <a:xfrm>
+            <a:off x="548640" y="3749040"/>
+            <a:ext cx="3657600" cy="475488"/>
+          </a:xfrm>
+          <a:prstGeom prst="rect">
+            <a:avLst/>
+          </a:prstGeom>
+          <a:noFill/>
+        </p:spPr>
+        <p:txBody>
+          <a:bodyPr wrap="square" lIns="45720" rIns="45720" tIns="18288" bIns="18288" anchor="ctr">
+            <a:spAutoFit/>
+          </a:bodyPr>
+          <a:lstStyle/>
+          <a:p>
+            <a:pPr algn="ctr"/>
+            <a:r>
+              <a:rPr sz="1400" b="1" i="0">
+                <a:solidFill>
+                  <a:srgbClr val="FFFFFF"/>
+                </a:solidFill>
+                <a:latin typeface="Calibri"/>
+              </a:rPr>
+              <a:t>Min Stack</a:t>
+            </a:r>
+          </a:p>
+        </p:txBody>
+      </p:sp>
+      <p:sp>
+        <p:nvSpPr>
+          <p:cNvPr id="23" name="Rectangle 22"/>
+          <p:cNvSpPr/>
+          <p:nvPr/>
+        </p:nvSpPr>
+        <p:spPr>
+          <a:xfrm>
+            <a:off x="548640" y="4224528"/>
+            <a:ext cx="3657600" cy="1673352"/>
+          </a:xfrm>
+          <a:prstGeom prst="rect">
+            <a:avLst/>
+          </a:prstGeom>
+          <a:solidFill>
+            <a:srgbClr val="F2F4F7"/>
+          </a:solidFill>
+          <a:ln>
+            <a:noFill/>
+          </a:ln>
+          <a:effectLst/>
+        </p:spPr>
+        <p:style>
+          <a:lnRef idx="1">
+            <a:schemeClr val="accent1"/>
+          </a:lnRef>
+          <a:fillRef idx="3">
+            <a:schemeClr val="accent1"/>
+          </a:fillRef>
+          <a:effectRef idx="2">
+            <a:schemeClr val="accent1"/>
+          </a:effectRef>
+          <a:fontRef idx="minor">
+            <a:schemeClr val="lt1"/>
+          </a:fontRef>
+        </p:style>
+        <p:txBody>
+          <a:bodyPr rtlCol="0" anchor="ctr"/>
+          <a:lstStyle/>
+          <a:p>
+            <a:pPr algn="ctr"/>
+          </a:p>
+        </p:txBody>
+      </p:sp>
+      <p:sp>
+        <p:nvSpPr>
+          <p:cNvPr id="24" name="TextBox 23"/>
+          <p:cNvSpPr txBox="1"/>
+          <p:nvPr/>
+        </p:nvSpPr>
+        <p:spPr>
+          <a:xfrm>
+            <a:off x="713232" y="4370832"/>
+            <a:ext cx="3337560" cy="1463040"/>
+          </a:xfrm>
+          <a:prstGeom prst="rect">
+            <a:avLst/>
+          </a:prstGeom>
+          <a:noFill/>
+        </p:spPr>
+        <p:txBody>
+          <a:bodyPr wrap="square" lIns="45720" rIns="45720" tIns="18288" bIns="18288" anchor="t">
+            <a:spAutoFit/>
+          </a:bodyPr>
+          <a:lstStyle/>
+          <a:p>
+            <a:pPr algn="l"/>
+            <a:r>
+              <a:rPr sz="1200" b="0" i="0">
                 <a:solidFill>
                   <a:srgbClr val="333D4A"/>
                 </a:solidFill>
                 <a:latin typeface="Calibri"/>
               </a:rPr>
-              <a:t>Stack implements O(1) easily using a Singly Linked List (at head) or dynamic array (at end).</a:t>
-            </a:r>
-          </a:p>
-          <a:p>
-            <a:pPr algn="l">
-              <a:lnSpc>
-                <a:spcPct val="145000"/>
-              </a:lnSpc>
-              <a:spcAft>
-                <a:spcPts val="400"/>
-              </a:spcAft>
-            </a:pPr>
-            <a:r>
-              <a:rPr sz="1800" b="1">
-                <a:solidFill>
-                  <a:srgbClr val="E0A81F"/>
-                </a:solidFill>
-                <a:latin typeface="Calibri"/>
-              </a:rPr>
-              <a:t>▸  </a:t>
-            </a:r>
-            <a:r>
-              <a:rPr sz="1800">
+              <a:t>LeetCode 155 (Medium)
+Design a stack that supports get_min() in O(1) time.
+Uses a parallel auxiliary stack to track the minimum values.</a:t>
+            </a:r>
+          </a:p>
+        </p:txBody>
+      </p:sp>
+      <p:sp>
+        <p:nvSpPr>
+          <p:cNvPr id="25" name="Rectangle 24"/>
+          <p:cNvSpPr/>
+          <p:nvPr/>
+        </p:nvSpPr>
+        <p:spPr>
+          <a:xfrm>
+            <a:off x="4434840" y="3749040"/>
+            <a:ext cx="3657600" cy="475488"/>
+          </a:xfrm>
+          <a:prstGeom prst="rect">
+            <a:avLst/>
+          </a:prstGeom>
+          <a:solidFill>
+            <a:srgbClr val="6A1B9A"/>
+          </a:solidFill>
+          <a:ln>
+            <a:noFill/>
+          </a:ln>
+          <a:effectLst/>
+        </p:spPr>
+        <p:style>
+          <a:lnRef idx="1">
+            <a:schemeClr val="accent1"/>
+          </a:lnRef>
+          <a:fillRef idx="3">
+            <a:schemeClr val="accent1"/>
+          </a:fillRef>
+          <a:effectRef idx="2">
+            <a:schemeClr val="accent1"/>
+          </a:effectRef>
+          <a:fontRef idx="minor">
+            <a:schemeClr val="lt1"/>
+          </a:fontRef>
+        </p:style>
+        <p:txBody>
+          <a:bodyPr rtlCol="0" anchor="ctr"/>
+          <a:lstStyle/>
+          <a:p>
+            <a:pPr algn="ctr"/>
+          </a:p>
+        </p:txBody>
+      </p:sp>
+      <p:sp>
+        <p:nvSpPr>
+          <p:cNvPr id="26" name="TextBox 25"/>
+          <p:cNvSpPr txBox="1"/>
+          <p:nvPr/>
+        </p:nvSpPr>
+        <p:spPr>
+          <a:xfrm>
+            <a:off x="4434840" y="3749040"/>
+            <a:ext cx="3657600" cy="475488"/>
+          </a:xfrm>
+          <a:prstGeom prst="rect">
+            <a:avLst/>
+          </a:prstGeom>
+          <a:noFill/>
+        </p:spPr>
+        <p:txBody>
+          <a:bodyPr wrap="square" lIns="45720" rIns="45720" tIns="18288" bIns="18288" anchor="ctr">
+            <a:spAutoFit/>
+          </a:bodyPr>
+          <a:lstStyle/>
+          <a:p>
+            <a:pPr algn="ctr"/>
+            <a:r>
+              <a:rPr sz="1400" b="1" i="0">
+                <a:solidFill>
+                  <a:srgbClr val="FFFFFF"/>
+                </a:solidFill>
+                <a:latin typeface="Calibri"/>
+              </a:rPr>
+              <a:t>Evaluate Reverse Polish Notation</a:t>
+            </a:r>
+          </a:p>
+        </p:txBody>
+      </p:sp>
+      <p:sp>
+        <p:nvSpPr>
+          <p:cNvPr id="27" name="Rectangle 26"/>
+          <p:cNvSpPr/>
+          <p:nvPr/>
+        </p:nvSpPr>
+        <p:spPr>
+          <a:xfrm>
+            <a:off x="4434840" y="4224528"/>
+            <a:ext cx="3657600" cy="1673352"/>
+          </a:xfrm>
+          <a:prstGeom prst="rect">
+            <a:avLst/>
+          </a:prstGeom>
+          <a:solidFill>
+            <a:srgbClr val="F2F4F7"/>
+          </a:solidFill>
+          <a:ln>
+            <a:noFill/>
+          </a:ln>
+          <a:effectLst/>
+        </p:spPr>
+        <p:style>
+          <a:lnRef idx="1">
+            <a:schemeClr val="accent1"/>
+          </a:lnRef>
+          <a:fillRef idx="3">
+            <a:schemeClr val="accent1"/>
+          </a:fillRef>
+          <a:effectRef idx="2">
+            <a:schemeClr val="accent1"/>
+          </a:effectRef>
+          <a:fontRef idx="minor">
+            <a:schemeClr val="lt1"/>
+          </a:fontRef>
+        </p:style>
+        <p:txBody>
+          <a:bodyPr rtlCol="0" anchor="ctr"/>
+          <a:lstStyle/>
+          <a:p>
+            <a:pPr algn="ctr"/>
+          </a:p>
+        </p:txBody>
+      </p:sp>
+      <p:sp>
+        <p:nvSpPr>
+          <p:cNvPr id="28" name="TextBox 27"/>
+          <p:cNvSpPr txBox="1"/>
+          <p:nvPr/>
+        </p:nvSpPr>
+        <p:spPr>
+          <a:xfrm>
+            <a:off x="4599432" y="4370832"/>
+            <a:ext cx="3337560" cy="1463040"/>
+          </a:xfrm>
+          <a:prstGeom prst="rect">
+            <a:avLst/>
+          </a:prstGeom>
+          <a:noFill/>
+        </p:spPr>
+        <p:txBody>
+          <a:bodyPr wrap="square" lIns="45720" rIns="45720" tIns="18288" bIns="18288" anchor="t">
+            <a:spAutoFit/>
+          </a:bodyPr>
+          <a:lstStyle/>
+          <a:p>
+            <a:pPr algn="l"/>
+            <a:r>
+              <a:rPr sz="1200" b="0" i="0">
                 <a:solidFill>
                   <a:srgbClr val="333D4A"/>
                 </a:solidFill>
                 <a:latin typeface="Calibri"/>
               </a:rPr>
-              <a:t>Queue requires dual pointers (front and rear) in a Linked List for O(1) performance.</a:t>
-            </a:r>
-          </a:p>
-          <a:p>
-            <a:pPr algn="l">
-              <a:lnSpc>
-                <a:spcPct val="145000"/>
-              </a:lnSpc>
-              <a:spcAft>
-                <a:spcPts val="400"/>
-              </a:spcAft>
-            </a:pPr>
-            <a:r>
-              <a:rPr sz="1800" b="1">
-                <a:solidFill>
-                  <a:srgbClr val="E0A81F"/>
-                </a:solidFill>
-                <a:latin typeface="Calibri"/>
-              </a:rPr>
-              <a:t>▸  </a:t>
-            </a:r>
-            <a:r>
-              <a:rPr sz="1800">
+              <a:t>LeetCode 150 (Medium)
+Evaluate math strings like ['2', '1', '+', '3', '*'] -&gt; 9.
+Push operands; pop for operations. (Related: Dijkstra's Shunting-yard).</a:t>
+            </a:r>
+          </a:p>
+        </p:txBody>
+      </p:sp>
+      <p:sp>
+        <p:nvSpPr>
+          <p:cNvPr id="29" name="Rectangle 28"/>
+          <p:cNvSpPr/>
+          <p:nvPr/>
+        </p:nvSpPr>
+        <p:spPr>
+          <a:xfrm>
+            <a:off x="8321040" y="3749040"/>
+            <a:ext cx="3657600" cy="475488"/>
+          </a:xfrm>
+          <a:prstGeom prst="rect">
+            <a:avLst/>
+          </a:prstGeom>
+          <a:solidFill>
+            <a:srgbClr val="C0392B"/>
+          </a:solidFill>
+          <a:ln>
+            <a:noFill/>
+          </a:ln>
+          <a:effectLst/>
+        </p:spPr>
+        <p:style>
+          <a:lnRef idx="1">
+            <a:schemeClr val="accent1"/>
+          </a:lnRef>
+          <a:fillRef idx="3">
+            <a:schemeClr val="accent1"/>
+          </a:fillRef>
+          <a:effectRef idx="2">
+            <a:schemeClr val="accent1"/>
+          </a:effectRef>
+          <a:fontRef idx="minor">
+            <a:schemeClr val="lt1"/>
+          </a:fontRef>
+        </p:style>
+        <p:txBody>
+          <a:bodyPr rtlCol="0" anchor="ctr"/>
+          <a:lstStyle/>
+          <a:p>
+            <a:pPr algn="ctr"/>
+          </a:p>
+        </p:txBody>
+      </p:sp>
+      <p:sp>
+        <p:nvSpPr>
+          <p:cNvPr id="30" name="TextBox 29"/>
+          <p:cNvSpPr txBox="1"/>
+          <p:nvPr/>
+        </p:nvSpPr>
+        <p:spPr>
+          <a:xfrm>
+            <a:off x="8321040" y="3749040"/>
+            <a:ext cx="3657600" cy="475488"/>
+          </a:xfrm>
+          <a:prstGeom prst="rect">
+            <a:avLst/>
+          </a:prstGeom>
+          <a:noFill/>
+        </p:spPr>
+        <p:txBody>
+          <a:bodyPr wrap="square" lIns="45720" rIns="45720" tIns="18288" bIns="18288" anchor="ctr">
+            <a:spAutoFit/>
+          </a:bodyPr>
+          <a:lstStyle/>
+          <a:p>
+            <a:pPr algn="ctr"/>
+            <a:r>
+              <a:rPr sz="1400" b="1" i="0">
+                <a:solidFill>
+                  <a:srgbClr val="FFFFFF"/>
+                </a:solidFill>
+                <a:latin typeface="Calibri"/>
+              </a:rPr>
+              <a:t>Next Greater Element</a:t>
+            </a:r>
+          </a:p>
+        </p:txBody>
+      </p:sp>
+      <p:sp>
+        <p:nvSpPr>
+          <p:cNvPr id="31" name="Rectangle 30"/>
+          <p:cNvSpPr/>
+          <p:nvPr/>
+        </p:nvSpPr>
+        <p:spPr>
+          <a:xfrm>
+            <a:off x="8321040" y="4224528"/>
+            <a:ext cx="3657600" cy="1673352"/>
+          </a:xfrm>
+          <a:prstGeom prst="rect">
+            <a:avLst/>
+          </a:prstGeom>
+          <a:solidFill>
+            <a:srgbClr val="F2F4F7"/>
+          </a:solidFill>
+          <a:ln>
+            <a:noFill/>
+          </a:ln>
+          <a:effectLst/>
+        </p:spPr>
+        <p:style>
+          <a:lnRef idx="1">
+            <a:schemeClr val="accent1"/>
+          </a:lnRef>
+          <a:fillRef idx="3">
+            <a:schemeClr val="accent1"/>
+          </a:fillRef>
+          <a:effectRef idx="2">
+            <a:schemeClr val="accent1"/>
+          </a:effectRef>
+          <a:fontRef idx="minor">
+            <a:schemeClr val="lt1"/>
+          </a:fontRef>
+        </p:style>
+        <p:txBody>
+          <a:bodyPr rtlCol="0" anchor="ctr"/>
+          <a:lstStyle/>
+          <a:p>
+            <a:pPr algn="ctr"/>
+          </a:p>
+        </p:txBody>
+      </p:sp>
+      <p:sp>
+        <p:nvSpPr>
+          <p:cNvPr id="32" name="TextBox 31"/>
+          <p:cNvSpPr txBox="1"/>
+          <p:nvPr/>
+        </p:nvSpPr>
+        <p:spPr>
+          <a:xfrm>
+            <a:off x="8485632" y="4370832"/>
+            <a:ext cx="3337560" cy="1463040"/>
+          </a:xfrm>
+          <a:prstGeom prst="rect">
+            <a:avLst/>
+          </a:prstGeom>
+          <a:noFill/>
+        </p:spPr>
+        <p:txBody>
+          <a:bodyPr wrap="square" lIns="45720" rIns="45720" tIns="18288" bIns="18288" anchor="t">
+            <a:spAutoFit/>
+          </a:bodyPr>
+          <a:lstStyle/>
+          <a:p>
+            <a:pPr algn="l"/>
+            <a:r>
+              <a:rPr sz="1200" b="0" i="0">
                 <a:solidFill>
                   <a:srgbClr val="333D4A"/>
                 </a:solidFill>
                 <a:latin typeface="Calibri"/>
               </a:rPr>
-              <a:t>Queue in arrays is implemented as a Circular Buffer to avoid O(N) element shifting.</a:t>
+              <a:t>LeetCode 496 / 739 (Medium)
+Find the next larger element for each array index in O(N) time.
+Solved using a Monotonic Stack to store elements in decreasing order.</a:t>
             </a:r>
           </a:p>
         </p:txBody>
@@ -9972,7 +12634,7 @@
                 </a:solidFill>
                 <a:latin typeface="Calibri"/>
               </a:rPr>
-              <a:t>References &amp; Further Reading</a:t>
+              <a:t>Summary — Core ADT Concepts</a:t>
             </a:r>
           </a:p>
         </p:txBody>
@@ -10007,7 +12669,7 @@
                 </a:solidFill>
                 <a:latin typeface="Calibri"/>
               </a:rPr>
-              <a:t>Resources for deeper study</a:t>
+              <a:t>Key takeaways to review before leaving</a:t>
             </a:r>
           </a:p>
         </p:txBody>
@@ -10121,7 +12783,7 @@
                 </a:solidFill>
                 <a:latin typeface="Calibri"/>
               </a:rPr>
-              <a:t>Slide 16 / 17</a:t>
+              <a:t>Slide 16 / 18</a:t>
             </a:r>
           </a:p>
         </p:txBody>
@@ -10135,7 +12797,7 @@
         <p:spPr>
           <a:xfrm>
             <a:off x="822960" y="1417320"/>
-            <a:ext cx="11064240" cy="5120640"/>
+            <a:ext cx="11064240" cy="5074920"/>
           </a:xfrm>
           <a:prstGeom prst="rect">
             <a:avLst/>
@@ -10150,149 +12812,169 @@
           <a:p>
             <a:pPr algn="l">
               <a:lnSpc>
-                <a:spcPct val="140000"/>
+                <a:spcPct val="145000"/>
               </a:lnSpc>
               <a:spcAft>
                 <a:spcPts val="400"/>
               </a:spcAft>
             </a:pPr>
             <a:r>
-              <a:rPr sz="1600" b="1">
-                <a:solidFill>
-                  <a:srgbClr val="127A8A"/>
+              <a:rPr sz="1800" b="1">
+                <a:solidFill>
+                  <a:srgbClr val="E0A81F"/>
                 </a:solidFill>
                 <a:latin typeface="Calibri"/>
               </a:rPr>
               <a:t>▸  </a:t>
             </a:r>
             <a:r>
-              <a:rPr sz="1600" b="1">
-                <a:solidFill>
-                  <a:srgbClr val="0B2A4A"/>
-                </a:solidFill>
-                <a:latin typeface="Calibri"/>
-              </a:rPr>
-              <a:t>Knuth, D. E.  </a:t>
-            </a:r>
-            <a:r>
-              <a:rPr sz="1600">
+              <a:rPr sz="1800">
                 <a:solidFill>
                   <a:srgbClr val="333D4A"/>
                 </a:solidFill>
                 <a:latin typeface="Calibri"/>
               </a:rPr>
-              <a:t>The Art of Computer Programming, Vol. 1. Fundamental Algorithms, Section 2.2. Linear Lists (Stacks and Queues).</a:t>
+              <a:t>Abstract Data Types define the behaviors (API) and operations, decoupling from physical memory representations.</a:t>
             </a:r>
           </a:p>
           <a:p>
             <a:pPr algn="l">
               <a:lnSpc>
-                <a:spcPct val="140000"/>
+                <a:spcPct val="145000"/>
               </a:lnSpc>
               <a:spcAft>
                 <a:spcPts val="400"/>
               </a:spcAft>
             </a:pPr>
             <a:r>
-              <a:rPr sz="1600" b="1">
-                <a:solidFill>
-                  <a:srgbClr val="127A8A"/>
+              <a:rPr sz="1800" b="1">
+                <a:solidFill>
+                  <a:srgbClr val="E0A81F"/>
                 </a:solidFill>
                 <a:latin typeface="Calibri"/>
               </a:rPr>
               <a:t>▸  </a:t>
             </a:r>
             <a:r>
-              <a:rPr sz="1600" b="1">
-                <a:solidFill>
-                  <a:srgbClr val="0B2A4A"/>
-                </a:solidFill>
-                <a:latin typeface="Calibri"/>
-              </a:rPr>
-              <a:t>CLRS 4th Ed.  </a:t>
-            </a:r>
-            <a:r>
-              <a:rPr sz="1600">
+              <a:rPr sz="1800">
                 <a:solidFill>
                   <a:srgbClr val="333D4A"/>
                 </a:solidFill>
                 <a:latin typeface="Calibri"/>
               </a:rPr>
-              <a:t>Cormen et al. Introduction to Algorithms. Chapter 10: Elementary Data Structures (Stacks and Queues).</a:t>
+              <a:t>A Stack is LIFO (Last-In-First-Out). Operations push, pop, and peek occur at the top of the stack.</a:t>
             </a:r>
           </a:p>
           <a:p>
             <a:pPr algn="l">
               <a:lnSpc>
-                <a:spcPct val="140000"/>
+                <a:spcPct val="145000"/>
               </a:lnSpc>
               <a:spcAft>
                 <a:spcPts val="400"/>
               </a:spcAft>
             </a:pPr>
             <a:r>
-              <a:rPr sz="1600" b="1">
-                <a:solidFill>
-                  <a:srgbClr val="127A8A"/>
+              <a:rPr sz="1800" b="1">
+                <a:solidFill>
+                  <a:srgbClr val="E0A81F"/>
                 </a:solidFill>
                 <a:latin typeface="Calibri"/>
               </a:rPr>
               <a:t>▸  </a:t>
             </a:r>
             <a:r>
-              <a:rPr sz="1600" b="1">
-                <a:solidFill>
-                  <a:srgbClr val="0B2A4A"/>
-                </a:solidFill>
-                <a:latin typeface="Calibri"/>
-              </a:rPr>
-              <a:t>Python Collections Documentation.  </a:t>
-            </a:r>
-            <a:r>
-              <a:rPr sz="1600">
+              <a:rPr sz="1800">
                 <a:solidFill>
                   <a:srgbClr val="333D4A"/>
                 </a:solidFill>
                 <a:latin typeface="Calibri"/>
               </a:rPr>
-              <a:t>Official reference for collections.deque, dynamic lists, and optimization mechanics.</a:t>
+              <a:t>A Queue is FIFO (First-In-First-Out). Elements are added at the rear and removed from the front.</a:t>
             </a:r>
           </a:p>
           <a:p>
             <a:pPr algn="l">
               <a:lnSpc>
-                <a:spcPct val="140000"/>
+                <a:spcPct val="145000"/>
               </a:lnSpc>
               <a:spcAft>
                 <a:spcPts val="400"/>
               </a:spcAft>
             </a:pPr>
             <a:r>
-              <a:rPr sz="1600" b="1">
-                <a:solidFill>
-                  <a:srgbClr val="127A8A"/>
+              <a:rPr sz="1800" b="1">
+                <a:solidFill>
+                  <a:srgbClr val="E0A81F"/>
                 </a:solidFill>
                 <a:latin typeface="Calibri"/>
               </a:rPr>
               <a:t>▸  </a:t>
             </a:r>
             <a:r>
-              <a:rPr sz="1600" b="1">
-                <a:solidFill>
-                  <a:srgbClr val="0B2A4A"/>
-                </a:solidFill>
-                <a:latin typeface="Calibri"/>
-              </a:rPr>
-              <a:t>LeetCode Challenges.  </a:t>
-            </a:r>
-            <a:r>
-              <a:rPr sz="1600">
+              <a:rPr sz="1800">
                 <a:solidFill>
                   <a:srgbClr val="333D4A"/>
                 </a:solidFill>
                 <a:latin typeface="Calibri"/>
               </a:rPr>
-              <a:t>Problems: 20 (Parentheses), 155 (Min Stack), 225 &amp; 232 (Cross Implementations), 239 (Monotonic Deque).</a:t>
+              <a:t>Stack implements O(1) easily using a Singly Linked List (at head) or dynamic array (at end).</a:t>
+            </a:r>
+          </a:p>
+          <a:p>
+            <a:pPr algn="l">
+              <a:lnSpc>
+                <a:spcPct val="145000"/>
+              </a:lnSpc>
+              <a:spcAft>
+                <a:spcPts val="400"/>
+              </a:spcAft>
+            </a:pPr>
+            <a:r>
+              <a:rPr sz="1800" b="1">
+                <a:solidFill>
+                  <a:srgbClr val="E0A81F"/>
+                </a:solidFill>
+                <a:latin typeface="Calibri"/>
+              </a:rPr>
+              <a:t>▸  </a:t>
+            </a:r>
+            <a:r>
+              <a:rPr sz="1800">
+                <a:solidFill>
+                  <a:srgbClr val="333D4A"/>
+                </a:solidFill>
+                <a:latin typeface="Calibri"/>
+              </a:rPr>
+              <a:t>Queue requires dual pointers (front and rear) in a Linked List for O(1) performance.</a:t>
+            </a:r>
+          </a:p>
+          <a:p>
+            <a:pPr algn="l">
+              <a:lnSpc>
+                <a:spcPct val="145000"/>
+              </a:lnSpc>
+              <a:spcAft>
+                <a:spcPts val="400"/>
+              </a:spcAft>
+            </a:pPr>
+            <a:r>
+              <a:rPr sz="1800" b="1">
+                <a:solidFill>
+                  <a:srgbClr val="E0A81F"/>
+                </a:solidFill>
+                <a:latin typeface="Calibri"/>
+              </a:rPr>
+              <a:t>▸  </a:t>
+            </a:r>
+            <a:r>
+              <a:rPr sz="1800">
+                <a:solidFill>
+                  <a:srgbClr val="333D4A"/>
+                </a:solidFill>
+                <a:latin typeface="Calibri"/>
+              </a:rPr>
+              <a:t>Queue in arrays is implemented as a Circular Buffer to avoid O(N) element shifting.</a:t>
             </a:r>
           </a:p>
         </p:txBody>
@@ -10324,6 +13006,467 @@
         <p:spPr>
           <a:xfrm>
             <a:off x="0" y="0"/>
+            <a:ext cx="320040" cy="6858000"/>
+          </a:xfrm>
+          <a:prstGeom prst="rect">
+            <a:avLst/>
+          </a:prstGeom>
+          <a:solidFill>
+            <a:srgbClr val="0B2A4A"/>
+          </a:solidFill>
+          <a:ln>
+            <a:noFill/>
+          </a:ln>
+          <a:effectLst/>
+        </p:spPr>
+        <p:style>
+          <a:lnRef idx="1">
+            <a:schemeClr val="accent1"/>
+          </a:lnRef>
+          <a:fillRef idx="3">
+            <a:schemeClr val="accent1"/>
+          </a:fillRef>
+          <a:effectRef idx="2">
+            <a:schemeClr val="accent1"/>
+          </a:effectRef>
+          <a:fontRef idx="minor">
+            <a:schemeClr val="lt1"/>
+          </a:fontRef>
+        </p:style>
+        <p:txBody>
+          <a:bodyPr rtlCol="0" anchor="ctr"/>
+          <a:lstStyle/>
+          <a:p>
+            <a:pPr algn="ctr"/>
+          </a:p>
+        </p:txBody>
+      </p:sp>
+      <p:sp>
+        <p:nvSpPr>
+          <p:cNvPr id="3" name="Rectangle 2"/>
+          <p:cNvSpPr/>
+          <p:nvPr/>
+        </p:nvSpPr>
+        <p:spPr>
+          <a:xfrm>
+            <a:off x="320040" y="0"/>
+            <a:ext cx="11871655" cy="73152"/>
+          </a:xfrm>
+          <a:prstGeom prst="rect">
+            <a:avLst/>
+          </a:prstGeom>
+          <a:solidFill>
+            <a:srgbClr val="E0A81F"/>
+          </a:solidFill>
+          <a:ln>
+            <a:noFill/>
+          </a:ln>
+          <a:effectLst/>
+        </p:spPr>
+        <p:style>
+          <a:lnRef idx="1">
+            <a:schemeClr val="accent1"/>
+          </a:lnRef>
+          <a:fillRef idx="3">
+            <a:schemeClr val="accent1"/>
+          </a:fillRef>
+          <a:effectRef idx="2">
+            <a:schemeClr val="accent1"/>
+          </a:effectRef>
+          <a:fontRef idx="minor">
+            <a:schemeClr val="lt1"/>
+          </a:fontRef>
+        </p:style>
+        <p:txBody>
+          <a:bodyPr rtlCol="0" anchor="ctr"/>
+          <a:lstStyle/>
+          <a:p>
+            <a:pPr algn="ctr"/>
+          </a:p>
+        </p:txBody>
+      </p:sp>
+      <p:sp>
+        <p:nvSpPr>
+          <p:cNvPr id="4" name="TextBox 3"/>
+          <p:cNvSpPr txBox="1"/>
+          <p:nvPr/>
+        </p:nvSpPr>
+        <p:spPr>
+          <a:xfrm>
+            <a:off x="548640" y="164592"/>
+            <a:ext cx="10515600" cy="640080"/>
+          </a:xfrm>
+          <a:prstGeom prst="rect">
+            <a:avLst/>
+          </a:prstGeom>
+          <a:noFill/>
+        </p:spPr>
+        <p:txBody>
+          <a:bodyPr wrap="square" lIns="45720" rIns="45720" tIns="18288" bIns="18288" anchor="t">
+            <a:spAutoFit/>
+          </a:bodyPr>
+          <a:lstStyle/>
+          <a:p>
+            <a:pPr algn="l"/>
+            <a:r>
+              <a:rPr sz="3000" b="1" i="0">
+                <a:solidFill>
+                  <a:srgbClr val="0B2A4A"/>
+                </a:solidFill>
+                <a:latin typeface="Calibri"/>
+              </a:rPr>
+              <a:t>References &amp; Further Reading</a:t>
+            </a:r>
+          </a:p>
+        </p:txBody>
+      </p:sp>
+      <p:sp>
+        <p:nvSpPr>
+          <p:cNvPr id="5" name="TextBox 4"/>
+          <p:cNvSpPr txBox="1"/>
+          <p:nvPr/>
+        </p:nvSpPr>
+        <p:spPr>
+          <a:xfrm>
+            <a:off x="548640" y="713232"/>
+            <a:ext cx="10515600" cy="411480"/>
+          </a:xfrm>
+          <a:prstGeom prst="rect">
+            <a:avLst/>
+          </a:prstGeom>
+          <a:noFill/>
+        </p:spPr>
+        <p:txBody>
+          <a:bodyPr wrap="square" lIns="45720" rIns="45720" tIns="18288" bIns="18288" anchor="t">
+            <a:spAutoFit/>
+          </a:bodyPr>
+          <a:lstStyle/>
+          <a:p>
+            <a:pPr algn="l"/>
+            <a:r>
+              <a:rPr sz="1500" b="0" i="1">
+                <a:solidFill>
+                  <a:srgbClr val="127A8A"/>
+                </a:solidFill>
+                <a:latin typeface="Calibri"/>
+              </a:rPr>
+              <a:t>Resources for deeper study</a:t>
+            </a:r>
+          </a:p>
+        </p:txBody>
+      </p:sp>
+      <p:sp>
+        <p:nvSpPr>
+          <p:cNvPr id="6" name="Rectangle 5"/>
+          <p:cNvSpPr/>
+          <p:nvPr/>
+        </p:nvSpPr>
+        <p:spPr>
+          <a:xfrm>
+            <a:off x="548640" y="1115568"/>
+            <a:ext cx="1828800" cy="36576"/>
+          </a:xfrm>
+          <a:prstGeom prst="rect">
+            <a:avLst/>
+          </a:prstGeom>
+          <a:solidFill>
+            <a:srgbClr val="E0A81F"/>
+          </a:solidFill>
+          <a:ln>
+            <a:noFill/>
+          </a:ln>
+          <a:effectLst/>
+        </p:spPr>
+        <p:style>
+          <a:lnRef idx="1">
+            <a:schemeClr val="accent1"/>
+          </a:lnRef>
+          <a:fillRef idx="3">
+            <a:schemeClr val="accent1"/>
+          </a:fillRef>
+          <a:effectRef idx="2">
+            <a:schemeClr val="accent1"/>
+          </a:effectRef>
+          <a:fontRef idx="minor">
+            <a:schemeClr val="lt1"/>
+          </a:fontRef>
+        </p:style>
+        <p:txBody>
+          <a:bodyPr rtlCol="0" anchor="ctr"/>
+          <a:lstStyle/>
+          <a:p>
+            <a:pPr algn="ctr"/>
+          </a:p>
+        </p:txBody>
+      </p:sp>
+      <p:sp>
+        <p:nvSpPr>
+          <p:cNvPr id="7" name="TextBox 6"/>
+          <p:cNvSpPr txBox="1"/>
+          <p:nvPr/>
+        </p:nvSpPr>
+        <p:spPr>
+          <a:xfrm>
+            <a:off x="548640" y="6446520"/>
+            <a:ext cx="7315200" cy="274320"/>
+          </a:xfrm>
+          <a:prstGeom prst="rect">
+            <a:avLst/>
+          </a:prstGeom>
+          <a:noFill/>
+        </p:spPr>
+        <p:txBody>
+          <a:bodyPr wrap="square" lIns="45720" rIns="45720" tIns="18288" bIns="18288" anchor="t">
+            <a:spAutoFit/>
+          </a:bodyPr>
+          <a:lstStyle/>
+          <a:p>
+            <a:pPr algn="l"/>
+            <a:r>
+              <a:rPr sz="1000" b="0" i="1">
+                <a:solidFill>
+                  <a:srgbClr val="333D4A"/>
+                </a:solidFill>
+                <a:latin typeface="Calibri"/>
+              </a:rPr>
+              <a:t>Data Structures &amp; Algorithms · Week 03 Supplement · Stacks &amp; Queues</a:t>
+            </a:r>
+          </a:p>
+        </p:txBody>
+      </p:sp>
+      <p:sp>
+        <p:nvSpPr>
+          <p:cNvPr id="8" name="TextBox 7"/>
+          <p:cNvSpPr txBox="1"/>
+          <p:nvPr/>
+        </p:nvSpPr>
+        <p:spPr>
+          <a:xfrm>
+            <a:off x="10728655" y="6446520"/>
+            <a:ext cx="1097280" cy="274320"/>
+          </a:xfrm>
+          <a:prstGeom prst="rect">
+            <a:avLst/>
+          </a:prstGeom>
+          <a:noFill/>
+        </p:spPr>
+        <p:txBody>
+          <a:bodyPr wrap="square" lIns="45720" rIns="45720" tIns="18288" bIns="18288" anchor="t">
+            <a:spAutoFit/>
+          </a:bodyPr>
+          <a:lstStyle/>
+          <a:p>
+            <a:pPr algn="r"/>
+            <a:r>
+              <a:rPr sz="1000" b="0" i="0">
+                <a:solidFill>
+                  <a:srgbClr val="333D4A"/>
+                </a:solidFill>
+                <a:latin typeface="Calibri"/>
+              </a:rPr>
+              <a:t>Slide 17 / 18</a:t>
+            </a:r>
+          </a:p>
+        </p:txBody>
+      </p:sp>
+      <p:sp>
+        <p:nvSpPr>
+          <p:cNvPr id="9" name="TextBox 8"/>
+          <p:cNvSpPr txBox="1"/>
+          <p:nvPr/>
+        </p:nvSpPr>
+        <p:spPr>
+          <a:xfrm>
+            <a:off x="822960" y="1417320"/>
+            <a:ext cx="11064240" cy="5120640"/>
+          </a:xfrm>
+          <a:prstGeom prst="rect">
+            <a:avLst/>
+          </a:prstGeom>
+          <a:noFill/>
+        </p:spPr>
+        <p:txBody>
+          <a:bodyPr wrap="square" lIns="45720" rIns="45720">
+            <a:spAutoFit/>
+          </a:bodyPr>
+          <a:lstStyle/>
+          <a:p>
+            <a:pPr algn="l">
+              <a:lnSpc>
+                <a:spcPct val="140000"/>
+              </a:lnSpc>
+              <a:spcAft>
+                <a:spcPts val="400"/>
+              </a:spcAft>
+            </a:pPr>
+            <a:r>
+              <a:rPr sz="1600" b="1">
+                <a:solidFill>
+                  <a:srgbClr val="127A8A"/>
+                </a:solidFill>
+                <a:latin typeface="Calibri"/>
+              </a:rPr>
+              <a:t>▸  </a:t>
+            </a:r>
+            <a:r>
+              <a:rPr sz="1600" b="1">
+                <a:solidFill>
+                  <a:srgbClr val="0B2A4A"/>
+                </a:solidFill>
+                <a:latin typeface="Calibri"/>
+              </a:rPr>
+              <a:t>Knuth, D. E.  </a:t>
+            </a:r>
+            <a:r>
+              <a:rPr sz="1600">
+                <a:solidFill>
+                  <a:srgbClr val="333D4A"/>
+                </a:solidFill>
+                <a:latin typeface="Calibri"/>
+              </a:rPr>
+              <a:t>The Art of Computer Programming, Vol. 1. Fundamental Algorithms, Section 2.2. Linear Lists (Stacks and Queues).</a:t>
+            </a:r>
+          </a:p>
+          <a:p>
+            <a:pPr algn="l">
+              <a:lnSpc>
+                <a:spcPct val="140000"/>
+              </a:lnSpc>
+              <a:spcAft>
+                <a:spcPts val="400"/>
+              </a:spcAft>
+            </a:pPr>
+            <a:r>
+              <a:rPr sz="1600" b="1">
+                <a:solidFill>
+                  <a:srgbClr val="127A8A"/>
+                </a:solidFill>
+                <a:latin typeface="Calibri"/>
+              </a:rPr>
+              <a:t>▸  </a:t>
+            </a:r>
+            <a:r>
+              <a:rPr sz="1600" b="1">
+                <a:solidFill>
+                  <a:srgbClr val="0B2A4A"/>
+                </a:solidFill>
+                <a:latin typeface="Calibri"/>
+              </a:rPr>
+              <a:t>CLRS 4th Ed.  </a:t>
+            </a:r>
+            <a:r>
+              <a:rPr sz="1600">
+                <a:solidFill>
+                  <a:srgbClr val="333D4A"/>
+                </a:solidFill>
+                <a:latin typeface="Calibri"/>
+              </a:rPr>
+              <a:t>Cormen et al. Introduction to Algorithms. Chapter 10: Elementary Data Structures (Stacks and Queues).</a:t>
+            </a:r>
+          </a:p>
+          <a:p>
+            <a:pPr algn="l">
+              <a:lnSpc>
+                <a:spcPct val="140000"/>
+              </a:lnSpc>
+              <a:spcAft>
+                <a:spcPts val="400"/>
+              </a:spcAft>
+            </a:pPr>
+            <a:r>
+              <a:rPr sz="1600" b="1">
+                <a:solidFill>
+                  <a:srgbClr val="127A8A"/>
+                </a:solidFill>
+                <a:latin typeface="Calibri"/>
+              </a:rPr>
+              <a:t>▸  </a:t>
+            </a:r>
+            <a:r>
+              <a:rPr sz="1600" b="1">
+                <a:solidFill>
+                  <a:srgbClr val="0B2A4A"/>
+                </a:solidFill>
+                <a:latin typeface="Calibri"/>
+              </a:rPr>
+              <a:t>Python Collections Documentation.  </a:t>
+            </a:r>
+            <a:r>
+              <a:rPr sz="1600">
+                <a:solidFill>
+                  <a:srgbClr val="333D4A"/>
+                </a:solidFill>
+                <a:latin typeface="Calibri"/>
+              </a:rPr>
+              <a:t>Official reference for collections.deque, dynamic lists, and optimization mechanics.</a:t>
+            </a:r>
+          </a:p>
+          <a:p>
+            <a:pPr algn="l">
+              <a:lnSpc>
+                <a:spcPct val="140000"/>
+              </a:lnSpc>
+              <a:spcAft>
+                <a:spcPts val="400"/>
+              </a:spcAft>
+            </a:pPr>
+            <a:r>
+              <a:rPr sz="1600" b="1">
+                <a:solidFill>
+                  <a:srgbClr val="127A8A"/>
+                </a:solidFill>
+                <a:latin typeface="Calibri"/>
+              </a:rPr>
+              <a:t>▸  </a:t>
+            </a:r>
+            <a:r>
+              <a:rPr sz="1600" b="1">
+                <a:solidFill>
+                  <a:srgbClr val="0B2A4A"/>
+                </a:solidFill>
+                <a:latin typeface="Calibri"/>
+              </a:rPr>
+              <a:t>LeetCode Challenges.  </a:t>
+            </a:r>
+            <a:r>
+              <a:rPr sz="1600">
+                <a:solidFill>
+                  <a:srgbClr val="333D4A"/>
+                </a:solidFill>
+                <a:latin typeface="Calibri"/>
+              </a:rPr>
+              <a:t>Problems: 20 (Parentheses), 155 (Min Stack), 225 &amp; 232 (Cross Implementations), 239 (Monotonic Deque).</a:t>
+            </a:r>
+          </a:p>
+        </p:txBody>
+      </p:sp>
+    </p:spTree>
+  </p:cSld>
+  <p:clrMapOvr>
+    <a:masterClrMapping/>
+  </p:clrMapOvr>
+</p:sld>
+</file>
+
+<file path=ppt/slides/slide18.xml><?xml version="1.0" encoding="utf-8"?>
+<p:sld xmlns:a="http://schemas.openxmlformats.org/drawingml/2006/main" xmlns:p="http://schemas.openxmlformats.org/presentationml/2006/main" xmlns:r="http://schemas.openxmlformats.org/officeDocument/2006/relationships">
+  <p:cSld>
+    <p:spTree>
+      <p:nvGrpSpPr>
+        <p:cNvPr id="1" name=""/>
+        <p:cNvGrpSpPr/>
+        <p:nvPr/>
+      </p:nvGrpSpPr>
+      <p:grpSpPr/>
+      <p:sp>
+        <p:nvSpPr>
+          <p:cNvPr id="2" name="Rectangle 1"/>
+          <p:cNvSpPr/>
+          <p:nvPr/>
+        </p:nvSpPr>
+        <p:spPr>
+          <a:xfrm>
+            <a:off x="0" y="0"/>
             <a:ext cx="12191695" cy="6858000"/>
           </a:xfrm>
           <a:prstGeom prst="rect">
@@ -10907,7 +14050,7 @@
                 </a:solidFill>
                 <a:latin typeface="Calibri"/>
               </a:rPr>
-              <a:t>Slide 2 / 17</a:t>
+              <a:t>Slide 2 / 18</a:t>
             </a:r>
           </a:p>
         </p:txBody>
@@ -11516,7 +14659,7 @@
                 </a:solidFill>
                 <a:latin typeface="Calibri"/>
               </a:rPr>
-              <a:t>Slide 3 / 17</a:t>
+              <a:t>Slide 3 / 18</a:t>
             </a:r>
           </a:p>
         </p:txBody>
@@ -12251,7 +15394,7 @@
                 </a:solidFill>
                 <a:latin typeface="Calibri"/>
               </a:rPr>
-              <a:t>Slide 4 / 17</a:t>
+              <a:t>Slide 4 / 18</a:t>
             </a:r>
           </a:p>
         </p:txBody>
@@ -13235,7 +16378,7 @@
                 </a:solidFill>
                 <a:latin typeface="Calibri"/>
               </a:rPr>
-              <a:t>Slide 5 / 17</a:t>
+              <a:t>Slide 5 / 18</a:t>
             </a:r>
           </a:p>
         </p:txBody>
@@ -15141,7 +18284,7 @@
                 </a:solidFill>
                 <a:latin typeface="Calibri"/>
               </a:rPr>
-              <a:t>Slide 6 / 17</a:t>
+              <a:t>Slide 6 / 18</a:t>
             </a:r>
           </a:p>
         </p:txBody>
@@ -16052,7 +19195,7 @@
                 </a:solidFill>
                 <a:latin typeface="Calibri"/>
               </a:rPr>
-              <a:t>Slide 7 / 17</a:t>
+              <a:t>Slide 7 / 18</a:t>
             </a:r>
           </a:p>
         </p:txBody>
@@ -16915,7 +20058,7 @@
                 </a:solidFill>
                 <a:latin typeface="Calibri"/>
               </a:rPr>
-              <a:t>Slide 8 / 17</a:t>
+              <a:t>Slide 8 / 18</a:t>
             </a:r>
           </a:p>
         </p:txBody>
@@ -17926,7 +21069,7 @@
                 </a:solidFill>
                 <a:latin typeface="Calibri"/>
               </a:rPr>
-              <a:t>Slide 9 / 17</a:t>
+              <a:t>Slide 9 / 18</a:t>
             </a:r>
           </a:p>
         </p:txBody>
